--- a/documentation/Presentation-IMDB_RAG-Model.pptx
+++ b/documentation/Presentation-IMDB_RAG-Model.pptx
@@ -13,18 +13,21 @@
     <p:sldId id="261" r:id="rId7"/>
     <p:sldId id="262" r:id="rId8"/>
     <p:sldId id="263" r:id="rId9"/>
-    <p:sldId id="265" r:id="rId10"/>
-    <p:sldId id="266" r:id="rId11"/>
-    <p:sldId id="268" r:id="rId12"/>
-    <p:sldId id="269" r:id="rId13"/>
-    <p:sldId id="272" r:id="rId14"/>
-    <p:sldId id="277" r:id="rId15"/>
-    <p:sldId id="274" r:id="rId16"/>
-    <p:sldId id="273" r:id="rId17"/>
-    <p:sldId id="271" r:id="rId18"/>
-    <p:sldId id="276" r:id="rId19"/>
-    <p:sldId id="270" r:id="rId20"/>
-    <p:sldId id="275" r:id="rId21"/>
+    <p:sldId id="278" r:id="rId10"/>
+    <p:sldId id="272" r:id="rId11"/>
+    <p:sldId id="266" r:id="rId12"/>
+    <p:sldId id="268" r:id="rId13"/>
+    <p:sldId id="265" r:id="rId14"/>
+    <p:sldId id="269" r:id="rId15"/>
+    <p:sldId id="277" r:id="rId16"/>
+    <p:sldId id="279" r:id="rId17"/>
+    <p:sldId id="274" r:id="rId18"/>
+    <p:sldId id="280" r:id="rId19"/>
+    <p:sldId id="273" r:id="rId20"/>
+    <p:sldId id="271" r:id="rId21"/>
+    <p:sldId id="276" r:id="rId22"/>
+    <p:sldId id="270" r:id="rId23"/>
+    <p:sldId id="275" r:id="rId24"/>
   </p:sldIdLst>
   <p:sldSz cx="12192000" cy="6858000"/>
   <p:notesSz cx="6858000" cy="9144000"/>
@@ -134,7 +137,7 @@
 <file path=ppt/revisionInfo.xml><?xml version="1.0" encoding="utf-8"?>
 <p1510:revInfo xmlns:a="http://schemas.openxmlformats.org/drawingml/2006/main" xmlns:r="http://schemas.openxmlformats.org/officeDocument/2006/relationships" xmlns:p1510="http://schemas.microsoft.com/office/powerpoint/2015/10/main">
   <p1510:revLst>
-    <p1510:client id="{9E3F5505-8ECE-437C-A44B-78EEAB5B6E8B}" v="97" dt="2026-07-25T23:43:20.792"/>
+    <p1510:client id="{9E3F5505-8ECE-437C-A44B-78EEAB5B6E8B}" v="102" dt="2026-07-26T14:18:49.158"/>
   </p1510:revLst>
 </p1510:revInfo>
 </file>
@@ -144,7 +147,7 @@
   <pc:docChgLst>
     <pc:chgData name="Swati Mishra" userId="4ecbbe41-a93b-48f9-aa26-d01cbfd2c273" providerId="ADAL" clId="{66DB6158-1A18-4199-BA6D-06674FF3C921}"/>
     <pc:docChg chg="undo custSel addSld delSld modSld sldOrd addMainMaster delMainMaster modMainMaster">
-      <pc:chgData name="Swati Mishra" userId="4ecbbe41-a93b-48f9-aa26-d01cbfd2c273" providerId="ADAL" clId="{66DB6158-1A18-4199-BA6D-06674FF3C921}" dt="2026-07-25T23:44:13.796" v="2297" actId="14100"/>
+      <pc:chgData name="Swati Mishra" userId="4ecbbe41-a93b-48f9-aa26-d01cbfd2c273" providerId="ADAL" clId="{66DB6158-1A18-4199-BA6D-06674FF3C921}" dt="2026-07-26T15:29:12.226" v="2474" actId="20577"/>
       <pc:docMkLst>
         <pc:docMk/>
       </pc:docMkLst>
@@ -516,7 +519,7 @@
         </pc:cxnChg>
       </pc:sldChg>
       <pc:sldChg chg="addSp delSp modSp new mod setBg setClrOvrMap delDesignElem">
-        <pc:chgData name="Swati Mishra" userId="4ecbbe41-a93b-48f9-aa26-d01cbfd2c273" providerId="ADAL" clId="{66DB6158-1A18-4199-BA6D-06674FF3C921}" dt="2026-07-25T22:26:21.803" v="2146" actId="5793"/>
+        <pc:chgData name="Swati Mishra" userId="4ecbbe41-a93b-48f9-aa26-d01cbfd2c273" providerId="ADAL" clId="{66DB6158-1A18-4199-BA6D-06674FF3C921}" dt="2026-07-26T15:19:07.753" v="2473" actId="20577"/>
         <pc:sldMkLst>
           <pc:docMk/>
           <pc:sldMk cId="546928768" sldId="257"/>
@@ -586,7 +589,7 @@
           </ac:spMkLst>
         </pc:spChg>
         <pc:spChg chg="add mod">
-          <ac:chgData name="Swati Mishra" userId="4ecbbe41-a93b-48f9-aa26-d01cbfd2c273" providerId="ADAL" clId="{66DB6158-1A18-4199-BA6D-06674FF3C921}" dt="2026-07-25T22:26:21.803" v="2146" actId="5793"/>
+          <ac:chgData name="Swati Mishra" userId="4ecbbe41-a93b-48f9-aa26-d01cbfd2c273" providerId="ADAL" clId="{66DB6158-1A18-4199-BA6D-06674FF3C921}" dt="2026-07-26T15:19:07.753" v="2473" actId="20577"/>
           <ac:spMkLst>
             <pc:docMk/>
             <pc:sldMk cId="546928768" sldId="257"/>
@@ -696,7 +699,7 @@
         </pc:spChg>
       </pc:sldChg>
       <pc:sldChg chg="addSp delSp modSp add mod setBg delDesignElem">
-        <pc:chgData name="Swati Mishra" userId="4ecbbe41-a93b-48f9-aa26-d01cbfd2c273" providerId="ADAL" clId="{66DB6158-1A18-4199-BA6D-06674FF3C921}" dt="2026-07-25T22:01:41.916" v="2028"/>
+        <pc:chgData name="Swati Mishra" userId="4ecbbe41-a93b-48f9-aa26-d01cbfd2c273" providerId="ADAL" clId="{66DB6158-1A18-4199-BA6D-06674FF3C921}" dt="2026-07-26T15:29:12.226" v="2474" actId="20577"/>
         <pc:sldMkLst>
           <pc:docMk/>
           <pc:sldMk cId="3560896514" sldId="260"/>
@@ -710,7 +713,7 @@
           </ac:spMkLst>
         </pc:spChg>
         <pc:spChg chg="mod">
-          <ac:chgData name="Swati Mishra" userId="4ecbbe41-a93b-48f9-aa26-d01cbfd2c273" providerId="ADAL" clId="{66DB6158-1A18-4199-BA6D-06674FF3C921}" dt="2026-07-25T22:01:41.916" v="2028"/>
+          <ac:chgData name="Swati Mishra" userId="4ecbbe41-a93b-48f9-aa26-d01cbfd2c273" providerId="ADAL" clId="{66DB6158-1A18-4199-BA6D-06674FF3C921}" dt="2026-07-26T15:29:12.226" v="2474" actId="20577"/>
           <ac:spMkLst>
             <pc:docMk/>
             <pc:sldMk cId="3560896514" sldId="260"/>
@@ -993,8 +996,8 @@
           </ac:spMkLst>
         </pc:spChg>
       </pc:sldChg>
-      <pc:sldChg chg="addSp delSp modSp new mod setBg setClrOvrMap delDesignElem">
-        <pc:chgData name="Swati Mishra" userId="4ecbbe41-a93b-48f9-aa26-d01cbfd2c273" providerId="ADAL" clId="{66DB6158-1A18-4199-BA6D-06674FF3C921}" dt="2026-07-25T22:31:01.626" v="2215" actId="113"/>
+      <pc:sldChg chg="addSp delSp modSp new mod ord setBg setClrOvrMap delDesignElem">
+        <pc:chgData name="Swati Mishra" userId="4ecbbe41-a93b-48f9-aa26-d01cbfd2c273" providerId="ADAL" clId="{66DB6158-1A18-4199-BA6D-06674FF3C921}" dt="2026-07-26T15:17:56.334" v="2471"/>
         <pc:sldMkLst>
           <pc:docMk/>
           <pc:sldMk cId="397872167" sldId="265"/>
@@ -1491,7 +1494,7 @@
         </pc:spChg>
       </pc:sldChg>
       <pc:sldChg chg="addSp delSp modSp new mod ord">
-        <pc:chgData name="Swati Mishra" userId="4ecbbe41-a93b-48f9-aa26-d01cbfd2c273" providerId="ADAL" clId="{66DB6158-1A18-4199-BA6D-06674FF3C921}" dt="2026-07-25T23:44:13.796" v="2297" actId="14100"/>
+        <pc:chgData name="Swati Mishra" userId="4ecbbe41-a93b-48f9-aa26-d01cbfd2c273" providerId="ADAL" clId="{66DB6158-1A18-4199-BA6D-06674FF3C921}" dt="2026-07-26T13:34:24.468" v="2350"/>
         <pc:sldMkLst>
           <pc:docMk/>
           <pc:sldMk cId="2839999341" sldId="272"/>
@@ -1568,14 +1571,14 @@
           </ac:cxnSpMkLst>
         </pc:cxnChg>
       </pc:sldChg>
-      <pc:sldChg chg="addSp delSp modSp new mod ord">
-        <pc:chgData name="Swati Mishra" userId="4ecbbe41-a93b-48f9-aa26-d01cbfd2c273" providerId="ADAL" clId="{66DB6158-1A18-4199-BA6D-06674FF3C921}" dt="2026-07-25T23:40:34.688" v="2240" actId="14100"/>
+      <pc:sldChg chg="addSp delSp modSp new mod ord setBg addAnim delAnim setClrOvrMap">
+        <pc:chgData name="Swati Mishra" userId="4ecbbe41-a93b-48f9-aa26-d01cbfd2c273" providerId="ADAL" clId="{66DB6158-1A18-4199-BA6D-06674FF3C921}" dt="2026-07-26T14:20:11.567" v="2469" actId="20577"/>
         <pc:sldMkLst>
           <pc:docMk/>
           <pc:sldMk cId="1211648863" sldId="274"/>
         </pc:sldMkLst>
         <pc:spChg chg="mod">
-          <ac:chgData name="Swati Mishra" userId="4ecbbe41-a93b-48f9-aa26-d01cbfd2c273" providerId="ADAL" clId="{66DB6158-1A18-4199-BA6D-06674FF3C921}" dt="2026-07-25T21:55:52.323" v="1832"/>
+          <ac:chgData name="Swati Mishra" userId="4ecbbe41-a93b-48f9-aa26-d01cbfd2c273" providerId="ADAL" clId="{66DB6158-1A18-4199-BA6D-06674FF3C921}" dt="2026-07-26T14:20:11.567" v="2469" actId="20577"/>
           <ac:spMkLst>
             <pc:docMk/>
             <pc:sldMk cId="1211648863" sldId="274"/>
@@ -1590,12 +1593,92 @@
             <ac:spMk id="3" creationId="{BB1468DC-0BB7-CAC7-3464-24E1FDAEED28}"/>
           </ac:spMkLst>
         </pc:spChg>
+        <pc:spChg chg="add del mod">
+          <ac:chgData name="Swati Mishra" userId="4ecbbe41-a93b-48f9-aa26-d01cbfd2c273" providerId="ADAL" clId="{66DB6158-1A18-4199-BA6D-06674FF3C921}" dt="2026-07-26T14:13:33.517" v="2388" actId="478"/>
+          <ac:spMkLst>
+            <pc:docMk/>
+            <pc:sldMk cId="1211648863" sldId="274"/>
+            <ac:spMk id="4" creationId="{EBE0804E-912A-6477-61C8-139D72ED9987}"/>
+          </ac:spMkLst>
+        </pc:spChg>
+        <pc:spChg chg="add del">
+          <ac:chgData name="Swati Mishra" userId="4ecbbe41-a93b-48f9-aa26-d01cbfd2c273" providerId="ADAL" clId="{66DB6158-1A18-4199-BA6D-06674FF3C921}" dt="2026-07-26T14:19:49.432" v="2458" actId="26606"/>
+          <ac:spMkLst>
+            <pc:docMk/>
+            <pc:sldMk cId="1211648863" sldId="274"/>
+            <ac:spMk id="10" creationId="{B2ADCE7A-5E56-4C8E-B245-E2EEDA79C7E1}"/>
+          </ac:spMkLst>
+        </pc:spChg>
+        <pc:spChg chg="add del">
+          <ac:chgData name="Swati Mishra" userId="4ecbbe41-a93b-48f9-aa26-d01cbfd2c273" providerId="ADAL" clId="{66DB6158-1A18-4199-BA6D-06674FF3C921}" dt="2026-07-26T14:19:49.432" v="2458" actId="26606"/>
+          <ac:spMkLst>
+            <pc:docMk/>
+            <pc:sldMk cId="1211648863" sldId="274"/>
+            <ac:spMk id="12" creationId="{027A2F77-6BCE-423F-9C06-5D6A1FFE4EC1}"/>
+          </ac:spMkLst>
+        </pc:spChg>
+        <pc:spChg chg="add del">
+          <ac:chgData name="Swati Mishra" userId="4ecbbe41-a93b-48f9-aa26-d01cbfd2c273" providerId="ADAL" clId="{66DB6158-1A18-4199-BA6D-06674FF3C921}" dt="2026-07-26T14:19:49.432" v="2458" actId="26606"/>
+          <ac:spMkLst>
+            <pc:docMk/>
+            <pc:sldMk cId="1211648863" sldId="274"/>
+            <ac:spMk id="14" creationId="{20CB201F-BC0A-4D22-B7C7-230F82F61B93}"/>
+          </ac:spMkLst>
+        </pc:spChg>
+        <pc:spChg chg="add del">
+          <ac:chgData name="Swati Mishra" userId="4ecbbe41-a93b-48f9-aa26-d01cbfd2c273" providerId="ADAL" clId="{66DB6158-1A18-4199-BA6D-06674FF3C921}" dt="2026-07-26T14:19:51.874" v="2461" actId="26606"/>
+          <ac:spMkLst>
+            <pc:docMk/>
+            <pc:sldMk cId="1211648863" sldId="274"/>
+            <ac:spMk id="16" creationId="{96A777D5-8609-4912-93B5-481B46BF8AB3}"/>
+          </ac:spMkLst>
+        </pc:spChg>
+        <pc:spChg chg="add del">
+          <ac:chgData name="Swati Mishra" userId="4ecbbe41-a93b-48f9-aa26-d01cbfd2c273" providerId="ADAL" clId="{66DB6158-1A18-4199-BA6D-06674FF3C921}" dt="2026-07-26T14:19:51.874" v="2461" actId="26606"/>
+          <ac:spMkLst>
+            <pc:docMk/>
+            <pc:sldMk cId="1211648863" sldId="274"/>
+            <ac:spMk id="17" creationId="{67716BD9-62E5-4BC7-A28D-D0453343FDA1}"/>
+          </ac:spMkLst>
+        </pc:spChg>
+        <pc:spChg chg="add del">
+          <ac:chgData name="Swati Mishra" userId="4ecbbe41-a93b-48f9-aa26-d01cbfd2c273" providerId="ADAL" clId="{66DB6158-1A18-4199-BA6D-06674FF3C921}" dt="2026-07-26T14:19:53.747" v="2463" actId="26606"/>
+          <ac:spMkLst>
+            <pc:docMk/>
+            <pc:sldMk cId="1211648863" sldId="274"/>
+            <ac:spMk id="19" creationId="{B2ADCE7A-5E56-4C8E-B245-E2EEDA79C7E1}"/>
+          </ac:spMkLst>
+        </pc:spChg>
+        <pc:spChg chg="add del">
+          <ac:chgData name="Swati Mishra" userId="4ecbbe41-a93b-48f9-aa26-d01cbfd2c273" providerId="ADAL" clId="{66DB6158-1A18-4199-BA6D-06674FF3C921}" dt="2026-07-26T14:19:53.747" v="2463" actId="26606"/>
+          <ac:spMkLst>
+            <pc:docMk/>
+            <pc:sldMk cId="1211648863" sldId="274"/>
+            <ac:spMk id="20" creationId="{027A2F77-6BCE-423F-9C06-5D6A1FFE4EC1}"/>
+          </ac:spMkLst>
+        </pc:spChg>
+        <pc:spChg chg="add del">
+          <ac:chgData name="Swati Mishra" userId="4ecbbe41-a93b-48f9-aa26-d01cbfd2c273" providerId="ADAL" clId="{66DB6158-1A18-4199-BA6D-06674FF3C921}" dt="2026-07-26T14:19:53.747" v="2463" actId="26606"/>
+          <ac:spMkLst>
+            <pc:docMk/>
+            <pc:sldMk cId="1211648863" sldId="274"/>
+            <ac:spMk id="21" creationId="{20CB201F-BC0A-4D22-B7C7-230F82F61B93}"/>
+          </ac:spMkLst>
+        </pc:spChg>
         <pc:picChg chg="add mod">
-          <ac:chgData name="Swati Mishra" userId="4ecbbe41-a93b-48f9-aa26-d01cbfd2c273" providerId="ADAL" clId="{66DB6158-1A18-4199-BA6D-06674FF3C921}" dt="2026-07-25T23:40:34.688" v="2240" actId="14100"/>
+          <ac:chgData name="Swati Mishra" userId="4ecbbe41-a93b-48f9-aa26-d01cbfd2c273" providerId="ADAL" clId="{66DB6158-1A18-4199-BA6D-06674FF3C921}" dt="2026-07-26T14:19:55.268" v="2465" actId="26606"/>
           <ac:picMkLst>
             <pc:docMk/>
             <pc:sldMk cId="1211648863" sldId="274"/>
             <ac:picMk id="5" creationId="{9831C7F6-4335-062F-CF40-075C553B4D1C}"/>
+          </ac:picMkLst>
+        </pc:picChg>
+        <pc:picChg chg="add del mod">
+          <ac:chgData name="Swati Mishra" userId="4ecbbe41-a93b-48f9-aa26-d01cbfd2c273" providerId="ADAL" clId="{66DB6158-1A18-4199-BA6D-06674FF3C921}" dt="2026-07-26T14:19:41.661" v="2456" actId="478"/>
+          <ac:picMkLst>
+            <pc:docMk/>
+            <pc:sldMk cId="1211648863" sldId="274"/>
+            <ac:picMk id="7" creationId="{F7FA20A9-069A-5C35-51BD-41F192CA4B6C}"/>
           </ac:picMkLst>
         </pc:picChg>
       </pc:sldChg>
@@ -1849,6 +1932,155 @@
             <pc:docMk/>
             <pc:sldMk cId="3397407952" sldId="277"/>
             <ac:picMk id="7" creationId="{23DAD47B-AD3F-EA96-E8D1-6FF0B998391B}"/>
+          </ac:picMkLst>
+        </pc:picChg>
+      </pc:sldChg>
+      <pc:sldChg chg="addSp delSp modSp new mod setBg">
+        <pc:chgData name="Swati Mishra" userId="4ecbbe41-a93b-48f9-aa26-d01cbfd2c273" providerId="ADAL" clId="{66DB6158-1A18-4199-BA6D-06674FF3C921}" dt="2026-07-26T13:34:00.607" v="2348" actId="14100"/>
+        <pc:sldMkLst>
+          <pc:docMk/>
+          <pc:sldMk cId="4117573305" sldId="278"/>
+        </pc:sldMkLst>
+        <pc:spChg chg="mod">
+          <ac:chgData name="Swati Mishra" userId="4ecbbe41-a93b-48f9-aa26-d01cbfd2c273" providerId="ADAL" clId="{66DB6158-1A18-4199-BA6D-06674FF3C921}" dt="2026-07-26T13:33:31.320" v="2342" actId="14100"/>
+          <ac:spMkLst>
+            <pc:docMk/>
+            <pc:sldMk cId="4117573305" sldId="278"/>
+            <ac:spMk id="2" creationId="{68112A1F-0B24-FAE7-69E0-1FBAD0CBB90A}"/>
+          </ac:spMkLst>
+        </pc:spChg>
+        <pc:spChg chg="del">
+          <ac:chgData name="Swati Mishra" userId="4ecbbe41-a93b-48f9-aa26-d01cbfd2c273" providerId="ADAL" clId="{66DB6158-1A18-4199-BA6D-06674FF3C921}" dt="2026-07-26T13:32:38.280" v="2312" actId="478"/>
+          <ac:spMkLst>
+            <pc:docMk/>
+            <pc:sldMk cId="4117573305" sldId="278"/>
+            <ac:spMk id="3" creationId="{2E0A97A0-702E-236F-5578-F27C9D1BF7CF}"/>
+          </ac:spMkLst>
+        </pc:spChg>
+        <pc:spChg chg="add del">
+          <ac:chgData name="Swati Mishra" userId="4ecbbe41-a93b-48f9-aa26-d01cbfd2c273" providerId="ADAL" clId="{66DB6158-1A18-4199-BA6D-06674FF3C921}" dt="2026-07-26T13:32:40.090" v="2315" actId="22"/>
+          <ac:spMkLst>
+            <pc:docMk/>
+            <pc:sldMk cId="4117573305" sldId="278"/>
+            <ac:spMk id="5" creationId="{69A0F2DE-BC5E-C516-08CA-70B22B728ADD}"/>
+          </ac:spMkLst>
+        </pc:spChg>
+        <pc:spChg chg="add">
+          <ac:chgData name="Swati Mishra" userId="4ecbbe41-a93b-48f9-aa26-d01cbfd2c273" providerId="ADAL" clId="{66DB6158-1A18-4199-BA6D-06674FF3C921}" dt="2026-07-26T13:33:08.361" v="2318" actId="26606"/>
+          <ac:spMkLst>
+            <pc:docMk/>
+            <pc:sldMk cId="4117573305" sldId="278"/>
+            <ac:spMk id="12" creationId="{5BC51F77-AE74-4F38-B1DC-29475E38CABD}"/>
+          </ac:spMkLst>
+        </pc:spChg>
+        <pc:spChg chg="add">
+          <ac:chgData name="Swati Mishra" userId="4ecbbe41-a93b-48f9-aa26-d01cbfd2c273" providerId="ADAL" clId="{66DB6158-1A18-4199-BA6D-06674FF3C921}" dt="2026-07-26T13:33:08.361" v="2318" actId="26606"/>
+          <ac:spMkLst>
+            <pc:docMk/>
+            <pc:sldMk cId="4117573305" sldId="278"/>
+            <ac:spMk id="14" creationId="{FCE87B8C-E5AA-4044-AB91-DDA3084BE456}"/>
+          </ac:spMkLst>
+        </pc:spChg>
+        <pc:picChg chg="add mod">
+          <ac:chgData name="Swati Mishra" userId="4ecbbe41-a93b-48f9-aa26-d01cbfd2c273" providerId="ADAL" clId="{66DB6158-1A18-4199-BA6D-06674FF3C921}" dt="2026-07-26T13:34:00.607" v="2348" actId="14100"/>
+          <ac:picMkLst>
+            <pc:docMk/>
+            <pc:sldMk cId="4117573305" sldId="278"/>
+            <ac:picMk id="7" creationId="{9B3E4506-F92C-A1DA-EF8D-9BF6C925BE26}"/>
+          </ac:picMkLst>
+        </pc:picChg>
+      </pc:sldChg>
+      <pc:sldChg chg="addSp delSp modSp new mod setBg addAnim delAnim">
+        <pc:chgData name="Swati Mishra" userId="4ecbbe41-a93b-48f9-aa26-d01cbfd2c273" providerId="ADAL" clId="{66DB6158-1A18-4199-BA6D-06674FF3C921}" dt="2026-07-26T14:14:48.543" v="2409" actId="20577"/>
+        <pc:sldMkLst>
+          <pc:docMk/>
+          <pc:sldMk cId="750845343" sldId="279"/>
+        </pc:sldMkLst>
+        <pc:spChg chg="mod">
+          <ac:chgData name="Swati Mishra" userId="4ecbbe41-a93b-48f9-aa26-d01cbfd2c273" providerId="ADAL" clId="{66DB6158-1A18-4199-BA6D-06674FF3C921}" dt="2026-07-26T14:14:48.543" v="2409" actId="20577"/>
+          <ac:spMkLst>
+            <pc:docMk/>
+            <pc:sldMk cId="750845343" sldId="279"/>
+            <ac:spMk id="2" creationId="{815E4D83-628A-0C5A-C685-CAFD9C4F6FDC}"/>
+          </ac:spMkLst>
+        </pc:spChg>
+        <pc:spChg chg="del">
+          <ac:chgData name="Swati Mishra" userId="4ecbbe41-a93b-48f9-aa26-d01cbfd2c273" providerId="ADAL" clId="{66DB6158-1A18-4199-BA6D-06674FF3C921}" dt="2026-07-26T14:14:36.519" v="2396" actId="478"/>
+          <ac:spMkLst>
+            <pc:docMk/>
+            <pc:sldMk cId="750845343" sldId="279"/>
+            <ac:spMk id="3" creationId="{8F82DF9A-DADB-638F-709D-987CF1293B00}"/>
+          </ac:spMkLst>
+        </pc:spChg>
+        <pc:spChg chg="add del">
+          <ac:chgData name="Swati Mishra" userId="4ecbbe41-a93b-48f9-aa26-d01cbfd2c273" providerId="ADAL" clId="{66DB6158-1A18-4199-BA6D-06674FF3C921}" dt="2026-07-26T14:14:41.613" v="2399" actId="26606"/>
+          <ac:spMkLst>
+            <pc:docMk/>
+            <pc:sldMk cId="750845343" sldId="279"/>
+            <ac:spMk id="8" creationId="{BD1CAB03-F6A4-4736-85F6-261056424D9D}"/>
+          </ac:spMkLst>
+        </pc:spChg>
+        <pc:spChg chg="add del">
+          <ac:chgData name="Swati Mishra" userId="4ecbbe41-a93b-48f9-aa26-d01cbfd2c273" providerId="ADAL" clId="{66DB6158-1A18-4199-BA6D-06674FF3C921}" dt="2026-07-26T14:14:41.613" v="2399" actId="26606"/>
+          <ac:spMkLst>
+            <pc:docMk/>
+            <pc:sldMk cId="750845343" sldId="279"/>
+            <ac:spMk id="10" creationId="{3E2321B3-5D47-422E-8DD6-192DA485FF63}"/>
+          </ac:spMkLst>
+        </pc:spChg>
+        <pc:spChg chg="add">
+          <ac:chgData name="Swati Mishra" userId="4ecbbe41-a93b-48f9-aa26-d01cbfd2c273" providerId="ADAL" clId="{66DB6158-1A18-4199-BA6D-06674FF3C921}" dt="2026-07-26T14:14:41.703" v="2400" actId="26606"/>
+          <ac:spMkLst>
+            <pc:docMk/>
+            <pc:sldMk cId="750845343" sldId="279"/>
+            <ac:spMk id="13" creationId="{FC23C8D4-BD3D-4473-B3D0-89011586BE82}"/>
+          </ac:spMkLst>
+        </pc:spChg>
+        <pc:picChg chg="add del">
+          <ac:chgData name="Swati Mishra" userId="4ecbbe41-a93b-48f9-aa26-d01cbfd2c273" providerId="ADAL" clId="{66DB6158-1A18-4199-BA6D-06674FF3C921}" dt="2026-07-26T14:14:41.613" v="2399" actId="26606"/>
+          <ac:picMkLst>
+            <pc:docMk/>
+            <pc:sldMk cId="750845343" sldId="279"/>
+            <ac:picMk id="4" creationId="{D0945CD6-5A2E-F6DA-3894-44A6AAF94C86}"/>
+          </ac:picMkLst>
+        </pc:picChg>
+        <pc:picChg chg="add">
+          <ac:chgData name="Swati Mishra" userId="4ecbbe41-a93b-48f9-aa26-d01cbfd2c273" providerId="ADAL" clId="{66DB6158-1A18-4199-BA6D-06674FF3C921}" dt="2026-07-26T14:14:41.703" v="2400" actId="26606"/>
+          <ac:picMkLst>
+            <pc:docMk/>
+            <pc:sldMk cId="750845343" sldId="279"/>
+            <ac:picMk id="12" creationId="{B16C83E6-DF67-D96D-5BD4-705DBE29D9A6}"/>
+          </ac:picMkLst>
+        </pc:picChg>
+      </pc:sldChg>
+      <pc:sldChg chg="delSp modSp add mod">
+        <pc:chgData name="Swati Mishra" userId="4ecbbe41-a93b-48f9-aa26-d01cbfd2c273" providerId="ADAL" clId="{66DB6158-1A18-4199-BA6D-06674FF3C921}" dt="2026-07-26T14:20:08.788" v="2468" actId="20577"/>
+        <pc:sldMkLst>
+          <pc:docMk/>
+          <pc:sldMk cId="3302044455" sldId="280"/>
+        </pc:sldMkLst>
+        <pc:spChg chg="mod">
+          <ac:chgData name="Swati Mishra" userId="4ecbbe41-a93b-48f9-aa26-d01cbfd2c273" providerId="ADAL" clId="{66DB6158-1A18-4199-BA6D-06674FF3C921}" dt="2026-07-26T14:20:08.788" v="2468" actId="20577"/>
+          <ac:spMkLst>
+            <pc:docMk/>
+            <pc:sldMk cId="3302044455" sldId="280"/>
+            <ac:spMk id="2" creationId="{632B1FE2-2022-179E-987B-DEA298875ABF}"/>
+          </ac:spMkLst>
+        </pc:spChg>
+        <pc:picChg chg="del">
+          <ac:chgData name="Swati Mishra" userId="4ecbbe41-a93b-48f9-aa26-d01cbfd2c273" providerId="ADAL" clId="{66DB6158-1A18-4199-BA6D-06674FF3C921}" dt="2026-07-26T14:18:52.351" v="2445" actId="478"/>
+          <ac:picMkLst>
+            <pc:docMk/>
+            <pc:sldMk cId="3302044455" sldId="280"/>
+            <ac:picMk id="5" creationId="{BC031330-EA71-CBA6-FF1B-DCF1B38583F2}"/>
+          </ac:picMkLst>
+        </pc:picChg>
+        <pc:picChg chg="mod modCrop">
+          <ac:chgData name="Swati Mishra" userId="4ecbbe41-a93b-48f9-aa26-d01cbfd2c273" providerId="ADAL" clId="{66DB6158-1A18-4199-BA6D-06674FF3C921}" dt="2026-07-26T14:19:39.111" v="2455" actId="14100"/>
+          <ac:picMkLst>
+            <pc:docMk/>
+            <pc:sldMk cId="3302044455" sldId="280"/>
+            <ac:picMk id="7" creationId="{67BAE453-4D1D-9F81-8703-6AFAB2909C22}"/>
           </ac:picMkLst>
         </pc:picChg>
       </pc:sldChg>
@@ -14218,7 +14450,7 @@
           <a:p>
             <a:fld id="{6A4B53A7-3209-46A6-9454-F38EAC8F11E7}" type="datetimeFigureOut">
               <a:rPr lang="en-US" smtClean="0"/>
-              <a:t>7/25/2026</a:t>
+              <a:t>7/26/2026</a:t>
             </a:fld>
             <a:endParaRPr lang="en-US"/>
           </a:p>
@@ -14506,7 +14738,7 @@
             <a:fld id="{6A4B53A7-3209-46A6-9454-F38EAC8F11E7}" type="datetimeFigureOut">
               <a:rPr lang="en-US" smtClean="0"/>
               <a:pPr/>
-              <a:t>7/25/2026</a:t>
+              <a:t>7/26/2026</a:t>
             </a:fld>
             <a:endParaRPr lang="en-US" dirty="0"/>
           </a:p>
@@ -14700,7 +14932,7 @@
             <a:fld id="{6A4B53A7-3209-46A6-9454-F38EAC8F11E7}" type="datetimeFigureOut">
               <a:rPr lang="en-US" smtClean="0"/>
               <a:pPr/>
-              <a:t>7/25/2026</a:t>
+              <a:t>7/26/2026</a:t>
             </a:fld>
             <a:endParaRPr lang="en-US" dirty="0"/>
           </a:p>
@@ -14963,7 +15195,7 @@
             <a:fld id="{6A4B53A7-3209-46A6-9454-F38EAC8F11E7}" type="datetimeFigureOut">
               <a:rPr lang="en-US" smtClean="0"/>
               <a:pPr/>
-              <a:t>7/25/2026</a:t>
+              <a:t>7/26/2026</a:t>
             </a:fld>
             <a:endParaRPr lang="en-US" dirty="0"/>
           </a:p>
@@ -15389,7 +15621,7 @@
             <a:fld id="{6A4B53A7-3209-46A6-9454-F38EAC8F11E7}" type="datetimeFigureOut">
               <a:rPr lang="en-US" smtClean="0"/>
               <a:pPr/>
-              <a:t>7/25/2026</a:t>
+              <a:t>7/26/2026</a:t>
             </a:fld>
             <a:endParaRPr lang="en-US" dirty="0"/>
           </a:p>
@@ -15937,7 +16169,7 @@
             <a:fld id="{6A4B53A7-3209-46A6-9454-F38EAC8F11E7}" type="datetimeFigureOut">
               <a:rPr lang="en-US" smtClean="0"/>
               <a:pPr/>
-              <a:t>7/25/2026</a:t>
+              <a:t>7/26/2026</a:t>
             </a:fld>
             <a:endParaRPr lang="en-US" dirty="0"/>
           </a:p>
@@ -16779,7 +17011,7 @@
             <a:fld id="{6A4B53A7-3209-46A6-9454-F38EAC8F11E7}" type="datetimeFigureOut">
               <a:rPr lang="en-US" smtClean="0"/>
               <a:pPr/>
-              <a:t>7/25/2026</a:t>
+              <a:t>7/26/2026</a:t>
             </a:fld>
             <a:endParaRPr lang="en-US" dirty="0"/>
           </a:p>
@@ -16950,7 +17182,7 @@
           <a:p>
             <a:fld id="{6A4B53A7-3209-46A6-9454-F38EAC8F11E7}" type="datetimeFigureOut">
               <a:rPr lang="en-US" smtClean="0"/>
-              <a:t>7/25/2026</a:t>
+              <a:t>7/26/2026</a:t>
             </a:fld>
             <a:endParaRPr lang="en-US"/>
           </a:p>
@@ -17134,7 +17366,7 @@
           <a:p>
             <a:fld id="{6A4B53A7-3209-46A6-9454-F38EAC8F11E7}" type="datetimeFigureOut">
               <a:rPr lang="en-US" smtClean="0"/>
-              <a:t>7/25/2026</a:t>
+              <a:t>7/26/2026</a:t>
             </a:fld>
             <a:endParaRPr lang="en-US"/>
           </a:p>
@@ -17304,7 +17536,7 @@
           <a:p>
             <a:fld id="{6A4B53A7-3209-46A6-9454-F38EAC8F11E7}" type="datetimeFigureOut">
               <a:rPr lang="en-US" smtClean="0"/>
-              <a:t>7/25/2026</a:t>
+              <a:t>7/26/2026</a:t>
             </a:fld>
             <a:endParaRPr lang="en-US"/>
           </a:p>
@@ -17552,7 +17784,7 @@
           <a:p>
             <a:fld id="{6A4B53A7-3209-46A6-9454-F38EAC8F11E7}" type="datetimeFigureOut">
               <a:rPr lang="en-US" smtClean="0"/>
-              <a:t>7/25/2026</a:t>
+              <a:t>7/26/2026</a:t>
             </a:fld>
             <a:endParaRPr lang="en-US"/>
           </a:p>
@@ -17789,7 +18021,7 @@
           <a:p>
             <a:fld id="{6A4B53A7-3209-46A6-9454-F38EAC8F11E7}" type="datetimeFigureOut">
               <a:rPr lang="en-US" smtClean="0"/>
-              <a:t>7/25/2026</a:t>
+              <a:t>7/26/2026</a:t>
             </a:fld>
             <a:endParaRPr lang="en-US"/>
           </a:p>
@@ -18162,7 +18394,7 @@
           <a:p>
             <a:fld id="{6A4B53A7-3209-46A6-9454-F38EAC8F11E7}" type="datetimeFigureOut">
               <a:rPr lang="en-US" smtClean="0"/>
-              <a:t>7/25/2026</a:t>
+              <a:t>7/26/2026</a:t>
             </a:fld>
             <a:endParaRPr lang="en-US"/>
           </a:p>
@@ -18280,7 +18512,7 @@
           <a:p>
             <a:fld id="{6A4B53A7-3209-46A6-9454-F38EAC8F11E7}" type="datetimeFigureOut">
               <a:rPr lang="en-US" smtClean="0"/>
-              <a:t>7/25/2026</a:t>
+              <a:t>7/26/2026</a:t>
             </a:fld>
             <a:endParaRPr lang="en-US"/>
           </a:p>
@@ -18375,7 +18607,7 @@
           <a:p>
             <a:fld id="{6A4B53A7-3209-46A6-9454-F38EAC8F11E7}" type="datetimeFigureOut">
               <a:rPr lang="en-US" smtClean="0"/>
-              <a:t>7/25/2026</a:t>
+              <a:t>7/26/2026</a:t>
             </a:fld>
             <a:endParaRPr lang="en-US"/>
           </a:p>
@@ -18626,7 +18858,7 @@
           <a:p>
             <a:fld id="{6A4B53A7-3209-46A6-9454-F38EAC8F11E7}" type="datetimeFigureOut">
               <a:rPr lang="en-US" smtClean="0"/>
-              <a:t>7/25/2026</a:t>
+              <a:t>7/26/2026</a:t>
             </a:fld>
             <a:endParaRPr lang="en-US"/>
           </a:p>
@@ -18913,7 +19145,7 @@
           <a:p>
             <a:fld id="{6A4B53A7-3209-46A6-9454-F38EAC8F11E7}" type="datetimeFigureOut">
               <a:rPr lang="en-US" smtClean="0"/>
-              <a:t>7/25/2026</a:t>
+              <a:t>7/26/2026</a:t>
             </a:fld>
             <a:endParaRPr lang="en-US"/>
           </a:p>
@@ -19127,7 +19359,7 @@
             <a:fld id="{6A4B53A7-3209-46A6-9454-F38EAC8F11E7}" type="datetimeFigureOut">
               <a:rPr lang="en-US" smtClean="0"/>
               <a:pPr/>
-              <a:t>7/25/2026</a:t>
+              <a:t>7/26/2026</a:t>
             </a:fld>
             <a:endParaRPr lang="en-US" dirty="0"/>
           </a:p>
@@ -20332,6 +20564,176 @@
 <file path=ppt/slides/slide10.xml><?xml version="1.0" encoding="utf-8"?>
 <p:sld xmlns:a="http://schemas.openxmlformats.org/drawingml/2006/main" xmlns:r="http://schemas.openxmlformats.org/officeDocument/2006/relationships" xmlns:p="http://schemas.openxmlformats.org/presentationml/2006/main">
   <p:cSld>
+    <p:spTree>
+      <p:nvGrpSpPr>
+        <p:cNvPr id="1" name=""/>
+        <p:cNvGrpSpPr/>
+        <p:nvPr/>
+      </p:nvGrpSpPr>
+      <p:grpSpPr>
+        <a:xfrm>
+          <a:off x="0" y="0"/>
+          <a:ext cx="0" cy="0"/>
+          <a:chOff x="0" y="0"/>
+          <a:chExt cx="0" cy="0"/>
+        </a:xfrm>
+      </p:grpSpPr>
+      <p:sp>
+        <p:nvSpPr>
+          <p:cNvPr id="2" name="Title 1">
+            <a:extLst>
+              <a:ext uri="{FF2B5EF4-FFF2-40B4-BE49-F238E27FC236}">
+                <a16:creationId xmlns:a16="http://schemas.microsoft.com/office/drawing/2014/main" id="{9E138CFB-3C23-AEE3-73E9-8A8A23919805}"/>
+              </a:ext>
+            </a:extLst>
+          </p:cNvPr>
+          <p:cNvSpPr>
+            <a:spLocks noGrp="1"/>
+          </p:cNvSpPr>
+          <p:nvPr>
+            <p:ph type="title"/>
+          </p:nvPr>
+        </p:nvSpPr>
+        <p:spPr>
+          <a:xfrm>
+            <a:off x="913795" y="609601"/>
+            <a:ext cx="10353761" cy="1045464"/>
+          </a:xfrm>
+        </p:spPr>
+        <p:txBody>
+          <a:bodyPr/>
+          <a:lstStyle/>
+          <a:p>
+            <a:r>
+              <a:rPr lang="en-US" sz="3600" dirty="0" err="1">
+                <a:effectLst>
+                  <a:outerShdw blurRad="50800" dist="38100" dir="2700000" algn="tl" rotWithShape="0">
+                    <a:srgbClr val="000000">
+                      <a:alpha val="48000"/>
+                    </a:srgbClr>
+                  </a:outerShdw>
+                </a:effectLst>
+              </a:rPr>
+              <a:t>CineBot</a:t>
+            </a:r>
+            <a:r>
+              <a:rPr lang="en-US" sz="3600" dirty="0">
+                <a:effectLst>
+                  <a:outerShdw blurRad="50800" dist="38100" dir="2700000" algn="tl" rotWithShape="0">
+                    <a:srgbClr val="000000">
+                      <a:alpha val="48000"/>
+                    </a:srgbClr>
+                  </a:outerShdw>
+                </a:effectLst>
+              </a:rPr>
+              <a:t> </a:t>
+            </a:r>
+            <a:r>
+              <a:rPr lang="en-US" sz="3600" dirty="0" err="1">
+                <a:effectLst>
+                  <a:outerShdw blurRad="50800" dist="38100" dir="2700000" algn="tl" rotWithShape="0">
+                    <a:srgbClr val="000000">
+                      <a:alpha val="48000"/>
+                    </a:srgbClr>
+                  </a:outerShdw>
+                </a:effectLst>
+              </a:rPr>
+              <a:t>ScreenShotS</a:t>
+            </a:r>
+            <a:endParaRPr lang="en-US" dirty="0"/>
+          </a:p>
+        </p:txBody>
+      </p:sp>
+      <p:pic>
+        <p:nvPicPr>
+          <p:cNvPr id="5" name="Picture 4">
+            <a:extLst>
+              <a:ext uri="{FF2B5EF4-FFF2-40B4-BE49-F238E27FC236}">
+                <a16:creationId xmlns:a16="http://schemas.microsoft.com/office/drawing/2014/main" id="{1C93B0CE-95A0-13D1-FC48-9958010EEE65}"/>
+              </a:ext>
+            </a:extLst>
+          </p:cNvPr>
+          <p:cNvPicPr>
+            <a:picLocks noChangeAspect="1"/>
+          </p:cNvPicPr>
+          <p:nvPr/>
+        </p:nvPicPr>
+        <p:blipFill>
+          <a:blip r:embed="rId2">
+            <a:extLst>
+              <a:ext uri="{28A0092B-C50C-407E-A947-70E740481C1C}">
+                <a14:useLocalDpi xmlns:a14="http://schemas.microsoft.com/office/drawing/2010/main" val="0"/>
+              </a:ext>
+            </a:extLst>
+          </a:blip>
+          <a:srcRect l="7416" t="6509"/>
+          <a:stretch>
+            <a:fillRect/>
+          </a:stretch>
+        </p:blipFill>
+        <p:spPr>
+          <a:xfrm>
+            <a:off x="6142410" y="1774371"/>
+            <a:ext cx="5939327" cy="3548744"/>
+          </a:xfrm>
+          <a:prstGeom prst="rect">
+            <a:avLst/>
+          </a:prstGeom>
+        </p:spPr>
+      </p:pic>
+      <p:pic>
+        <p:nvPicPr>
+          <p:cNvPr id="7" name="Picture 6">
+            <a:extLst>
+              <a:ext uri="{FF2B5EF4-FFF2-40B4-BE49-F238E27FC236}">
+                <a16:creationId xmlns:a16="http://schemas.microsoft.com/office/drawing/2014/main" id="{E549ECA6-6E48-77DC-60C7-E9C29C820690}"/>
+              </a:ext>
+            </a:extLst>
+          </p:cNvPr>
+          <p:cNvPicPr>
+            <a:picLocks noChangeAspect="1"/>
+          </p:cNvPicPr>
+          <p:nvPr/>
+        </p:nvPicPr>
+        <p:blipFill>
+          <a:blip r:embed="rId3">
+            <a:extLst>
+              <a:ext uri="{28A0092B-C50C-407E-A947-70E740481C1C}">
+                <a14:useLocalDpi xmlns:a14="http://schemas.microsoft.com/office/drawing/2010/main" val="0"/>
+              </a:ext>
+            </a:extLst>
+          </a:blip>
+          <a:srcRect l="12268" t="26400" r="15353" b="2541"/>
+          <a:stretch>
+            <a:fillRect/>
+          </a:stretch>
+        </p:blipFill>
+        <p:spPr>
+          <a:xfrm>
+            <a:off x="326572" y="1774370"/>
+            <a:ext cx="5540829" cy="3679373"/>
+          </a:xfrm>
+          <a:prstGeom prst="rect">
+            <a:avLst/>
+          </a:prstGeom>
+        </p:spPr>
+      </p:pic>
+    </p:spTree>
+    <p:extLst>
+      <p:ext uri="{BB962C8B-B14F-4D97-AF65-F5344CB8AC3E}">
+        <p14:creationId xmlns:p14="http://schemas.microsoft.com/office/powerpoint/2010/main" val="2839999341"/>
+      </p:ext>
+    </p:extLst>
+  </p:cSld>
+  <p:clrMapOvr>
+    <a:masterClrMapping/>
+  </p:clrMapOvr>
+</p:sld>
+</file>
+
+<file path=ppt/slides/slide11.xml><?xml version="1.0" encoding="utf-8"?>
+<p:sld xmlns:a="http://schemas.openxmlformats.org/drawingml/2006/main" xmlns:r="http://schemas.openxmlformats.org/officeDocument/2006/relationships" xmlns:p="http://schemas.openxmlformats.org/presentationml/2006/main">
+  <p:cSld>
     <p:bg>
       <p:bgPr>
         <a:solidFill>
@@ -20659,7 +21061,7 @@
 </p:sld>
 </file>
 
-<file path=ppt/slides/slide11.xml><?xml version="1.0" encoding="utf-8"?>
+<file path=ppt/slides/slide12.xml><?xml version="1.0" encoding="utf-8"?>
 <p:sld xmlns:a="http://schemas.openxmlformats.org/drawingml/2006/main" xmlns:r="http://schemas.openxmlformats.org/officeDocument/2006/relationships" xmlns:p="http://schemas.openxmlformats.org/presentationml/2006/main">
   <p:cSld>
     <p:bg>
@@ -20788,7 +21190,692 @@
 </p:sld>
 </file>
 
-<file path=ppt/slides/slide12.xml><?xml version="1.0" encoding="utf-8"?>
+<file path=ppt/slides/slide13.xml><?xml version="1.0" encoding="utf-8"?>
+<p:sld xmlns:a="http://schemas.openxmlformats.org/drawingml/2006/main" xmlns:r="http://schemas.openxmlformats.org/officeDocument/2006/relationships" xmlns:p="http://schemas.openxmlformats.org/presentationml/2006/main">
+  <p:cSld>
+    <p:bg>
+      <p:bgPr>
+        <a:solidFill>
+          <a:schemeClr val="bg1"/>
+        </a:solidFill>
+        <a:effectLst/>
+      </p:bgPr>
+    </p:bg>
+    <p:spTree>
+      <p:nvGrpSpPr>
+        <p:cNvPr id="1" name=""/>
+        <p:cNvGrpSpPr/>
+        <p:nvPr/>
+      </p:nvGrpSpPr>
+      <p:grpSpPr>
+        <a:xfrm>
+          <a:off x="0" y="0"/>
+          <a:ext cx="0" cy="0"/>
+          <a:chOff x="0" y="0"/>
+          <a:chExt cx="0" cy="0"/>
+        </a:xfrm>
+      </p:grpSpPr>
+      <p:sp>
+        <p:nvSpPr>
+          <p:cNvPr id="29" name="Rectangle 28">
+            <a:extLst>
+              <a:ext uri="{FF2B5EF4-FFF2-40B4-BE49-F238E27FC236}">
+                <a16:creationId xmlns:a16="http://schemas.microsoft.com/office/drawing/2014/main" id="{5C821777-3A3B-437E-B5C1-FBC7B0F48C56}"/>
+              </a:ext>
+              <a:ext uri="{C183D7F6-B498-43B3-948B-1728B52AA6E4}">
+                <adec:decorative xmlns:adec="http://schemas.microsoft.com/office/drawing/2017/decorative" val="1"/>
+              </a:ext>
+            </a:extLst>
+          </p:cNvPr>
+          <p:cNvSpPr>
+            <a:spLocks noGrp="1" noRot="1" noChangeAspect="1" noMove="1" noResize="1" noEditPoints="1" noAdjustHandles="1" noChangeArrowheads="1" noChangeShapeType="1" noTextEdit="1"/>
+          </p:cNvSpPr>
+          <p:nvPr>
+            <p:extLst>
+              <p:ext uri="{386F3935-93C4-4BCD-93E2-E3B085C9AB24}">
+                <p16:designElem xmlns:p16="http://schemas.microsoft.com/office/powerpoint/2015/main" val="1"/>
+              </p:ext>
+            </p:extLst>
+          </p:nvPr>
+        </p:nvSpPr>
+        <p:spPr>
+          <a:xfrm>
+            <a:off x="0" y="0"/>
+            <a:ext cx="12192000" cy="6858000"/>
+          </a:xfrm>
+          <a:prstGeom prst="rect">
+            <a:avLst/>
+          </a:prstGeom>
+          <a:ln>
+            <a:noFill/>
+          </a:ln>
+        </p:spPr>
+        <p:style>
+          <a:lnRef idx="2">
+            <a:schemeClr val="accent1">
+              <a:shade val="50000"/>
+            </a:schemeClr>
+          </a:lnRef>
+          <a:fillRef idx="1003">
+            <a:schemeClr val="dk2"/>
+          </a:fillRef>
+          <a:effectRef idx="0">
+            <a:schemeClr val="accent1"/>
+          </a:effectRef>
+          <a:fontRef idx="minor">
+            <a:schemeClr val="lt1"/>
+          </a:fontRef>
+        </p:style>
+        <p:txBody>
+          <a:bodyPr rtlCol="0" anchor="ctr"/>
+          <a:lstStyle/>
+          <a:p>
+            <a:pPr algn="ctr"/>
+            <a:endParaRPr lang="en-US"/>
+          </a:p>
+        </p:txBody>
+      </p:sp>
+      <p:sp>
+        <p:nvSpPr>
+          <p:cNvPr id="2" name="Title 1">
+            <a:extLst>
+              <a:ext uri="{FF2B5EF4-FFF2-40B4-BE49-F238E27FC236}">
+                <a16:creationId xmlns:a16="http://schemas.microsoft.com/office/drawing/2014/main" id="{7E72B533-6A16-FA41-7A23-26DA0B207F1A}"/>
+              </a:ext>
+            </a:extLst>
+          </p:cNvPr>
+          <p:cNvSpPr>
+            <a:spLocks noGrp="1"/>
+          </p:cNvSpPr>
+          <p:nvPr>
+            <p:ph type="title"/>
+          </p:nvPr>
+        </p:nvSpPr>
+        <p:spPr>
+          <a:xfrm>
+            <a:off x="7881719" y="2468879"/>
+            <a:ext cx="3643150" cy="1591437"/>
+          </a:xfrm>
+        </p:spPr>
+        <p:txBody>
+          <a:bodyPr vert="horz" lIns="91440" tIns="45720" rIns="91440" bIns="45720" rtlCol="0" anchor="b">
+            <a:normAutofit/>
+          </a:bodyPr>
+          <a:lstStyle/>
+          <a:p>
+            <a:r>
+              <a:rPr lang="en-US" dirty="0">
+                <a:solidFill>
+                  <a:srgbClr val="FFFFFF"/>
+                </a:solidFill>
+              </a:rPr>
+              <a:t>Technology Stack</a:t>
+            </a:r>
+          </a:p>
+        </p:txBody>
+      </p:sp>
+      <p:sp>
+        <p:nvSpPr>
+          <p:cNvPr id="31" name="Rectangle 30">
+            <a:extLst>
+              <a:ext uri="{FF2B5EF4-FFF2-40B4-BE49-F238E27FC236}">
+                <a16:creationId xmlns:a16="http://schemas.microsoft.com/office/drawing/2014/main" id="{A31AD40C-CE73-4162-8681-421B8AF943A2}"/>
+              </a:ext>
+              <a:ext uri="{C183D7F6-B498-43B3-948B-1728B52AA6E4}">
+                <adec:decorative xmlns:adec="http://schemas.microsoft.com/office/drawing/2017/decorative" val="1"/>
+              </a:ext>
+            </a:extLst>
+          </p:cNvPr>
+          <p:cNvSpPr>
+            <a:spLocks noGrp="1" noRot="1" noChangeAspect="1" noMove="1" noResize="1" noEditPoints="1" noAdjustHandles="1" noChangeArrowheads="1" noChangeShapeType="1" noTextEdit="1"/>
+          </p:cNvSpPr>
+          <p:nvPr>
+            <p:extLst>
+              <p:ext uri="{386F3935-93C4-4BCD-93E2-E3B085C9AB24}">
+                <p16:designElem xmlns:p16="http://schemas.microsoft.com/office/powerpoint/2015/main" val="1"/>
+              </p:ext>
+            </p:extLst>
+          </p:nvPr>
+        </p:nvSpPr>
+        <p:spPr>
+          <a:xfrm>
+            <a:off x="752475" y="733425"/>
+            <a:ext cx="6696075" cy="5391150"/>
+          </a:xfrm>
+          <a:prstGeom prst="rect">
+            <a:avLst/>
+          </a:prstGeom>
+          <a:solidFill>
+            <a:schemeClr val="bg1"/>
+          </a:solidFill>
+          <a:ln w="190500" cap="sq">
+            <a:solidFill>
+              <a:schemeClr val="bg1"/>
+            </a:solidFill>
+            <a:miter lim="800000"/>
+          </a:ln>
+          <a:effectLst>
+            <a:outerShdw blurRad="54991" dist="17780" dir="5400000" algn="ctr" rotWithShape="0">
+              <a:schemeClr val="bg1">
+                <a:alpha val="40000"/>
+              </a:schemeClr>
+            </a:outerShdw>
+          </a:effectLst>
+          <a:scene3d>
+            <a:camera prst="orthographicFront"/>
+            <a:lightRig rig="twoPt" dir="t">
+              <a:rot lat="0" lon="0" rev="7200000"/>
+            </a:lightRig>
+          </a:scene3d>
+          <a:sp3d>
+            <a:bevelT w="25400" h="19050"/>
+          </a:sp3d>
+        </p:spPr>
+        <p:style>
+          <a:lnRef idx="2">
+            <a:schemeClr val="accent1">
+              <a:shade val="50000"/>
+            </a:schemeClr>
+          </a:lnRef>
+          <a:fillRef idx="1">
+            <a:schemeClr val="accent1"/>
+          </a:fillRef>
+          <a:effectRef idx="0">
+            <a:schemeClr val="accent1"/>
+          </a:effectRef>
+          <a:fontRef idx="minor">
+            <a:schemeClr val="lt1"/>
+          </a:fontRef>
+        </p:style>
+        <p:txBody>
+          <a:bodyPr rtlCol="0" anchor="ctr"/>
+          <a:lstStyle/>
+          <a:p>
+            <a:pPr algn="ctr"/>
+            <a:endParaRPr lang="en-US"/>
+          </a:p>
+        </p:txBody>
+      </p:sp>
+      <p:sp>
+        <p:nvSpPr>
+          <p:cNvPr id="33" name="Rectangle 32">
+            <a:extLst>
+              <a:ext uri="{FF2B5EF4-FFF2-40B4-BE49-F238E27FC236}">
+                <a16:creationId xmlns:a16="http://schemas.microsoft.com/office/drawing/2014/main" id="{707A3B9D-B1BA-4989-A535-1A6D8D402CC6}"/>
+              </a:ext>
+              <a:ext uri="{C183D7F6-B498-43B3-948B-1728B52AA6E4}">
+                <adec:decorative xmlns:adec="http://schemas.microsoft.com/office/drawing/2017/decorative" val="1"/>
+              </a:ext>
+            </a:extLst>
+          </p:cNvPr>
+          <p:cNvSpPr>
+            <a:spLocks noGrp="1" noRot="1" noChangeAspect="1" noMove="1" noResize="1" noEditPoints="1" noAdjustHandles="1" noChangeArrowheads="1" noChangeShapeType="1" noTextEdit="1"/>
+          </p:cNvSpPr>
+          <p:nvPr>
+            <p:extLst>
+              <p:ext uri="{386F3935-93C4-4BCD-93E2-E3B085C9AB24}">
+                <p16:designElem xmlns:p16="http://schemas.microsoft.com/office/powerpoint/2015/main" val="1"/>
+              </p:ext>
+            </p:extLst>
+          </p:nvPr>
+        </p:nvSpPr>
+        <p:spPr>
+          <a:xfrm>
+            <a:off x="817654" y="799817"/>
+            <a:ext cx="6565717" cy="5258367"/>
+          </a:xfrm>
+          <a:prstGeom prst="rect">
+            <a:avLst/>
+          </a:prstGeom>
+          <a:noFill/>
+          <a:ln w="12700">
+            <a:solidFill>
+              <a:srgbClr val="2A5B7F"/>
+            </a:solidFill>
+          </a:ln>
+        </p:spPr>
+        <p:style>
+          <a:lnRef idx="2">
+            <a:schemeClr val="accent1">
+              <a:shade val="50000"/>
+            </a:schemeClr>
+          </a:lnRef>
+          <a:fillRef idx="1">
+            <a:schemeClr val="accent1"/>
+          </a:fillRef>
+          <a:effectRef idx="0">
+            <a:schemeClr val="accent1"/>
+          </a:effectRef>
+          <a:fontRef idx="minor">
+            <a:schemeClr val="lt1"/>
+          </a:fontRef>
+        </p:style>
+        <p:txBody>
+          <a:bodyPr rtlCol="0" anchor="ctr"/>
+          <a:lstStyle/>
+          <a:p>
+            <a:pPr algn="ctr"/>
+            <a:endParaRPr lang="en-US"/>
+          </a:p>
+        </p:txBody>
+      </p:sp>
+      <p:graphicFrame>
+        <p:nvGraphicFramePr>
+          <p:cNvPr id="7" name="Content Placeholder 3">
+            <a:extLst>
+              <a:ext uri="{FF2B5EF4-FFF2-40B4-BE49-F238E27FC236}">
+                <a16:creationId xmlns:a16="http://schemas.microsoft.com/office/drawing/2014/main" id="{7267186C-386F-720C-FF7B-A0ED79F4A8BB}"/>
+              </a:ext>
+            </a:extLst>
+          </p:cNvPr>
+          <p:cNvGraphicFramePr>
+            <a:graphicFrameLocks/>
+          </p:cNvGraphicFramePr>
+          <p:nvPr>
+            <p:extLst>
+              <p:ext uri="{D42A27DB-BD31-4B8C-83A1-F6EECF244321}">
+                <p14:modId xmlns:p14="http://schemas.microsoft.com/office/powerpoint/2010/main" val="2653386867"/>
+              </p:ext>
+            </p:extLst>
+          </p:nvPr>
+        </p:nvGraphicFramePr>
+        <p:xfrm>
+          <a:off x="987552" y="894455"/>
+          <a:ext cx="6227036" cy="4930272"/>
+        </p:xfrm>
+        <a:graphic>
+          <a:graphicData uri="http://schemas.openxmlformats.org/drawingml/2006/table">
+            <a:tbl>
+              <a:tblPr firstRow="1" bandRow="1">
+                <a:tableStyleId>{69C7853C-536D-4A76-A0AE-DD22124D55A5}</a:tableStyleId>
+              </a:tblPr>
+              <a:tblGrid>
+                <a:gridCol w="2583140">
+                  <a:extLst>
+                    <a:ext uri="{9D8B030D-6E8A-4147-A177-3AD203B41FA5}">
+                      <a16:colId xmlns:a16="http://schemas.microsoft.com/office/drawing/2014/main" val="2636987022"/>
+                    </a:ext>
+                  </a:extLst>
+                </a:gridCol>
+                <a:gridCol w="3643896">
+                  <a:extLst>
+                    <a:ext uri="{9D8B030D-6E8A-4147-A177-3AD203B41FA5}">
+                      <a16:colId xmlns:a16="http://schemas.microsoft.com/office/drawing/2014/main" val="1128870266"/>
+                    </a:ext>
+                  </a:extLst>
+                </a:gridCol>
+              </a:tblGrid>
+              <a:tr h="547808">
+                <a:tc>
+                  <a:txBody>
+                    <a:bodyPr/>
+                    <a:lstStyle/>
+                    <a:p>
+                      <a:pPr algn="ctr">
+                        <a:buNone/>
+                      </a:pPr>
+                      <a:r>
+                        <a:rPr lang="en-US" sz="2400" b="1" dirty="0"/>
+                        <a:t>Component</a:t>
+                      </a:r>
+                    </a:p>
+                  </a:txBody>
+                  <a:tcPr marL="112765" marR="112765" marT="56383" marB="56383"/>
+                </a:tc>
+                <a:tc>
+                  <a:txBody>
+                    <a:bodyPr/>
+                    <a:lstStyle/>
+                    <a:p>
+                      <a:pPr algn="ctr">
+                        <a:buNone/>
+                      </a:pPr>
+                      <a:r>
+                        <a:rPr lang="en-US" sz="2400" b="1" dirty="0"/>
+                        <a:t>Technology</a:t>
+                      </a:r>
+                    </a:p>
+                  </a:txBody>
+                  <a:tcPr marL="112765" marR="112765" marT="56383" marB="56383"/>
+                </a:tc>
+                <a:extLst>
+                  <a:ext uri="{0D108BD9-81ED-4DB2-BD59-A6C34878D82A}">
+                    <a16:rowId xmlns:a16="http://schemas.microsoft.com/office/drawing/2014/main" val="2295446832"/>
+                  </a:ext>
+                </a:extLst>
+              </a:tr>
+              <a:tr h="547808">
+                <a:tc>
+                  <a:txBody>
+                    <a:bodyPr/>
+                    <a:lstStyle/>
+                    <a:p>
+                      <a:pPr>
+                        <a:buNone/>
+                      </a:pPr>
+                      <a:r>
+                        <a:rPr lang="en-US" sz="2400" b="0" dirty="0"/>
+                        <a:t>Web Scraping</a:t>
+                      </a:r>
+                    </a:p>
+                  </a:txBody>
+                  <a:tcPr marL="112765" marR="112765" marT="56383" marB="56383"/>
+                </a:tc>
+                <a:tc>
+                  <a:txBody>
+                    <a:bodyPr/>
+                    <a:lstStyle/>
+                    <a:p>
+                      <a:pPr>
+                        <a:buNone/>
+                      </a:pPr>
+                      <a:r>
+                        <a:rPr lang="en-US" sz="2400" b="0" dirty="0" err="1"/>
+                        <a:t>ScraperAPI</a:t>
+                      </a:r>
+                      <a:endParaRPr lang="en-US" sz="2400" b="0" dirty="0"/>
+                    </a:p>
+                  </a:txBody>
+                  <a:tcPr marL="112765" marR="112765" marT="56383" marB="56383"/>
+                </a:tc>
+                <a:extLst>
+                  <a:ext uri="{0D108BD9-81ED-4DB2-BD59-A6C34878D82A}">
+                    <a16:rowId xmlns:a16="http://schemas.microsoft.com/office/drawing/2014/main" val="3027895069"/>
+                  </a:ext>
+                </a:extLst>
+              </a:tr>
+              <a:tr h="547808">
+                <a:tc>
+                  <a:txBody>
+                    <a:bodyPr/>
+                    <a:lstStyle/>
+                    <a:p>
+                      <a:pPr>
+                        <a:buNone/>
+                      </a:pPr>
+                      <a:r>
+                        <a:rPr lang="en-US" sz="2400" b="0"/>
+                        <a:t>Chunking</a:t>
+                      </a:r>
+                    </a:p>
+                  </a:txBody>
+                  <a:tcPr marL="112765" marR="112765" marT="56383" marB="56383"/>
+                </a:tc>
+                <a:tc>
+                  <a:txBody>
+                    <a:bodyPr/>
+                    <a:lstStyle/>
+                    <a:p>
+                      <a:pPr>
+                        <a:buNone/>
+                      </a:pPr>
+                      <a:r>
+                        <a:rPr lang="en-US" sz="2400" b="0"/>
+                        <a:t>LangChain Text Splitters</a:t>
+                      </a:r>
+                    </a:p>
+                  </a:txBody>
+                  <a:tcPr marL="112765" marR="112765" marT="56383" marB="56383"/>
+                </a:tc>
+                <a:extLst>
+                  <a:ext uri="{0D108BD9-81ED-4DB2-BD59-A6C34878D82A}">
+                    <a16:rowId xmlns:a16="http://schemas.microsoft.com/office/drawing/2014/main" val="3441628003"/>
+                  </a:ext>
+                </a:extLst>
+              </a:tr>
+              <a:tr h="547808">
+                <a:tc>
+                  <a:txBody>
+                    <a:bodyPr/>
+                    <a:lstStyle/>
+                    <a:p>
+                      <a:pPr>
+                        <a:buNone/>
+                      </a:pPr>
+                      <a:r>
+                        <a:rPr lang="en-US" sz="2400" b="0"/>
+                        <a:t>Embeddings</a:t>
+                      </a:r>
+                    </a:p>
+                  </a:txBody>
+                  <a:tcPr marL="112765" marR="112765" marT="56383" marB="56383"/>
+                </a:tc>
+                <a:tc>
+                  <a:txBody>
+                    <a:bodyPr/>
+                    <a:lstStyle/>
+                    <a:p>
+                      <a:pPr>
+                        <a:buNone/>
+                      </a:pPr>
+                      <a:r>
+                        <a:rPr lang="en-US" sz="2400" b="0" dirty="0"/>
+                        <a:t>Sentence Transformers</a:t>
+                      </a:r>
+                    </a:p>
+                  </a:txBody>
+                  <a:tcPr marL="112765" marR="112765" marT="56383" marB="56383"/>
+                </a:tc>
+                <a:extLst>
+                  <a:ext uri="{0D108BD9-81ED-4DB2-BD59-A6C34878D82A}">
+                    <a16:rowId xmlns:a16="http://schemas.microsoft.com/office/drawing/2014/main" val="2955006519"/>
+                  </a:ext>
+                </a:extLst>
+              </a:tr>
+              <a:tr h="547808">
+                <a:tc>
+                  <a:txBody>
+                    <a:bodyPr/>
+                    <a:lstStyle/>
+                    <a:p>
+                      <a:pPr>
+                        <a:buNone/>
+                      </a:pPr>
+                      <a:r>
+                        <a:rPr lang="en-US" sz="2400" b="0"/>
+                        <a:t>Vector Database</a:t>
+                      </a:r>
+                    </a:p>
+                  </a:txBody>
+                  <a:tcPr marL="112765" marR="112765" marT="56383" marB="56383"/>
+                </a:tc>
+                <a:tc>
+                  <a:txBody>
+                    <a:bodyPr/>
+                    <a:lstStyle/>
+                    <a:p>
+                      <a:pPr>
+                        <a:buNone/>
+                      </a:pPr>
+                      <a:r>
+                        <a:rPr lang="en-US" sz="2400" b="0" dirty="0" err="1"/>
+                        <a:t>ChromaDB</a:t>
+                      </a:r>
+                      <a:endParaRPr lang="en-US" sz="2400" b="0" dirty="0"/>
+                    </a:p>
+                  </a:txBody>
+                  <a:tcPr marL="112765" marR="112765" marT="56383" marB="56383"/>
+                </a:tc>
+                <a:extLst>
+                  <a:ext uri="{0D108BD9-81ED-4DB2-BD59-A6C34878D82A}">
+                    <a16:rowId xmlns:a16="http://schemas.microsoft.com/office/drawing/2014/main" val="1994325429"/>
+                  </a:ext>
+                </a:extLst>
+              </a:tr>
+              <a:tr h="547808">
+                <a:tc>
+                  <a:txBody>
+                    <a:bodyPr/>
+                    <a:lstStyle/>
+                    <a:p>
+                      <a:pPr>
+                        <a:buNone/>
+                      </a:pPr>
+                      <a:r>
+                        <a:rPr lang="en-US" sz="2400" b="0"/>
+                        <a:t>Backend</a:t>
+                      </a:r>
+                    </a:p>
+                  </a:txBody>
+                  <a:tcPr marL="112765" marR="112765" marT="56383" marB="56383"/>
+                </a:tc>
+                <a:tc>
+                  <a:txBody>
+                    <a:bodyPr/>
+                    <a:lstStyle/>
+                    <a:p>
+                      <a:pPr>
+                        <a:buNone/>
+                      </a:pPr>
+                      <a:r>
+                        <a:rPr lang="en-US" sz="2400" b="0" dirty="0"/>
+                        <a:t>Flask</a:t>
+                      </a:r>
+                    </a:p>
+                  </a:txBody>
+                  <a:tcPr marL="112765" marR="112765" marT="56383" marB="56383"/>
+                </a:tc>
+                <a:extLst>
+                  <a:ext uri="{0D108BD9-81ED-4DB2-BD59-A6C34878D82A}">
+                    <a16:rowId xmlns:a16="http://schemas.microsoft.com/office/drawing/2014/main" val="2685071668"/>
+                  </a:ext>
+                </a:extLst>
+              </a:tr>
+              <a:tr h="547808">
+                <a:tc>
+                  <a:txBody>
+                    <a:bodyPr/>
+                    <a:lstStyle/>
+                    <a:p>
+                      <a:pPr>
+                        <a:buNone/>
+                      </a:pPr>
+                      <a:r>
+                        <a:rPr lang="en-US" sz="2400" b="0"/>
+                        <a:t>Frontend</a:t>
+                      </a:r>
+                    </a:p>
+                  </a:txBody>
+                  <a:tcPr marL="112765" marR="112765" marT="56383" marB="56383"/>
+                </a:tc>
+                <a:tc>
+                  <a:txBody>
+                    <a:bodyPr/>
+                    <a:lstStyle/>
+                    <a:p>
+                      <a:pPr>
+                        <a:buNone/>
+                      </a:pPr>
+                      <a:r>
+                        <a:rPr lang="en-US" sz="2400" b="0"/>
+                        <a:t>Next.js + Material UI</a:t>
+                      </a:r>
+                    </a:p>
+                  </a:txBody>
+                  <a:tcPr marL="112765" marR="112765" marT="56383" marB="56383"/>
+                </a:tc>
+                <a:extLst>
+                  <a:ext uri="{0D108BD9-81ED-4DB2-BD59-A6C34878D82A}">
+                    <a16:rowId xmlns:a16="http://schemas.microsoft.com/office/drawing/2014/main" val="1379850787"/>
+                  </a:ext>
+                </a:extLst>
+              </a:tr>
+              <a:tr h="547808">
+                <a:tc>
+                  <a:txBody>
+                    <a:bodyPr/>
+                    <a:lstStyle/>
+                    <a:p>
+                      <a:pPr>
+                        <a:buNone/>
+                      </a:pPr>
+                      <a:r>
+                        <a:rPr lang="en-US" sz="2400" b="0"/>
+                        <a:t>LLM</a:t>
+                      </a:r>
+                    </a:p>
+                  </a:txBody>
+                  <a:tcPr marL="112765" marR="112765" marT="56383" marB="56383"/>
+                </a:tc>
+                <a:tc>
+                  <a:txBody>
+                    <a:bodyPr/>
+                    <a:lstStyle/>
+                    <a:p>
+                      <a:pPr>
+                        <a:buNone/>
+                      </a:pPr>
+                      <a:r>
+                        <a:rPr lang="en-US" sz="2400" b="0"/>
+                        <a:t>OpenAI API</a:t>
+                      </a:r>
+                    </a:p>
+                  </a:txBody>
+                  <a:tcPr marL="112765" marR="112765" marT="56383" marB="56383"/>
+                </a:tc>
+                <a:extLst>
+                  <a:ext uri="{0D108BD9-81ED-4DB2-BD59-A6C34878D82A}">
+                    <a16:rowId xmlns:a16="http://schemas.microsoft.com/office/drawing/2014/main" val="2625276791"/>
+                  </a:ext>
+                </a:extLst>
+              </a:tr>
+              <a:tr h="547808">
+                <a:tc>
+                  <a:txBody>
+                    <a:bodyPr/>
+                    <a:lstStyle/>
+                    <a:p>
+                      <a:pPr>
+                        <a:buNone/>
+                      </a:pPr>
+                      <a:r>
+                        <a:rPr lang="en-US" sz="2400" b="0"/>
+                        <a:t>Version Control</a:t>
+                      </a:r>
+                    </a:p>
+                  </a:txBody>
+                  <a:tcPr marL="112765" marR="112765" marT="56383" marB="56383"/>
+                </a:tc>
+                <a:tc>
+                  <a:txBody>
+                    <a:bodyPr/>
+                    <a:lstStyle/>
+                    <a:p>
+                      <a:pPr>
+                        <a:buNone/>
+                      </a:pPr>
+                      <a:r>
+                        <a:rPr lang="en-US" sz="2400" b="0" dirty="0"/>
+                        <a:t>GitHub</a:t>
+                      </a:r>
+                    </a:p>
+                  </a:txBody>
+                  <a:tcPr marL="112765" marR="112765" marT="56383" marB="56383"/>
+                </a:tc>
+                <a:extLst>
+                  <a:ext uri="{0D108BD9-81ED-4DB2-BD59-A6C34878D82A}">
+                    <a16:rowId xmlns:a16="http://schemas.microsoft.com/office/drawing/2014/main" val="3225996566"/>
+                  </a:ext>
+                </a:extLst>
+              </a:tr>
+            </a:tbl>
+          </a:graphicData>
+        </a:graphic>
+      </p:graphicFrame>
+    </p:spTree>
+    <p:extLst>
+      <p:ext uri="{BB962C8B-B14F-4D97-AF65-F5344CB8AC3E}">
+        <p14:creationId xmlns:p14="http://schemas.microsoft.com/office/powerpoint/2010/main" val="397872167"/>
+      </p:ext>
+    </p:extLst>
+  </p:cSld>
+  <p:clrMapOvr>
+    <a:overrideClrMapping bg1="lt1" tx1="dk1" bg2="lt2" tx2="dk2" accent1="accent1" accent2="accent2" accent3="accent3" accent4="accent4" accent5="accent5" accent6="accent6" hlink="hlink" folHlink="folHlink"/>
+  </p:clrMapOvr>
+</p:sld>
+</file>
+
+<file path=ppt/slides/slide14.xml><?xml version="1.0" encoding="utf-8"?>
 <p:sld xmlns:a="http://schemas.openxmlformats.org/drawingml/2006/main" xmlns:r="http://schemas.openxmlformats.org/officeDocument/2006/relationships" xmlns:p="http://schemas.openxmlformats.org/presentationml/2006/main">
   <p:cSld>
     <p:bg>
@@ -21113,177 +22200,7 @@
 </p:sld>
 </file>
 
-<file path=ppt/slides/slide13.xml><?xml version="1.0" encoding="utf-8"?>
-<p:sld xmlns:a="http://schemas.openxmlformats.org/drawingml/2006/main" xmlns:r="http://schemas.openxmlformats.org/officeDocument/2006/relationships" xmlns:p="http://schemas.openxmlformats.org/presentationml/2006/main">
-  <p:cSld>
-    <p:spTree>
-      <p:nvGrpSpPr>
-        <p:cNvPr id="1" name=""/>
-        <p:cNvGrpSpPr/>
-        <p:nvPr/>
-      </p:nvGrpSpPr>
-      <p:grpSpPr>
-        <a:xfrm>
-          <a:off x="0" y="0"/>
-          <a:ext cx="0" cy="0"/>
-          <a:chOff x="0" y="0"/>
-          <a:chExt cx="0" cy="0"/>
-        </a:xfrm>
-      </p:grpSpPr>
-      <p:sp>
-        <p:nvSpPr>
-          <p:cNvPr id="2" name="Title 1">
-            <a:extLst>
-              <a:ext uri="{FF2B5EF4-FFF2-40B4-BE49-F238E27FC236}">
-                <a16:creationId xmlns:a16="http://schemas.microsoft.com/office/drawing/2014/main" id="{9E138CFB-3C23-AEE3-73E9-8A8A23919805}"/>
-              </a:ext>
-            </a:extLst>
-          </p:cNvPr>
-          <p:cNvSpPr>
-            <a:spLocks noGrp="1"/>
-          </p:cNvSpPr>
-          <p:nvPr>
-            <p:ph type="title"/>
-          </p:nvPr>
-        </p:nvSpPr>
-        <p:spPr>
-          <a:xfrm>
-            <a:off x="913795" y="609601"/>
-            <a:ext cx="10353761" cy="1045464"/>
-          </a:xfrm>
-        </p:spPr>
-        <p:txBody>
-          <a:bodyPr/>
-          <a:lstStyle/>
-          <a:p>
-            <a:r>
-              <a:rPr lang="en-US" sz="3600" dirty="0" err="1">
-                <a:effectLst>
-                  <a:outerShdw blurRad="50800" dist="38100" dir="2700000" algn="tl" rotWithShape="0">
-                    <a:srgbClr val="000000">
-                      <a:alpha val="48000"/>
-                    </a:srgbClr>
-                  </a:outerShdw>
-                </a:effectLst>
-              </a:rPr>
-              <a:t>CineBot</a:t>
-            </a:r>
-            <a:r>
-              <a:rPr lang="en-US" sz="3600" dirty="0">
-                <a:effectLst>
-                  <a:outerShdw blurRad="50800" dist="38100" dir="2700000" algn="tl" rotWithShape="0">
-                    <a:srgbClr val="000000">
-                      <a:alpha val="48000"/>
-                    </a:srgbClr>
-                  </a:outerShdw>
-                </a:effectLst>
-              </a:rPr>
-              <a:t> </a:t>
-            </a:r>
-            <a:r>
-              <a:rPr lang="en-US" sz="3600" dirty="0" err="1">
-                <a:effectLst>
-                  <a:outerShdw blurRad="50800" dist="38100" dir="2700000" algn="tl" rotWithShape="0">
-                    <a:srgbClr val="000000">
-                      <a:alpha val="48000"/>
-                    </a:srgbClr>
-                  </a:outerShdw>
-                </a:effectLst>
-              </a:rPr>
-              <a:t>ScreenShotS</a:t>
-            </a:r>
-            <a:endParaRPr lang="en-US" dirty="0"/>
-          </a:p>
-        </p:txBody>
-      </p:sp>
-      <p:pic>
-        <p:nvPicPr>
-          <p:cNvPr id="5" name="Picture 4">
-            <a:extLst>
-              <a:ext uri="{FF2B5EF4-FFF2-40B4-BE49-F238E27FC236}">
-                <a16:creationId xmlns:a16="http://schemas.microsoft.com/office/drawing/2014/main" id="{1C93B0CE-95A0-13D1-FC48-9958010EEE65}"/>
-              </a:ext>
-            </a:extLst>
-          </p:cNvPr>
-          <p:cNvPicPr>
-            <a:picLocks noChangeAspect="1"/>
-          </p:cNvPicPr>
-          <p:nvPr/>
-        </p:nvPicPr>
-        <p:blipFill>
-          <a:blip r:embed="rId2">
-            <a:extLst>
-              <a:ext uri="{28A0092B-C50C-407E-A947-70E740481C1C}">
-                <a14:useLocalDpi xmlns:a14="http://schemas.microsoft.com/office/drawing/2010/main" val="0"/>
-              </a:ext>
-            </a:extLst>
-          </a:blip>
-          <a:srcRect l="7416" t="6509"/>
-          <a:stretch>
-            <a:fillRect/>
-          </a:stretch>
-        </p:blipFill>
-        <p:spPr>
-          <a:xfrm>
-            <a:off x="6142410" y="1774371"/>
-            <a:ext cx="5939327" cy="3548744"/>
-          </a:xfrm>
-          <a:prstGeom prst="rect">
-            <a:avLst/>
-          </a:prstGeom>
-        </p:spPr>
-      </p:pic>
-      <p:pic>
-        <p:nvPicPr>
-          <p:cNvPr id="7" name="Picture 6">
-            <a:extLst>
-              <a:ext uri="{FF2B5EF4-FFF2-40B4-BE49-F238E27FC236}">
-                <a16:creationId xmlns:a16="http://schemas.microsoft.com/office/drawing/2014/main" id="{E549ECA6-6E48-77DC-60C7-E9C29C820690}"/>
-              </a:ext>
-            </a:extLst>
-          </p:cNvPr>
-          <p:cNvPicPr>
-            <a:picLocks noChangeAspect="1"/>
-          </p:cNvPicPr>
-          <p:nvPr/>
-        </p:nvPicPr>
-        <p:blipFill>
-          <a:blip r:embed="rId3">
-            <a:extLst>
-              <a:ext uri="{28A0092B-C50C-407E-A947-70E740481C1C}">
-                <a14:useLocalDpi xmlns:a14="http://schemas.microsoft.com/office/drawing/2010/main" val="0"/>
-              </a:ext>
-            </a:extLst>
-          </a:blip>
-          <a:srcRect l="12268" t="26400" r="15353" b="2541"/>
-          <a:stretch>
-            <a:fillRect/>
-          </a:stretch>
-        </p:blipFill>
-        <p:spPr>
-          <a:xfrm>
-            <a:off x="326572" y="1774370"/>
-            <a:ext cx="5540829" cy="3679373"/>
-          </a:xfrm>
-          <a:prstGeom prst="rect">
-            <a:avLst/>
-          </a:prstGeom>
-        </p:spPr>
-      </p:pic>
-    </p:spTree>
-    <p:extLst>
-      <p:ext uri="{BB962C8B-B14F-4D97-AF65-F5344CB8AC3E}">
-        <p14:creationId xmlns:p14="http://schemas.microsoft.com/office/powerpoint/2010/main" val="2839999341"/>
-      </p:ext>
-    </p:extLst>
-  </p:cSld>
-  <p:clrMapOvr>
-    <a:masterClrMapping/>
-  </p:clrMapOvr>
-</p:sld>
-</file>
-
-<file path=ppt/slides/slide14.xml><?xml version="1.0" encoding="utf-8"?>
+<file path=ppt/slides/slide15.xml><?xml version="1.0" encoding="utf-8"?>
 <p:sld xmlns:a="http://schemas.openxmlformats.org/drawingml/2006/main" xmlns:r="http://schemas.openxmlformats.org/officeDocument/2006/relationships" xmlns:p="http://schemas.openxmlformats.org/presentationml/2006/main">
   <p:cSld>
     <p:bg>
@@ -21437,7 +22354,314 @@
 </p:sld>
 </file>
 
-<file path=ppt/slides/slide15.xml><?xml version="1.0" encoding="utf-8"?>
+<file path=ppt/slides/slide16.xml><?xml version="1.0" encoding="utf-8"?>
+<p:sld xmlns:a="http://schemas.openxmlformats.org/drawingml/2006/main" xmlns:r="http://schemas.openxmlformats.org/officeDocument/2006/relationships" xmlns:p="http://schemas.openxmlformats.org/presentationml/2006/main">
+  <p:cSld>
+    <p:bg>
+      <p:bgPr>
+        <a:blipFill rotWithShape="1">
+          <a:blip r:embed="rId2">
+            <a:duotone>
+              <a:schemeClr val="bg2">
+                <a:shade val="18000"/>
+                <a:satMod val="160000"/>
+                <a:lumMod val="28000"/>
+              </a:schemeClr>
+              <a:schemeClr val="bg2">
+                <a:tint val="95000"/>
+                <a:satMod val="160000"/>
+                <a:lumMod val="116000"/>
+              </a:schemeClr>
+            </a:duotone>
+          </a:blip>
+          <a:stretch/>
+        </a:blipFill>
+        <a:effectLst/>
+      </p:bgPr>
+    </p:bg>
+    <p:spTree>
+      <p:nvGrpSpPr>
+        <p:cNvPr id="1" name=""/>
+        <p:cNvGrpSpPr/>
+        <p:nvPr/>
+      </p:nvGrpSpPr>
+      <p:grpSpPr>
+        <a:xfrm>
+          <a:off x="0" y="0"/>
+          <a:ext cx="0" cy="0"/>
+          <a:chOff x="0" y="0"/>
+          <a:chExt cx="0" cy="0"/>
+        </a:xfrm>
+      </p:grpSpPr>
+      <p:pic>
+        <p:nvPicPr>
+          <p:cNvPr id="12" name="Picture 11" descr="Hand holding a pen shading number on a sheet">
+            <a:extLst>
+              <a:ext uri="{FF2B5EF4-FFF2-40B4-BE49-F238E27FC236}">
+                <a16:creationId xmlns:a16="http://schemas.microsoft.com/office/drawing/2014/main" id="{B16C83E6-DF67-D96D-5BD4-705DBE29D9A6}"/>
+              </a:ext>
+            </a:extLst>
+          </p:cNvPr>
+          <p:cNvPicPr>
+            <a:picLocks noChangeAspect="1"/>
+          </p:cNvPicPr>
+          <p:nvPr/>
+        </p:nvPicPr>
+        <p:blipFill>
+          <a:blip r:embed="rId3">
+            <a:alphaModFix amt="35000"/>
+            <a:grayscl/>
+          </a:blip>
+          <a:srcRect b="15730"/>
+          <a:stretch>
+            <a:fillRect/>
+          </a:stretch>
+        </p:blipFill>
+        <p:spPr>
+          <a:xfrm>
+            <a:off x="20" y="10"/>
+            <a:ext cx="12191980" cy="6857990"/>
+          </a:xfrm>
+          <a:prstGeom prst="rect">
+            <a:avLst/>
+          </a:prstGeom>
+        </p:spPr>
+      </p:pic>
+      <p:sp>
+        <p:nvSpPr>
+          <p:cNvPr id="13" name="Rectangle 12">
+            <a:extLst>
+              <a:ext uri="{FF2B5EF4-FFF2-40B4-BE49-F238E27FC236}">
+                <a16:creationId xmlns:a16="http://schemas.microsoft.com/office/drawing/2014/main" id="{FC23C8D4-BD3D-4473-B3D0-89011586BE82}"/>
+              </a:ext>
+              <a:ext uri="{C183D7F6-B498-43B3-948B-1728B52AA6E4}">
+                <adec:decorative xmlns:adec="http://schemas.microsoft.com/office/drawing/2017/decorative" val="1"/>
+              </a:ext>
+            </a:extLst>
+          </p:cNvPr>
+          <p:cNvSpPr>
+            <a:spLocks noGrp="1" noRot="1" noChangeAspect="1" noMove="1" noResize="1" noEditPoints="1" noAdjustHandles="1" noChangeArrowheads="1" noChangeShapeType="1" noTextEdit="1"/>
+          </p:cNvSpPr>
+          <p:nvPr>
+            <p:extLst>
+              <p:ext uri="{386F3935-93C4-4BCD-93E2-E3B085C9AB24}">
+                <p16:designElem xmlns:p16="http://schemas.microsoft.com/office/powerpoint/2015/main" val="1"/>
+              </p:ext>
+            </p:extLst>
+          </p:nvPr>
+        </p:nvSpPr>
+        <p:spPr>
+          <a:xfrm>
+            <a:off x="0" y="0"/>
+            <a:ext cx="12192000" cy="6858000"/>
+          </a:xfrm>
+          <a:prstGeom prst="rect">
+            <a:avLst/>
+          </a:prstGeom>
+          <a:gradFill flip="none" rotWithShape="1">
+            <a:gsLst>
+              <a:gs pos="32000">
+                <a:schemeClr val="bg2">
+                  <a:lumMod val="75000"/>
+                  <a:alpha val="5000"/>
+                </a:schemeClr>
+              </a:gs>
+              <a:gs pos="100000">
+                <a:schemeClr val="bg2">
+                  <a:lumMod val="40000"/>
+                </a:schemeClr>
+              </a:gs>
+            </a:gsLst>
+            <a:path path="circle">
+              <a:fillToRect l="50000" t="5000" r="50000" b="95000"/>
+            </a:path>
+            <a:tileRect/>
+          </a:gradFill>
+          <a:ln w="9525" cap="flat" cmpd="sng" algn="ctr">
+            <a:noFill/>
+            <a:prstDash val="solid"/>
+          </a:ln>
+          <a:effectLst/>
+        </p:spPr>
+        <p:txBody>
+          <a:bodyPr rtlCol="0" anchor="ctr"/>
+          <a:lstStyle/>
+          <a:p>
+            <a:pPr marL="0" marR="0" lvl="0" indent="0" algn="ctr" defTabSz="457200" eaLnBrk="1" fontAlgn="auto" latinLnBrk="0" hangingPunct="1">
+              <a:lnSpc>
+                <a:spcPct val="100000"/>
+              </a:lnSpc>
+              <a:spcBef>
+                <a:spcPts val="0"/>
+              </a:spcBef>
+              <a:spcAft>
+                <a:spcPts val="0"/>
+              </a:spcAft>
+              <a:buClrTx/>
+              <a:buSzTx/>
+              <a:buFontTx/>
+              <a:buNone/>
+              <a:tabLst/>
+              <a:defRPr/>
+            </a:pPr>
+            <a:endParaRPr kumimoji="0" lang="en-US" sz="1800" b="0" i="0" u="none" strike="noStrike" kern="0" cap="none" spc="0" normalizeH="0" baseline="0" noProof="0">
+              <a:ln>
+                <a:noFill/>
+              </a:ln>
+              <a:solidFill>
+                <a:prstClr val="white"/>
+              </a:solidFill>
+              <a:effectLst/>
+              <a:uLnTx/>
+              <a:uFillTx/>
+              <a:latin typeface="Calibri"/>
+              <a:ea typeface="+mn-ea"/>
+              <a:cs typeface="+mn-cs"/>
+            </a:endParaRPr>
+          </a:p>
+        </p:txBody>
+      </p:sp>
+      <p:sp>
+        <p:nvSpPr>
+          <p:cNvPr id="2" name="Title 1">
+            <a:extLst>
+              <a:ext uri="{FF2B5EF4-FFF2-40B4-BE49-F238E27FC236}">
+                <a16:creationId xmlns:a16="http://schemas.microsoft.com/office/drawing/2014/main" id="{815E4D83-628A-0C5A-C685-CAFD9C4F6FDC}"/>
+              </a:ext>
+            </a:extLst>
+          </p:cNvPr>
+          <p:cNvSpPr>
+            <a:spLocks noGrp="1"/>
+          </p:cNvSpPr>
+          <p:nvPr>
+            <p:ph type="title"/>
+          </p:nvPr>
+        </p:nvSpPr>
+        <p:spPr>
+          <a:xfrm>
+            <a:off x="1595269" y="1122363"/>
+            <a:ext cx="9001462" cy="2387600"/>
+          </a:xfrm>
+        </p:spPr>
+        <p:txBody>
+          <a:bodyPr vert="horz" lIns="91440" tIns="45720" rIns="91440" bIns="45720" rtlCol="0" anchor="b">
+            <a:normAutofit/>
+          </a:bodyPr>
+          <a:lstStyle/>
+          <a:p>
+            <a:r>
+              <a:rPr lang="en-US" sz="4800" dirty="0"/>
+              <a:t>Evaluation Metrics</a:t>
+            </a:r>
+          </a:p>
+        </p:txBody>
+      </p:sp>
+    </p:spTree>
+    <p:extLst>
+      <p:ext uri="{BB962C8B-B14F-4D97-AF65-F5344CB8AC3E}">
+        <p14:creationId xmlns:p14="http://schemas.microsoft.com/office/powerpoint/2010/main" val="750845343"/>
+      </p:ext>
+    </p:extLst>
+  </p:cSld>
+  <p:clrMapOvr>
+    <a:masterClrMapping/>
+  </p:clrMapOvr>
+  <p:timing>
+    <p:tnLst>
+      <p:par>
+        <p:cTn id="1" dur="indefinite" restart="never" nodeType="tmRoot">
+          <p:childTnLst>
+            <p:seq concurrent="1" nextAc="seek">
+              <p:cTn id="2" dur="indefinite" nodeType="mainSeq">
+                <p:childTnLst>
+                  <p:par>
+                    <p:cTn id="3" fill="hold">
+                      <p:stCondLst>
+                        <p:cond delay="indefinite"/>
+                        <p:cond evt="onBegin" delay="0">
+                          <p:tn val="2"/>
+                        </p:cond>
+                      </p:stCondLst>
+                      <p:childTnLst>
+                        <p:par>
+                          <p:cTn id="4" fill="hold">
+                            <p:stCondLst>
+                              <p:cond delay="0"/>
+                            </p:stCondLst>
+                            <p:childTnLst>
+                              <p:par>
+                                <p:cTn id="5" presetID="10" presetClass="entr" presetSubtype="0" fill="hold" grpId="0" nodeType="withEffect">
+                                  <p:stCondLst>
+                                    <p:cond delay="1000"/>
+                                  </p:stCondLst>
+                                  <p:iterate>
+                                    <p:tmPct val="10000"/>
+                                  </p:iterate>
+                                  <p:childTnLst>
+                                    <p:set>
+                                      <p:cBhvr>
+                                        <p:cTn id="6" dur="1" fill="hold">
+                                          <p:stCondLst>
+                                            <p:cond delay="0"/>
+                                          </p:stCondLst>
+                                        </p:cTn>
+                                        <p:tgtEl>
+                                          <p:spTgt spid="2"/>
+                                        </p:tgtEl>
+                                        <p:attrNameLst>
+                                          <p:attrName>style.visibility</p:attrName>
+                                        </p:attrNameLst>
+                                      </p:cBhvr>
+                                      <p:to>
+                                        <p:strVal val="visible"/>
+                                      </p:to>
+                                    </p:set>
+                                    <p:animEffect transition="in" filter="fade">
+                                      <p:cBhvr>
+                                        <p:cTn id="7" dur="700"/>
+                                        <p:tgtEl>
+                                          <p:spTgt spid="2"/>
+                                        </p:tgtEl>
+                                      </p:cBhvr>
+                                    </p:animEffect>
+                                  </p:childTnLst>
+                                </p:cTn>
+                              </p:par>
+                            </p:childTnLst>
+                          </p:cTn>
+                        </p:par>
+                      </p:childTnLst>
+                    </p:cTn>
+                  </p:par>
+                </p:childTnLst>
+              </p:cTn>
+              <p:prevCondLst>
+                <p:cond evt="onPrev" delay="0">
+                  <p:tgtEl>
+                    <p:sldTgt/>
+                  </p:tgtEl>
+                </p:cond>
+              </p:prevCondLst>
+              <p:nextCondLst>
+                <p:cond evt="onNext" delay="0">
+                  <p:tgtEl>
+                    <p:sldTgt/>
+                  </p:tgtEl>
+                </p:cond>
+              </p:nextCondLst>
+            </p:seq>
+          </p:childTnLst>
+        </p:cTn>
+      </p:par>
+    </p:tnLst>
+    <p:bldLst>
+      <p:bldP spid="2" grpId="0"/>
+    </p:bldLst>
+  </p:timing>
+</p:sld>
+</file>
+
+<file path=ppt/slides/slide17.xml><?xml version="1.0" encoding="utf-8"?>
 <p:sld xmlns:a="http://schemas.openxmlformats.org/drawingml/2006/main" xmlns:r="http://schemas.openxmlformats.org/officeDocument/2006/relationships" xmlns:p="http://schemas.openxmlformats.org/presentationml/2006/main">
   <p:cSld>
     <p:spTree>
@@ -21470,15 +22694,25 @@
             <p:ph type="title"/>
           </p:nvPr>
         </p:nvSpPr>
-        <p:spPr/>
+        <p:spPr>
+          <a:xfrm>
+            <a:off x="913795" y="609601"/>
+            <a:ext cx="10353761" cy="1182624"/>
+          </a:xfrm>
+        </p:spPr>
         <p:txBody>
           <a:bodyPr/>
           <a:lstStyle/>
           <a:p>
             <a:r>
               <a:rPr lang="en-US" dirty="0"/>
-              <a:t>Evaluation</a:t>
+              <a:t>Evaluation </a:t>
             </a:r>
+            <a:r>
+              <a:rPr lang="en-US"/>
+              <a:t>Metrics – 1</a:t>
+            </a:r>
+            <a:endParaRPr lang="en-US" dirty="0"/>
           </a:p>
         </p:txBody>
       </p:sp>
@@ -21525,7 +22759,113 @@
 </p:sld>
 </file>
 
-<file path=ppt/slides/slide16.xml><?xml version="1.0" encoding="utf-8"?>
+<file path=ppt/slides/slide18.xml><?xml version="1.0" encoding="utf-8"?>
+<p:sld xmlns:a="http://schemas.openxmlformats.org/drawingml/2006/main" xmlns:r="http://schemas.openxmlformats.org/officeDocument/2006/relationships" xmlns:p="http://schemas.openxmlformats.org/presentationml/2006/main">
+  <p:cSld>
+    <p:spTree>
+      <p:nvGrpSpPr>
+        <p:cNvPr id="1" name="">
+          <a:extLst>
+            <a:ext uri="{FF2B5EF4-FFF2-40B4-BE49-F238E27FC236}">
+              <a16:creationId xmlns:a16="http://schemas.microsoft.com/office/drawing/2014/main" id="{E1456BC2-1B3B-563F-68E8-73744A58AB9A}"/>
+            </a:ext>
+          </a:extLst>
+        </p:cNvPr>
+        <p:cNvGrpSpPr/>
+        <p:nvPr/>
+      </p:nvGrpSpPr>
+      <p:grpSpPr>
+        <a:xfrm>
+          <a:off x="0" y="0"/>
+          <a:ext cx="0" cy="0"/>
+          <a:chOff x="0" y="0"/>
+          <a:chExt cx="0" cy="0"/>
+        </a:xfrm>
+      </p:grpSpPr>
+      <p:sp>
+        <p:nvSpPr>
+          <p:cNvPr id="2" name="Title 1">
+            <a:extLst>
+              <a:ext uri="{FF2B5EF4-FFF2-40B4-BE49-F238E27FC236}">
+                <a16:creationId xmlns:a16="http://schemas.microsoft.com/office/drawing/2014/main" id="{632B1FE2-2022-179E-987B-DEA298875ABF}"/>
+              </a:ext>
+            </a:extLst>
+          </p:cNvPr>
+          <p:cNvSpPr>
+            <a:spLocks noGrp="1"/>
+          </p:cNvSpPr>
+          <p:nvPr>
+            <p:ph type="title"/>
+          </p:nvPr>
+        </p:nvSpPr>
+        <p:spPr>
+          <a:xfrm>
+            <a:off x="913795" y="609601"/>
+            <a:ext cx="10353761" cy="1182624"/>
+          </a:xfrm>
+        </p:spPr>
+        <p:txBody>
+          <a:bodyPr/>
+          <a:lstStyle/>
+          <a:p>
+            <a:r>
+              <a:rPr lang="en-US" dirty="0"/>
+              <a:t>Evaluation Metrics – 2</a:t>
+            </a:r>
+          </a:p>
+        </p:txBody>
+      </p:sp>
+      <p:pic>
+        <p:nvPicPr>
+          <p:cNvPr id="7" name="Picture 6">
+            <a:extLst>
+              <a:ext uri="{FF2B5EF4-FFF2-40B4-BE49-F238E27FC236}">
+                <a16:creationId xmlns:a16="http://schemas.microsoft.com/office/drawing/2014/main" id="{67BAE453-4D1D-9F81-8703-6AFAB2909C22}"/>
+              </a:ext>
+            </a:extLst>
+          </p:cNvPr>
+          <p:cNvPicPr>
+            <a:picLocks noChangeAspect="1"/>
+          </p:cNvPicPr>
+          <p:nvPr/>
+        </p:nvPicPr>
+        <p:blipFill>
+          <a:blip r:embed="rId2">
+            <a:extLst>
+              <a:ext uri="{28A0092B-C50C-407E-A947-70E740481C1C}">
+                <a14:useLocalDpi xmlns:a14="http://schemas.microsoft.com/office/drawing/2010/main" val="0"/>
+              </a:ext>
+            </a:extLst>
+          </a:blip>
+          <a:srcRect l="2028" t="5982" r="2264" b="15792"/>
+          <a:stretch>
+            <a:fillRect/>
+          </a:stretch>
+        </p:blipFill>
+        <p:spPr>
+          <a:xfrm>
+            <a:off x="804672" y="2139696"/>
+            <a:ext cx="11135824" cy="1975104"/>
+          </a:xfrm>
+          <a:prstGeom prst="rect">
+            <a:avLst/>
+          </a:prstGeom>
+        </p:spPr>
+      </p:pic>
+    </p:spTree>
+    <p:extLst>
+      <p:ext uri="{BB962C8B-B14F-4D97-AF65-F5344CB8AC3E}">
+        <p14:creationId xmlns:p14="http://schemas.microsoft.com/office/powerpoint/2010/main" val="3302044455"/>
+      </p:ext>
+    </p:extLst>
+  </p:cSld>
+  <p:clrMapOvr>
+    <a:masterClrMapping/>
+  </p:clrMapOvr>
+</p:sld>
+</file>
+
+<file path=ppt/slides/slide19.xml><?xml version="1.0" encoding="utf-8"?>
 <p:sld xmlns:a="http://schemas.openxmlformats.org/drawingml/2006/main" xmlns:r="http://schemas.openxmlformats.org/officeDocument/2006/relationships" xmlns:p="http://schemas.openxmlformats.org/presentationml/2006/main">
   <p:cSld>
     <p:bg>
@@ -21784,596 +23124,6 @@
     <p:extLst>
       <p:ext uri="{BB962C8B-B14F-4D97-AF65-F5344CB8AC3E}">
         <p14:creationId xmlns:p14="http://schemas.microsoft.com/office/powerpoint/2010/main" val="1777616236"/>
-      </p:ext>
-    </p:extLst>
-  </p:cSld>
-  <p:clrMapOvr>
-    <a:masterClrMapping/>
-  </p:clrMapOvr>
-</p:sld>
-</file>
-
-<file path=ppt/slides/slide17.xml><?xml version="1.0" encoding="utf-8"?>
-<p:sld xmlns:a="http://schemas.openxmlformats.org/drawingml/2006/main" xmlns:r="http://schemas.openxmlformats.org/officeDocument/2006/relationships" xmlns:p="http://schemas.openxmlformats.org/presentationml/2006/main">
-  <p:cSld>
-    <p:bg>
-      <p:bgPr>
-        <a:solidFill>
-          <a:schemeClr val="bg1"/>
-        </a:solidFill>
-        <a:effectLst/>
-      </p:bgPr>
-    </p:bg>
-    <p:spTree>
-      <p:nvGrpSpPr>
-        <p:cNvPr id="1" name="">
-          <a:extLst>
-            <a:ext uri="{FF2B5EF4-FFF2-40B4-BE49-F238E27FC236}">
-              <a16:creationId xmlns:a16="http://schemas.microsoft.com/office/drawing/2014/main" id="{518DFF9A-C8C1-1DDA-B438-6C20C44149D7}"/>
-            </a:ext>
-          </a:extLst>
-        </p:cNvPr>
-        <p:cNvGrpSpPr/>
-        <p:nvPr/>
-      </p:nvGrpSpPr>
-      <p:grpSpPr>
-        <a:xfrm>
-          <a:off x="0" y="0"/>
-          <a:ext cx="0" cy="0"/>
-          <a:chOff x="0" y="0"/>
-          <a:chExt cx="0" cy="0"/>
-        </a:xfrm>
-      </p:grpSpPr>
-      <p:sp>
-        <p:nvSpPr>
-          <p:cNvPr id="8" name="Rectangle 7">
-            <a:extLst>
-              <a:ext uri="{FF2B5EF4-FFF2-40B4-BE49-F238E27FC236}">
-                <a16:creationId xmlns:a16="http://schemas.microsoft.com/office/drawing/2014/main" id="{BEBA7AFE-81B0-AF62-D123-FC29634E9581}"/>
-              </a:ext>
-              <a:ext uri="{C183D7F6-B498-43B3-948B-1728B52AA6E4}">
-                <adec:decorative xmlns:adec="http://schemas.microsoft.com/office/drawing/2017/decorative" val="1"/>
-              </a:ext>
-            </a:extLst>
-          </p:cNvPr>
-          <p:cNvSpPr>
-            <a:spLocks noGrp="1" noRot="1" noChangeAspect="1" noMove="1" noResize="1" noEditPoints="1" noAdjustHandles="1" noChangeArrowheads="1" noChangeShapeType="1" noTextEdit="1"/>
-          </p:cNvSpPr>
-          <p:nvPr>
-            <p:extLst>
-              <p:ext uri="{386F3935-93C4-4BCD-93E2-E3B085C9AB24}">
-                <p16:designElem xmlns:p16="http://schemas.microsoft.com/office/powerpoint/2015/main" val="1"/>
-              </p:ext>
-            </p:extLst>
-          </p:nvPr>
-        </p:nvSpPr>
-        <p:spPr>
-          <a:xfrm>
-            <a:off x="-1" y="0"/>
-            <a:ext cx="12192000" cy="6858000"/>
-          </a:xfrm>
-          <a:prstGeom prst="rect">
-            <a:avLst/>
-          </a:prstGeom>
-          <a:ln>
-            <a:noFill/>
-          </a:ln>
-        </p:spPr>
-        <p:style>
-          <a:lnRef idx="2">
-            <a:schemeClr val="accent1">
-              <a:shade val="50000"/>
-            </a:schemeClr>
-          </a:lnRef>
-          <a:fillRef idx="1003">
-            <a:schemeClr val="dk2"/>
-          </a:fillRef>
-          <a:effectRef idx="0">
-            <a:schemeClr val="accent1"/>
-          </a:effectRef>
-          <a:fontRef idx="minor">
-            <a:schemeClr val="lt1"/>
-          </a:fontRef>
-        </p:style>
-        <p:txBody>
-          <a:bodyPr rtlCol="0" anchor="ctr"/>
-          <a:lstStyle/>
-          <a:p>
-            <a:pPr algn="ctr"/>
-            <a:endParaRPr lang="en-US"/>
-          </a:p>
-        </p:txBody>
-      </p:sp>
-      <p:sp>
-        <p:nvSpPr>
-          <p:cNvPr id="2" name="Title 1">
-            <a:extLst>
-              <a:ext uri="{FF2B5EF4-FFF2-40B4-BE49-F238E27FC236}">
-                <a16:creationId xmlns:a16="http://schemas.microsoft.com/office/drawing/2014/main" id="{585E5C39-8F39-50FA-F4C6-1D8EB76B4FE6}"/>
-              </a:ext>
-            </a:extLst>
-          </p:cNvPr>
-          <p:cNvSpPr>
-            <a:spLocks noGrp="1"/>
-          </p:cNvSpPr>
-          <p:nvPr>
-            <p:ph type="title"/>
-          </p:nvPr>
-        </p:nvSpPr>
-        <p:spPr>
-          <a:xfrm>
-            <a:off x="696686" y="1122001"/>
-            <a:ext cx="3040685" cy="4613999"/>
-          </a:xfrm>
-        </p:spPr>
-        <p:txBody>
-          <a:bodyPr anchor="ctr">
-            <a:normAutofit/>
-          </a:bodyPr>
-          <a:lstStyle/>
-          <a:p>
-            <a:pPr algn="l"/>
-            <a:r>
-              <a:rPr lang="en-US" sz="2400" dirty="0">
-                <a:solidFill>
-                  <a:schemeClr val="bg1"/>
-                </a:solidFill>
-                <a:effectLst/>
-              </a:rPr>
-              <a:t>Ethics &amp; Risk Assessment</a:t>
-            </a:r>
-          </a:p>
-        </p:txBody>
-      </p:sp>
-      <p:sp useBgFill="1">
-        <p:nvSpPr>
-          <p:cNvPr id="10" name="Rectangle 9">
-            <a:extLst>
-              <a:ext uri="{FF2B5EF4-FFF2-40B4-BE49-F238E27FC236}">
-                <a16:creationId xmlns:a16="http://schemas.microsoft.com/office/drawing/2014/main" id="{E06C9548-68A9-8F07-8462-BB0509EB30D9}"/>
-              </a:ext>
-              <a:ext uri="{C183D7F6-B498-43B3-948B-1728B52AA6E4}">
-                <adec:decorative xmlns:adec="http://schemas.microsoft.com/office/drawing/2017/decorative" val="1"/>
-              </a:ext>
-            </a:extLst>
-          </p:cNvPr>
-          <p:cNvSpPr>
-            <a:spLocks noGrp="1" noRot="1" noChangeAspect="1" noMove="1" noResize="1" noEditPoints="1" noAdjustHandles="1" noChangeArrowheads="1" noChangeShapeType="1" noTextEdit="1"/>
-          </p:cNvSpPr>
-          <p:nvPr>
-            <p:extLst>
-              <p:ext uri="{386F3935-93C4-4BCD-93E2-E3B085C9AB24}">
-                <p16:designElem xmlns:p16="http://schemas.microsoft.com/office/powerpoint/2015/main" val="1"/>
-              </p:ext>
-            </p:extLst>
-          </p:nvPr>
-        </p:nvSpPr>
-        <p:spPr>
-          <a:xfrm>
-            <a:off x="4062129" y="0"/>
-            <a:ext cx="8129873" cy="6858000"/>
-          </a:xfrm>
-          <a:prstGeom prst="rect">
-            <a:avLst/>
-          </a:prstGeom>
-          <a:ln>
-            <a:noFill/>
-          </a:ln>
-        </p:spPr>
-        <p:style>
-          <a:lnRef idx="2">
-            <a:schemeClr val="accent1">
-              <a:shade val="50000"/>
-            </a:schemeClr>
-          </a:lnRef>
-          <a:fillRef idx="1">
-            <a:schemeClr val="accent1"/>
-          </a:fillRef>
-          <a:effectRef idx="0">
-            <a:schemeClr val="accent1"/>
-          </a:effectRef>
-          <a:fontRef idx="minor">
-            <a:schemeClr val="lt1"/>
-          </a:fontRef>
-        </p:style>
-        <p:txBody>
-          <a:bodyPr rtlCol="0" anchor="ctr"/>
-          <a:lstStyle/>
-          <a:p>
-            <a:pPr algn="ctr"/>
-            <a:endParaRPr lang="en-US"/>
-          </a:p>
-        </p:txBody>
-      </p:sp>
-      <p:sp>
-        <p:nvSpPr>
-          <p:cNvPr id="3" name="Content Placeholder 2">
-            <a:extLst>
-              <a:ext uri="{FF2B5EF4-FFF2-40B4-BE49-F238E27FC236}">
-                <a16:creationId xmlns:a16="http://schemas.microsoft.com/office/drawing/2014/main" id="{9BE25F74-9372-C08D-450D-E59CBF015B92}"/>
-              </a:ext>
-            </a:extLst>
-          </p:cNvPr>
-          <p:cNvSpPr>
-            <a:spLocks noGrp="1"/>
-          </p:cNvSpPr>
-          <p:nvPr>
-            <p:ph idx="1"/>
-          </p:nvPr>
-        </p:nvSpPr>
-        <p:spPr>
-          <a:xfrm>
-            <a:off x="4535424" y="1122001"/>
-            <a:ext cx="7351775" cy="4613999"/>
-          </a:xfrm>
-        </p:spPr>
-        <p:txBody>
-          <a:bodyPr anchor="ctr">
-            <a:normAutofit/>
-          </a:bodyPr>
-          <a:lstStyle/>
-          <a:p>
-            <a:r>
-              <a:rPr lang="en-US" sz="2400" dirty="0">
-                <a:effectLst/>
-              </a:rPr>
-              <a:t>Responsibly crawling.</a:t>
-            </a:r>
-          </a:p>
-          <a:p>
-            <a:r>
-              <a:rPr lang="en-US" sz="2400" dirty="0">
-                <a:effectLst/>
-              </a:rPr>
-              <a:t>Data Protection</a:t>
-            </a:r>
-          </a:p>
-          <a:p>
-            <a:r>
-              <a:rPr lang="en-US" sz="2400" dirty="0">
-                <a:effectLst/>
-              </a:rPr>
-              <a:t>Copyright</a:t>
-            </a:r>
-          </a:p>
-          <a:p>
-            <a:pPr lvl="1"/>
-            <a:r>
-              <a:rPr lang="en-US" sz="2400" dirty="0">
-                <a:effectLst/>
-              </a:rPr>
-              <a:t> Retrieving metadata only. </a:t>
-            </a:r>
-          </a:p>
-          <a:p>
-            <a:pPr lvl="1"/>
-            <a:r>
-              <a:rPr lang="en-US" sz="2400" dirty="0">
-                <a:effectLst/>
-              </a:rPr>
-              <a:t>Summarize instead of copying content.</a:t>
-            </a:r>
-          </a:p>
-          <a:p>
-            <a:pPr marL="228600" lvl="1">
-              <a:spcBef>
-                <a:spcPts val="1000"/>
-              </a:spcBef>
-            </a:pPr>
-            <a:r>
-              <a:rPr lang="en-US" sz="2400" dirty="0">
-                <a:effectLst/>
-              </a:rPr>
-              <a:t>Transparency</a:t>
-            </a:r>
-          </a:p>
-        </p:txBody>
-      </p:sp>
-    </p:spTree>
-    <p:extLst>
-      <p:ext uri="{BB962C8B-B14F-4D97-AF65-F5344CB8AC3E}">
-        <p14:creationId xmlns:p14="http://schemas.microsoft.com/office/powerpoint/2010/main" val="2695594141"/>
-      </p:ext>
-    </p:extLst>
-  </p:cSld>
-  <p:clrMapOvr>
-    <a:overrideClrMapping bg1="lt1" tx1="dk1" bg2="lt2" tx2="dk2" accent1="accent1" accent2="accent2" accent3="accent3" accent4="accent4" accent5="accent5" accent6="accent6" hlink="hlink" folHlink="folHlink"/>
-  </p:clrMapOvr>
-</p:sld>
-</file>
-
-<file path=ppt/slides/slide18.xml><?xml version="1.0" encoding="utf-8"?>
-<p:sld xmlns:a="http://schemas.openxmlformats.org/drawingml/2006/main" xmlns:r="http://schemas.openxmlformats.org/officeDocument/2006/relationships" xmlns:p="http://schemas.openxmlformats.org/presentationml/2006/main">
-  <p:cSld>
-    <p:bg>
-      <p:bgPr>
-        <a:blipFill rotWithShape="1">
-          <a:blip r:embed="rId2">
-            <a:duotone>
-              <a:schemeClr val="bg2">
-                <a:shade val="18000"/>
-                <a:satMod val="160000"/>
-                <a:lumMod val="28000"/>
-              </a:schemeClr>
-              <a:schemeClr val="bg2">
-                <a:tint val="95000"/>
-                <a:satMod val="160000"/>
-                <a:lumMod val="116000"/>
-              </a:schemeClr>
-            </a:duotone>
-          </a:blip>
-          <a:stretch/>
-        </a:blipFill>
-        <a:effectLst/>
-      </p:bgPr>
-    </p:bg>
-    <p:spTree>
-      <p:nvGrpSpPr>
-        <p:cNvPr id="1" name=""/>
-        <p:cNvGrpSpPr/>
-        <p:nvPr/>
-      </p:nvGrpSpPr>
-      <p:grpSpPr>
-        <a:xfrm>
-          <a:off x="0" y="0"/>
-          <a:ext cx="0" cy="0"/>
-          <a:chOff x="0" y="0"/>
-          <a:chExt cx="0" cy="0"/>
-        </a:xfrm>
-      </p:grpSpPr>
-      <p:sp>
-        <p:nvSpPr>
-          <p:cNvPr id="2" name="Title 1">
-            <a:extLst>
-              <a:ext uri="{FF2B5EF4-FFF2-40B4-BE49-F238E27FC236}">
-                <a16:creationId xmlns:a16="http://schemas.microsoft.com/office/drawing/2014/main" id="{BD738AA7-C0C0-3903-F980-511199370295}"/>
-              </a:ext>
-            </a:extLst>
-          </p:cNvPr>
-          <p:cNvSpPr>
-            <a:spLocks noGrp="1"/>
-          </p:cNvSpPr>
-          <p:nvPr>
-            <p:ph type="title"/>
-          </p:nvPr>
-        </p:nvSpPr>
-        <p:spPr>
-          <a:xfrm>
-            <a:off x="913795" y="609600"/>
-            <a:ext cx="10353761" cy="1326321"/>
-          </a:xfrm>
-        </p:spPr>
-        <p:txBody>
-          <a:bodyPr>
-            <a:normAutofit/>
-          </a:bodyPr>
-          <a:lstStyle/>
-          <a:p>
-            <a:r>
-              <a:rPr lang="en-US" dirty="0"/>
-              <a:t>Limitations</a:t>
-            </a:r>
-          </a:p>
-        </p:txBody>
-      </p:sp>
-      <p:graphicFrame>
-        <p:nvGraphicFramePr>
-          <p:cNvPr id="11" name="Content Placeholder 2">
-            <a:extLst>
-              <a:ext uri="{FF2B5EF4-FFF2-40B4-BE49-F238E27FC236}">
-                <a16:creationId xmlns:a16="http://schemas.microsoft.com/office/drawing/2014/main" id="{3BAF6974-48F3-3BB5-DD94-211D0D5E0A82}"/>
-              </a:ext>
-            </a:extLst>
-          </p:cNvPr>
-          <p:cNvGraphicFramePr>
-            <a:graphicFrameLocks noGrp="1"/>
-          </p:cNvGraphicFramePr>
-          <p:nvPr>
-            <p:ph idx="1"/>
-            <p:extLst>
-              <p:ext uri="{D42A27DB-BD31-4B8C-83A1-F6EECF244321}">
-                <p14:modId xmlns:p14="http://schemas.microsoft.com/office/powerpoint/2010/main" val="355744207"/>
-              </p:ext>
-            </p:extLst>
-          </p:nvPr>
-        </p:nvGraphicFramePr>
-        <p:xfrm>
-          <a:off x="914400" y="2257654"/>
-          <a:ext cx="10353675" cy="3303888"/>
-        </p:xfrm>
-        <a:graphic>
-          <a:graphicData uri="http://schemas.openxmlformats.org/drawingml/2006/diagram">
-            <dgm:relIds xmlns:dgm="http://schemas.openxmlformats.org/drawingml/2006/diagram" xmlns:r="http://schemas.openxmlformats.org/officeDocument/2006/relationships" r:dm="rId3" r:lo="rId4" r:qs="rId5" r:cs="rId6"/>
-          </a:graphicData>
-        </a:graphic>
-      </p:graphicFrame>
-    </p:spTree>
-    <p:extLst>
-      <p:ext uri="{BB962C8B-B14F-4D97-AF65-F5344CB8AC3E}">
-        <p14:creationId xmlns:p14="http://schemas.microsoft.com/office/powerpoint/2010/main" val="1438600951"/>
-      </p:ext>
-    </p:extLst>
-  </p:cSld>
-  <p:clrMapOvr>
-    <a:masterClrMapping/>
-  </p:clrMapOvr>
-</p:sld>
-</file>
-
-<file path=ppt/slides/slide19.xml><?xml version="1.0" encoding="utf-8"?>
-<p:sld xmlns:a="http://schemas.openxmlformats.org/drawingml/2006/main" xmlns:r="http://schemas.openxmlformats.org/officeDocument/2006/relationships" xmlns:p="http://schemas.openxmlformats.org/presentationml/2006/main">
-  <p:cSld>
-    <p:bg>
-      <p:bgPr>
-        <a:blipFill rotWithShape="1">
-          <a:blip r:embed="rId2">
-            <a:duotone>
-              <a:schemeClr val="bg2">
-                <a:shade val="18000"/>
-                <a:satMod val="160000"/>
-                <a:lumMod val="28000"/>
-              </a:schemeClr>
-              <a:schemeClr val="bg2">
-                <a:tint val="95000"/>
-                <a:satMod val="160000"/>
-                <a:lumMod val="116000"/>
-              </a:schemeClr>
-            </a:duotone>
-          </a:blip>
-          <a:stretch/>
-        </a:blipFill>
-        <a:effectLst/>
-      </p:bgPr>
-    </p:bg>
-    <p:spTree>
-      <p:nvGrpSpPr>
-        <p:cNvPr id="1" name=""/>
-        <p:cNvGrpSpPr/>
-        <p:nvPr/>
-      </p:nvGrpSpPr>
-      <p:grpSpPr>
-        <a:xfrm>
-          <a:off x="0" y="0"/>
-          <a:ext cx="0" cy="0"/>
-          <a:chOff x="0" y="0"/>
-          <a:chExt cx="0" cy="0"/>
-        </a:xfrm>
-      </p:grpSpPr>
-      <p:sp>
-        <p:nvSpPr>
-          <p:cNvPr id="2" name="Title 1">
-            <a:extLst>
-              <a:ext uri="{FF2B5EF4-FFF2-40B4-BE49-F238E27FC236}">
-                <a16:creationId xmlns:a16="http://schemas.microsoft.com/office/drawing/2014/main" id="{12F9F443-5A42-63B5-378D-6C58012344C3}"/>
-              </a:ext>
-            </a:extLst>
-          </p:cNvPr>
-          <p:cNvSpPr>
-            <a:spLocks noGrp="1"/>
-          </p:cNvSpPr>
-          <p:nvPr>
-            <p:ph type="title"/>
-          </p:nvPr>
-        </p:nvSpPr>
-        <p:spPr>
-          <a:xfrm>
-            <a:off x="913795" y="609600"/>
-            <a:ext cx="10353761" cy="1326321"/>
-          </a:xfrm>
-        </p:spPr>
-        <p:txBody>
-          <a:bodyPr>
-            <a:normAutofit/>
-          </a:bodyPr>
-          <a:lstStyle/>
-          <a:p>
-            <a:r>
-              <a:rPr lang="en-US" dirty="0"/>
-              <a:t>Future Enhancements</a:t>
-            </a:r>
-          </a:p>
-        </p:txBody>
-      </p:sp>
-      <p:sp>
-        <p:nvSpPr>
-          <p:cNvPr id="9" name="Rectangle 8">
-            <a:extLst>
-              <a:ext uri="{FF2B5EF4-FFF2-40B4-BE49-F238E27FC236}">
-                <a16:creationId xmlns:a16="http://schemas.microsoft.com/office/drawing/2014/main" id="{EFA2AC96-1E47-421C-A03F-F98E354EB4E6}"/>
-              </a:ext>
-              <a:ext uri="{C183D7F6-B498-43B3-948B-1728B52AA6E4}">
-                <adec:decorative xmlns:adec="http://schemas.microsoft.com/office/drawing/2017/decorative" val="1"/>
-              </a:ext>
-            </a:extLst>
-          </p:cNvPr>
-          <p:cNvSpPr>
-            <a:spLocks noGrp="1" noRot="1" noChangeAspect="1" noMove="1" noResize="1" noEditPoints="1" noAdjustHandles="1" noChangeArrowheads="1" noChangeShapeType="1" noTextEdit="1"/>
-          </p:cNvSpPr>
-          <p:nvPr>
-            <p:extLst>
-              <p:ext uri="{386F3935-93C4-4BCD-93E2-E3B085C9AB24}">
-                <p16:designElem xmlns:p16="http://schemas.microsoft.com/office/powerpoint/2015/main" val="1"/>
-              </p:ext>
-            </p:extLst>
-          </p:nvPr>
-        </p:nvSpPr>
-        <p:spPr>
-          <a:xfrm>
-            <a:off x="0" y="2095500"/>
-            <a:ext cx="12192000" cy="4762500"/>
-          </a:xfrm>
-          <a:prstGeom prst="rect">
-            <a:avLst/>
-          </a:prstGeom>
-          <a:solidFill>
-            <a:schemeClr val="bg1">
-              <a:alpha val="50000"/>
-            </a:schemeClr>
-          </a:solidFill>
-          <a:ln>
-            <a:noFill/>
-          </a:ln>
-        </p:spPr>
-        <p:style>
-          <a:lnRef idx="2">
-            <a:schemeClr val="accent1">
-              <a:shade val="50000"/>
-            </a:schemeClr>
-          </a:lnRef>
-          <a:fillRef idx="1001">
-            <a:schemeClr val="dk1"/>
-          </a:fillRef>
-          <a:effectRef idx="0">
-            <a:schemeClr val="accent1"/>
-          </a:effectRef>
-          <a:fontRef idx="minor">
-            <a:schemeClr val="lt1"/>
-          </a:fontRef>
-        </p:style>
-        <p:txBody>
-          <a:bodyPr rtlCol="0" anchor="ctr"/>
-          <a:lstStyle/>
-          <a:p>
-            <a:pPr algn="ctr"/>
-            <a:endParaRPr lang="en-US"/>
-          </a:p>
-        </p:txBody>
-      </p:sp>
-      <p:graphicFrame>
-        <p:nvGraphicFramePr>
-          <p:cNvPr id="5" name="Content Placeholder 2">
-            <a:extLst>
-              <a:ext uri="{FF2B5EF4-FFF2-40B4-BE49-F238E27FC236}">
-                <a16:creationId xmlns:a16="http://schemas.microsoft.com/office/drawing/2014/main" id="{F1E3F392-81F3-D4DF-71C7-1B2584580F9F}"/>
-              </a:ext>
-            </a:extLst>
-          </p:cNvPr>
-          <p:cNvGraphicFramePr>
-            <a:graphicFrameLocks noGrp="1"/>
-          </p:cNvGraphicFramePr>
-          <p:nvPr>
-            <p:ph idx="1"/>
-            <p:extLst>
-              <p:ext uri="{D42A27DB-BD31-4B8C-83A1-F6EECF244321}">
-                <p14:modId xmlns:p14="http://schemas.microsoft.com/office/powerpoint/2010/main" val="3437008944"/>
-              </p:ext>
-            </p:extLst>
-          </p:nvPr>
-        </p:nvGraphicFramePr>
-        <p:xfrm>
-          <a:off x="914400" y="2417233"/>
-          <a:ext cx="10353675" cy="3305820"/>
-        </p:xfrm>
-        <a:graphic>
-          <a:graphicData uri="http://schemas.openxmlformats.org/drawingml/2006/diagram">
-            <dgm:relIds xmlns:dgm="http://schemas.openxmlformats.org/drawingml/2006/diagram" xmlns:r="http://schemas.openxmlformats.org/officeDocument/2006/relationships" r:dm="rId3" r:lo="rId4" r:qs="rId5" r:cs="rId6"/>
-          </a:graphicData>
-        </a:graphic>
-      </p:graphicFrame>
-    </p:spTree>
-    <p:extLst>
-      <p:ext uri="{BB962C8B-B14F-4D97-AF65-F5344CB8AC3E}">
-        <p14:creationId xmlns:p14="http://schemas.microsoft.com/office/powerpoint/2010/main" val="3551930133"/>
       </p:ext>
     </p:extLst>
   </p:cSld>
@@ -22798,6 +23548,23 @@
                 </a:solidFill>
                 <a:effectLst/>
               </a:rPr>
+              <a:t> CINEBOT UI</a:t>
+            </a:r>
+          </a:p>
+          <a:p>
+            <a:pPr lvl="1">
+              <a:buFont typeface="Wingdings" panose="05000000000000000000" pitchFamily="2" charset="2"/>
+              <a:buChar char="q"/>
+            </a:pPr>
+            <a:r>
+              <a:rPr lang="en-US" sz="2200" dirty="0">
+                <a:solidFill>
+                  <a:schemeClr val="accent5">
+                    <a:lumMod val="75000"/>
+                  </a:schemeClr>
+                </a:solidFill>
+                <a:effectLst/>
+              </a:rPr>
               <a:t> System Architecture </a:t>
             </a:r>
           </a:p>
@@ -22832,7 +23599,41 @@
                 </a:solidFill>
                 <a:effectLst/>
               </a:rPr>
-              <a:t> Evaluation Strategy </a:t>
+              <a:t> Project Demo </a:t>
+            </a:r>
+          </a:p>
+          <a:p>
+            <a:pPr lvl="1">
+              <a:buFont typeface="Wingdings" panose="05000000000000000000" pitchFamily="2" charset="2"/>
+              <a:buChar char="q"/>
+            </a:pPr>
+            <a:r>
+              <a:rPr lang="en-US" sz="2200" dirty="0">
+                <a:solidFill>
+                  <a:schemeClr val="accent5">
+                    <a:lumMod val="75000"/>
+                  </a:schemeClr>
+                </a:solidFill>
+                <a:effectLst/>
+              </a:rPr>
+              <a:t> Evaluation Metrics</a:t>
+            </a:r>
+          </a:p>
+          <a:p>
+            <a:pPr lvl="1">
+              <a:buFont typeface="Wingdings" panose="05000000000000000000" pitchFamily="2" charset="2"/>
+              <a:buChar char="q"/>
+            </a:pPr>
+            <a:r>
+              <a:rPr lang="en-US" sz="2200" dirty="0">
+                <a:solidFill>
+                  <a:schemeClr val="accent5">
+                    <a:lumMod val="75000"/>
+                  </a:schemeClr>
+                </a:solidFill>
+                <a:effectLst/>
+              </a:rPr>
+              <a:t> Outcomes</a:t>
             </a:r>
           </a:p>
           <a:p>
@@ -22883,64 +23684,12 @@
                 </a:solidFill>
                 <a:effectLst/>
               </a:rPr>
-              <a:t> Project Demo </a:t>
-            </a:r>
-          </a:p>
-          <a:p>
-            <a:pPr lvl="1">
-              <a:buFont typeface="Wingdings" panose="05000000000000000000" pitchFamily="2" charset="2"/>
-              <a:buChar char="q"/>
-            </a:pPr>
-            <a:r>
-              <a:rPr lang="en-US" sz="2200" dirty="0">
-                <a:solidFill>
-                  <a:schemeClr val="accent5">
-                    <a:lumMod val="75000"/>
-                  </a:schemeClr>
-                </a:solidFill>
-                <a:effectLst/>
-              </a:rPr>
-              <a:t> Evaluation</a:t>
-            </a:r>
-          </a:p>
-          <a:p>
-            <a:pPr lvl="1">
-              <a:buFont typeface="Wingdings" panose="05000000000000000000" pitchFamily="2" charset="2"/>
-              <a:buChar char="q"/>
-            </a:pPr>
-            <a:r>
-              <a:rPr lang="en-US" sz="2200" dirty="0">
-                <a:solidFill>
-                  <a:schemeClr val="accent5">
-                    <a:lumMod val="75000"/>
-                  </a:schemeClr>
-                </a:solidFill>
-                <a:effectLst/>
-              </a:rPr>
-              <a:t> Outcomes</a:t>
-            </a:r>
-          </a:p>
-          <a:p>
-            <a:pPr lvl="1">
-              <a:buFont typeface="Wingdings" panose="05000000000000000000" pitchFamily="2" charset="2"/>
-              <a:buChar char="q"/>
-            </a:pPr>
-            <a:r>
-              <a:rPr lang="en-US" sz="2200" dirty="0">
-                <a:solidFill>
-                  <a:schemeClr val="accent5">
-                    <a:lumMod val="75000"/>
-                  </a:schemeClr>
-                </a:solidFill>
-                <a:effectLst/>
-              </a:rPr>
               <a:t> Future Enhancements</a:t>
             </a:r>
           </a:p>
           <a:p>
-            <a:pPr lvl="1">
-              <a:buFont typeface="Wingdings" panose="05000000000000000000" pitchFamily="2" charset="2"/>
-              <a:buChar char="q"/>
+            <a:pPr marL="457200" lvl="1" indent="0">
+              <a:buNone/>
             </a:pPr>
             <a:endParaRPr lang="en-US" sz="2200" dirty="0">
               <a:solidFill>
@@ -22967,6 +23716,596 @@
 </file>
 
 <file path=ppt/slides/slide20.xml><?xml version="1.0" encoding="utf-8"?>
+<p:sld xmlns:a="http://schemas.openxmlformats.org/drawingml/2006/main" xmlns:r="http://schemas.openxmlformats.org/officeDocument/2006/relationships" xmlns:p="http://schemas.openxmlformats.org/presentationml/2006/main">
+  <p:cSld>
+    <p:bg>
+      <p:bgPr>
+        <a:solidFill>
+          <a:schemeClr val="bg1"/>
+        </a:solidFill>
+        <a:effectLst/>
+      </p:bgPr>
+    </p:bg>
+    <p:spTree>
+      <p:nvGrpSpPr>
+        <p:cNvPr id="1" name="">
+          <a:extLst>
+            <a:ext uri="{FF2B5EF4-FFF2-40B4-BE49-F238E27FC236}">
+              <a16:creationId xmlns:a16="http://schemas.microsoft.com/office/drawing/2014/main" id="{518DFF9A-C8C1-1DDA-B438-6C20C44149D7}"/>
+            </a:ext>
+          </a:extLst>
+        </p:cNvPr>
+        <p:cNvGrpSpPr/>
+        <p:nvPr/>
+      </p:nvGrpSpPr>
+      <p:grpSpPr>
+        <a:xfrm>
+          <a:off x="0" y="0"/>
+          <a:ext cx="0" cy="0"/>
+          <a:chOff x="0" y="0"/>
+          <a:chExt cx="0" cy="0"/>
+        </a:xfrm>
+      </p:grpSpPr>
+      <p:sp>
+        <p:nvSpPr>
+          <p:cNvPr id="8" name="Rectangle 7">
+            <a:extLst>
+              <a:ext uri="{FF2B5EF4-FFF2-40B4-BE49-F238E27FC236}">
+                <a16:creationId xmlns:a16="http://schemas.microsoft.com/office/drawing/2014/main" id="{BEBA7AFE-81B0-AF62-D123-FC29634E9581}"/>
+              </a:ext>
+              <a:ext uri="{C183D7F6-B498-43B3-948B-1728B52AA6E4}">
+                <adec:decorative xmlns:adec="http://schemas.microsoft.com/office/drawing/2017/decorative" val="1"/>
+              </a:ext>
+            </a:extLst>
+          </p:cNvPr>
+          <p:cNvSpPr>
+            <a:spLocks noGrp="1" noRot="1" noChangeAspect="1" noMove="1" noResize="1" noEditPoints="1" noAdjustHandles="1" noChangeArrowheads="1" noChangeShapeType="1" noTextEdit="1"/>
+          </p:cNvSpPr>
+          <p:nvPr>
+            <p:extLst>
+              <p:ext uri="{386F3935-93C4-4BCD-93E2-E3B085C9AB24}">
+                <p16:designElem xmlns:p16="http://schemas.microsoft.com/office/powerpoint/2015/main" val="1"/>
+              </p:ext>
+            </p:extLst>
+          </p:nvPr>
+        </p:nvSpPr>
+        <p:spPr>
+          <a:xfrm>
+            <a:off x="-1" y="0"/>
+            <a:ext cx="12192000" cy="6858000"/>
+          </a:xfrm>
+          <a:prstGeom prst="rect">
+            <a:avLst/>
+          </a:prstGeom>
+          <a:ln>
+            <a:noFill/>
+          </a:ln>
+        </p:spPr>
+        <p:style>
+          <a:lnRef idx="2">
+            <a:schemeClr val="accent1">
+              <a:shade val="50000"/>
+            </a:schemeClr>
+          </a:lnRef>
+          <a:fillRef idx="1003">
+            <a:schemeClr val="dk2"/>
+          </a:fillRef>
+          <a:effectRef idx="0">
+            <a:schemeClr val="accent1"/>
+          </a:effectRef>
+          <a:fontRef idx="minor">
+            <a:schemeClr val="lt1"/>
+          </a:fontRef>
+        </p:style>
+        <p:txBody>
+          <a:bodyPr rtlCol="0" anchor="ctr"/>
+          <a:lstStyle/>
+          <a:p>
+            <a:pPr algn="ctr"/>
+            <a:endParaRPr lang="en-US"/>
+          </a:p>
+        </p:txBody>
+      </p:sp>
+      <p:sp>
+        <p:nvSpPr>
+          <p:cNvPr id="2" name="Title 1">
+            <a:extLst>
+              <a:ext uri="{FF2B5EF4-FFF2-40B4-BE49-F238E27FC236}">
+                <a16:creationId xmlns:a16="http://schemas.microsoft.com/office/drawing/2014/main" id="{585E5C39-8F39-50FA-F4C6-1D8EB76B4FE6}"/>
+              </a:ext>
+            </a:extLst>
+          </p:cNvPr>
+          <p:cNvSpPr>
+            <a:spLocks noGrp="1"/>
+          </p:cNvSpPr>
+          <p:nvPr>
+            <p:ph type="title"/>
+          </p:nvPr>
+        </p:nvSpPr>
+        <p:spPr>
+          <a:xfrm>
+            <a:off x="696686" y="1122001"/>
+            <a:ext cx="3040685" cy="4613999"/>
+          </a:xfrm>
+        </p:spPr>
+        <p:txBody>
+          <a:bodyPr anchor="ctr">
+            <a:normAutofit/>
+          </a:bodyPr>
+          <a:lstStyle/>
+          <a:p>
+            <a:pPr algn="l"/>
+            <a:r>
+              <a:rPr lang="en-US" sz="2400" dirty="0">
+                <a:solidFill>
+                  <a:schemeClr val="bg1"/>
+                </a:solidFill>
+                <a:effectLst/>
+              </a:rPr>
+              <a:t>Ethics &amp; Risk Assessment</a:t>
+            </a:r>
+          </a:p>
+        </p:txBody>
+      </p:sp>
+      <p:sp useBgFill="1">
+        <p:nvSpPr>
+          <p:cNvPr id="10" name="Rectangle 9">
+            <a:extLst>
+              <a:ext uri="{FF2B5EF4-FFF2-40B4-BE49-F238E27FC236}">
+                <a16:creationId xmlns:a16="http://schemas.microsoft.com/office/drawing/2014/main" id="{E06C9548-68A9-8F07-8462-BB0509EB30D9}"/>
+              </a:ext>
+              <a:ext uri="{C183D7F6-B498-43B3-948B-1728B52AA6E4}">
+                <adec:decorative xmlns:adec="http://schemas.microsoft.com/office/drawing/2017/decorative" val="1"/>
+              </a:ext>
+            </a:extLst>
+          </p:cNvPr>
+          <p:cNvSpPr>
+            <a:spLocks noGrp="1" noRot="1" noChangeAspect="1" noMove="1" noResize="1" noEditPoints="1" noAdjustHandles="1" noChangeArrowheads="1" noChangeShapeType="1" noTextEdit="1"/>
+          </p:cNvSpPr>
+          <p:nvPr>
+            <p:extLst>
+              <p:ext uri="{386F3935-93C4-4BCD-93E2-E3B085C9AB24}">
+                <p16:designElem xmlns:p16="http://schemas.microsoft.com/office/powerpoint/2015/main" val="1"/>
+              </p:ext>
+            </p:extLst>
+          </p:nvPr>
+        </p:nvSpPr>
+        <p:spPr>
+          <a:xfrm>
+            <a:off x="4062129" y="0"/>
+            <a:ext cx="8129873" cy="6858000"/>
+          </a:xfrm>
+          <a:prstGeom prst="rect">
+            <a:avLst/>
+          </a:prstGeom>
+          <a:ln>
+            <a:noFill/>
+          </a:ln>
+        </p:spPr>
+        <p:style>
+          <a:lnRef idx="2">
+            <a:schemeClr val="accent1">
+              <a:shade val="50000"/>
+            </a:schemeClr>
+          </a:lnRef>
+          <a:fillRef idx="1">
+            <a:schemeClr val="accent1"/>
+          </a:fillRef>
+          <a:effectRef idx="0">
+            <a:schemeClr val="accent1"/>
+          </a:effectRef>
+          <a:fontRef idx="minor">
+            <a:schemeClr val="lt1"/>
+          </a:fontRef>
+        </p:style>
+        <p:txBody>
+          <a:bodyPr rtlCol="0" anchor="ctr"/>
+          <a:lstStyle/>
+          <a:p>
+            <a:pPr algn="ctr"/>
+            <a:endParaRPr lang="en-US"/>
+          </a:p>
+        </p:txBody>
+      </p:sp>
+      <p:sp>
+        <p:nvSpPr>
+          <p:cNvPr id="3" name="Content Placeholder 2">
+            <a:extLst>
+              <a:ext uri="{FF2B5EF4-FFF2-40B4-BE49-F238E27FC236}">
+                <a16:creationId xmlns:a16="http://schemas.microsoft.com/office/drawing/2014/main" id="{9BE25F74-9372-C08D-450D-E59CBF015B92}"/>
+              </a:ext>
+            </a:extLst>
+          </p:cNvPr>
+          <p:cNvSpPr>
+            <a:spLocks noGrp="1"/>
+          </p:cNvSpPr>
+          <p:nvPr>
+            <p:ph idx="1"/>
+          </p:nvPr>
+        </p:nvSpPr>
+        <p:spPr>
+          <a:xfrm>
+            <a:off x="4535424" y="1122001"/>
+            <a:ext cx="7351775" cy="4613999"/>
+          </a:xfrm>
+        </p:spPr>
+        <p:txBody>
+          <a:bodyPr anchor="ctr">
+            <a:normAutofit/>
+          </a:bodyPr>
+          <a:lstStyle/>
+          <a:p>
+            <a:r>
+              <a:rPr lang="en-US" sz="2400" dirty="0">
+                <a:effectLst/>
+              </a:rPr>
+              <a:t>Responsibly crawling.</a:t>
+            </a:r>
+          </a:p>
+          <a:p>
+            <a:r>
+              <a:rPr lang="en-US" sz="2400" dirty="0">
+                <a:effectLst/>
+              </a:rPr>
+              <a:t>Data Protection</a:t>
+            </a:r>
+          </a:p>
+          <a:p>
+            <a:r>
+              <a:rPr lang="en-US" sz="2400" dirty="0">
+                <a:effectLst/>
+              </a:rPr>
+              <a:t>Copyright</a:t>
+            </a:r>
+          </a:p>
+          <a:p>
+            <a:pPr lvl="1"/>
+            <a:r>
+              <a:rPr lang="en-US" sz="2400" dirty="0">
+                <a:effectLst/>
+              </a:rPr>
+              <a:t> Retrieving metadata only. </a:t>
+            </a:r>
+          </a:p>
+          <a:p>
+            <a:pPr lvl="1"/>
+            <a:r>
+              <a:rPr lang="en-US" sz="2400" dirty="0">
+                <a:effectLst/>
+              </a:rPr>
+              <a:t>Summarize instead of copying content.</a:t>
+            </a:r>
+          </a:p>
+          <a:p>
+            <a:pPr marL="228600" lvl="1">
+              <a:spcBef>
+                <a:spcPts val="1000"/>
+              </a:spcBef>
+            </a:pPr>
+            <a:r>
+              <a:rPr lang="en-US" sz="2400" dirty="0">
+                <a:effectLst/>
+              </a:rPr>
+              <a:t>Transparency</a:t>
+            </a:r>
+          </a:p>
+        </p:txBody>
+      </p:sp>
+    </p:spTree>
+    <p:extLst>
+      <p:ext uri="{BB962C8B-B14F-4D97-AF65-F5344CB8AC3E}">
+        <p14:creationId xmlns:p14="http://schemas.microsoft.com/office/powerpoint/2010/main" val="2695594141"/>
+      </p:ext>
+    </p:extLst>
+  </p:cSld>
+  <p:clrMapOvr>
+    <a:overrideClrMapping bg1="lt1" tx1="dk1" bg2="lt2" tx2="dk2" accent1="accent1" accent2="accent2" accent3="accent3" accent4="accent4" accent5="accent5" accent6="accent6" hlink="hlink" folHlink="folHlink"/>
+  </p:clrMapOvr>
+</p:sld>
+</file>
+
+<file path=ppt/slides/slide21.xml><?xml version="1.0" encoding="utf-8"?>
+<p:sld xmlns:a="http://schemas.openxmlformats.org/drawingml/2006/main" xmlns:r="http://schemas.openxmlformats.org/officeDocument/2006/relationships" xmlns:p="http://schemas.openxmlformats.org/presentationml/2006/main">
+  <p:cSld>
+    <p:bg>
+      <p:bgPr>
+        <a:blipFill rotWithShape="1">
+          <a:blip r:embed="rId2">
+            <a:duotone>
+              <a:schemeClr val="bg2">
+                <a:shade val="18000"/>
+                <a:satMod val="160000"/>
+                <a:lumMod val="28000"/>
+              </a:schemeClr>
+              <a:schemeClr val="bg2">
+                <a:tint val="95000"/>
+                <a:satMod val="160000"/>
+                <a:lumMod val="116000"/>
+              </a:schemeClr>
+            </a:duotone>
+          </a:blip>
+          <a:stretch/>
+        </a:blipFill>
+        <a:effectLst/>
+      </p:bgPr>
+    </p:bg>
+    <p:spTree>
+      <p:nvGrpSpPr>
+        <p:cNvPr id="1" name=""/>
+        <p:cNvGrpSpPr/>
+        <p:nvPr/>
+      </p:nvGrpSpPr>
+      <p:grpSpPr>
+        <a:xfrm>
+          <a:off x="0" y="0"/>
+          <a:ext cx="0" cy="0"/>
+          <a:chOff x="0" y="0"/>
+          <a:chExt cx="0" cy="0"/>
+        </a:xfrm>
+      </p:grpSpPr>
+      <p:sp>
+        <p:nvSpPr>
+          <p:cNvPr id="2" name="Title 1">
+            <a:extLst>
+              <a:ext uri="{FF2B5EF4-FFF2-40B4-BE49-F238E27FC236}">
+                <a16:creationId xmlns:a16="http://schemas.microsoft.com/office/drawing/2014/main" id="{BD738AA7-C0C0-3903-F980-511199370295}"/>
+              </a:ext>
+            </a:extLst>
+          </p:cNvPr>
+          <p:cNvSpPr>
+            <a:spLocks noGrp="1"/>
+          </p:cNvSpPr>
+          <p:nvPr>
+            <p:ph type="title"/>
+          </p:nvPr>
+        </p:nvSpPr>
+        <p:spPr>
+          <a:xfrm>
+            <a:off x="913795" y="609600"/>
+            <a:ext cx="10353761" cy="1326321"/>
+          </a:xfrm>
+        </p:spPr>
+        <p:txBody>
+          <a:bodyPr>
+            <a:normAutofit/>
+          </a:bodyPr>
+          <a:lstStyle/>
+          <a:p>
+            <a:r>
+              <a:rPr lang="en-US" dirty="0"/>
+              <a:t>Limitations</a:t>
+            </a:r>
+          </a:p>
+        </p:txBody>
+      </p:sp>
+      <p:graphicFrame>
+        <p:nvGraphicFramePr>
+          <p:cNvPr id="11" name="Content Placeholder 2">
+            <a:extLst>
+              <a:ext uri="{FF2B5EF4-FFF2-40B4-BE49-F238E27FC236}">
+                <a16:creationId xmlns:a16="http://schemas.microsoft.com/office/drawing/2014/main" id="{3BAF6974-48F3-3BB5-DD94-211D0D5E0A82}"/>
+              </a:ext>
+            </a:extLst>
+          </p:cNvPr>
+          <p:cNvGraphicFramePr>
+            <a:graphicFrameLocks noGrp="1"/>
+          </p:cNvGraphicFramePr>
+          <p:nvPr>
+            <p:ph idx="1"/>
+            <p:extLst>
+              <p:ext uri="{D42A27DB-BD31-4B8C-83A1-F6EECF244321}">
+                <p14:modId xmlns:p14="http://schemas.microsoft.com/office/powerpoint/2010/main" val="355744207"/>
+              </p:ext>
+            </p:extLst>
+          </p:nvPr>
+        </p:nvGraphicFramePr>
+        <p:xfrm>
+          <a:off x="914400" y="2257654"/>
+          <a:ext cx="10353675" cy="3303888"/>
+        </p:xfrm>
+        <a:graphic>
+          <a:graphicData uri="http://schemas.openxmlformats.org/drawingml/2006/diagram">
+            <dgm:relIds xmlns:dgm="http://schemas.openxmlformats.org/drawingml/2006/diagram" xmlns:r="http://schemas.openxmlformats.org/officeDocument/2006/relationships" r:dm="rId3" r:lo="rId4" r:qs="rId5" r:cs="rId6"/>
+          </a:graphicData>
+        </a:graphic>
+      </p:graphicFrame>
+    </p:spTree>
+    <p:extLst>
+      <p:ext uri="{BB962C8B-B14F-4D97-AF65-F5344CB8AC3E}">
+        <p14:creationId xmlns:p14="http://schemas.microsoft.com/office/powerpoint/2010/main" val="1438600951"/>
+      </p:ext>
+    </p:extLst>
+  </p:cSld>
+  <p:clrMapOvr>
+    <a:masterClrMapping/>
+  </p:clrMapOvr>
+</p:sld>
+</file>
+
+<file path=ppt/slides/slide22.xml><?xml version="1.0" encoding="utf-8"?>
+<p:sld xmlns:a="http://schemas.openxmlformats.org/drawingml/2006/main" xmlns:r="http://schemas.openxmlformats.org/officeDocument/2006/relationships" xmlns:p="http://schemas.openxmlformats.org/presentationml/2006/main">
+  <p:cSld>
+    <p:bg>
+      <p:bgPr>
+        <a:blipFill rotWithShape="1">
+          <a:blip r:embed="rId2">
+            <a:duotone>
+              <a:schemeClr val="bg2">
+                <a:shade val="18000"/>
+                <a:satMod val="160000"/>
+                <a:lumMod val="28000"/>
+              </a:schemeClr>
+              <a:schemeClr val="bg2">
+                <a:tint val="95000"/>
+                <a:satMod val="160000"/>
+                <a:lumMod val="116000"/>
+              </a:schemeClr>
+            </a:duotone>
+          </a:blip>
+          <a:stretch/>
+        </a:blipFill>
+        <a:effectLst/>
+      </p:bgPr>
+    </p:bg>
+    <p:spTree>
+      <p:nvGrpSpPr>
+        <p:cNvPr id="1" name=""/>
+        <p:cNvGrpSpPr/>
+        <p:nvPr/>
+      </p:nvGrpSpPr>
+      <p:grpSpPr>
+        <a:xfrm>
+          <a:off x="0" y="0"/>
+          <a:ext cx="0" cy="0"/>
+          <a:chOff x="0" y="0"/>
+          <a:chExt cx="0" cy="0"/>
+        </a:xfrm>
+      </p:grpSpPr>
+      <p:sp>
+        <p:nvSpPr>
+          <p:cNvPr id="2" name="Title 1">
+            <a:extLst>
+              <a:ext uri="{FF2B5EF4-FFF2-40B4-BE49-F238E27FC236}">
+                <a16:creationId xmlns:a16="http://schemas.microsoft.com/office/drawing/2014/main" id="{12F9F443-5A42-63B5-378D-6C58012344C3}"/>
+              </a:ext>
+            </a:extLst>
+          </p:cNvPr>
+          <p:cNvSpPr>
+            <a:spLocks noGrp="1"/>
+          </p:cNvSpPr>
+          <p:nvPr>
+            <p:ph type="title"/>
+          </p:nvPr>
+        </p:nvSpPr>
+        <p:spPr>
+          <a:xfrm>
+            <a:off x="913795" y="609600"/>
+            <a:ext cx="10353761" cy="1326321"/>
+          </a:xfrm>
+        </p:spPr>
+        <p:txBody>
+          <a:bodyPr>
+            <a:normAutofit/>
+          </a:bodyPr>
+          <a:lstStyle/>
+          <a:p>
+            <a:r>
+              <a:rPr lang="en-US" dirty="0"/>
+              <a:t>Future Enhancements</a:t>
+            </a:r>
+          </a:p>
+        </p:txBody>
+      </p:sp>
+      <p:sp>
+        <p:nvSpPr>
+          <p:cNvPr id="9" name="Rectangle 8">
+            <a:extLst>
+              <a:ext uri="{FF2B5EF4-FFF2-40B4-BE49-F238E27FC236}">
+                <a16:creationId xmlns:a16="http://schemas.microsoft.com/office/drawing/2014/main" id="{EFA2AC96-1E47-421C-A03F-F98E354EB4E6}"/>
+              </a:ext>
+              <a:ext uri="{C183D7F6-B498-43B3-948B-1728B52AA6E4}">
+                <adec:decorative xmlns:adec="http://schemas.microsoft.com/office/drawing/2017/decorative" val="1"/>
+              </a:ext>
+            </a:extLst>
+          </p:cNvPr>
+          <p:cNvSpPr>
+            <a:spLocks noGrp="1" noRot="1" noChangeAspect="1" noMove="1" noResize="1" noEditPoints="1" noAdjustHandles="1" noChangeArrowheads="1" noChangeShapeType="1" noTextEdit="1"/>
+          </p:cNvSpPr>
+          <p:nvPr>
+            <p:extLst>
+              <p:ext uri="{386F3935-93C4-4BCD-93E2-E3B085C9AB24}">
+                <p16:designElem xmlns:p16="http://schemas.microsoft.com/office/powerpoint/2015/main" val="1"/>
+              </p:ext>
+            </p:extLst>
+          </p:nvPr>
+        </p:nvSpPr>
+        <p:spPr>
+          <a:xfrm>
+            <a:off x="0" y="2095500"/>
+            <a:ext cx="12192000" cy="4762500"/>
+          </a:xfrm>
+          <a:prstGeom prst="rect">
+            <a:avLst/>
+          </a:prstGeom>
+          <a:solidFill>
+            <a:schemeClr val="bg1">
+              <a:alpha val="50000"/>
+            </a:schemeClr>
+          </a:solidFill>
+          <a:ln>
+            <a:noFill/>
+          </a:ln>
+        </p:spPr>
+        <p:style>
+          <a:lnRef idx="2">
+            <a:schemeClr val="accent1">
+              <a:shade val="50000"/>
+            </a:schemeClr>
+          </a:lnRef>
+          <a:fillRef idx="1001">
+            <a:schemeClr val="dk1"/>
+          </a:fillRef>
+          <a:effectRef idx="0">
+            <a:schemeClr val="accent1"/>
+          </a:effectRef>
+          <a:fontRef idx="minor">
+            <a:schemeClr val="lt1"/>
+          </a:fontRef>
+        </p:style>
+        <p:txBody>
+          <a:bodyPr rtlCol="0" anchor="ctr"/>
+          <a:lstStyle/>
+          <a:p>
+            <a:pPr algn="ctr"/>
+            <a:endParaRPr lang="en-US"/>
+          </a:p>
+        </p:txBody>
+      </p:sp>
+      <p:graphicFrame>
+        <p:nvGraphicFramePr>
+          <p:cNvPr id="5" name="Content Placeholder 2">
+            <a:extLst>
+              <a:ext uri="{FF2B5EF4-FFF2-40B4-BE49-F238E27FC236}">
+                <a16:creationId xmlns:a16="http://schemas.microsoft.com/office/drawing/2014/main" id="{F1E3F392-81F3-D4DF-71C7-1B2584580F9F}"/>
+              </a:ext>
+            </a:extLst>
+          </p:cNvPr>
+          <p:cNvGraphicFramePr>
+            <a:graphicFrameLocks noGrp="1"/>
+          </p:cNvGraphicFramePr>
+          <p:nvPr>
+            <p:ph idx="1"/>
+            <p:extLst>
+              <p:ext uri="{D42A27DB-BD31-4B8C-83A1-F6EECF244321}">
+                <p14:modId xmlns:p14="http://schemas.microsoft.com/office/powerpoint/2010/main" val="3437008944"/>
+              </p:ext>
+            </p:extLst>
+          </p:nvPr>
+        </p:nvGraphicFramePr>
+        <p:xfrm>
+          <a:off x="914400" y="2417233"/>
+          <a:ext cx="10353675" cy="3305820"/>
+        </p:xfrm>
+        <a:graphic>
+          <a:graphicData uri="http://schemas.openxmlformats.org/drawingml/2006/diagram">
+            <dgm:relIds xmlns:dgm="http://schemas.openxmlformats.org/drawingml/2006/diagram" xmlns:r="http://schemas.openxmlformats.org/officeDocument/2006/relationships" r:dm="rId3" r:lo="rId4" r:qs="rId5" r:cs="rId6"/>
+          </a:graphicData>
+        </a:graphic>
+      </p:graphicFrame>
+    </p:spTree>
+    <p:extLst>
+      <p:ext uri="{BB962C8B-B14F-4D97-AF65-F5344CB8AC3E}">
+        <p14:creationId xmlns:p14="http://schemas.microsoft.com/office/powerpoint/2010/main" val="3551930133"/>
+      </p:ext>
+    </p:extLst>
+  </p:cSld>
+  <p:clrMapOvr>
+    <a:masterClrMapping/>
+  </p:clrMapOvr>
+</p:sld>
+</file>
+
+<file path=ppt/slides/slide23.xml><?xml version="1.0" encoding="utf-8"?>
 <p:sld xmlns:a="http://schemas.openxmlformats.org/drawingml/2006/main" xmlns:r="http://schemas.openxmlformats.org/officeDocument/2006/relationships" xmlns:p="http://schemas.openxmlformats.org/presentationml/2006/main">
   <p:cSld>
     <p:bg>
@@ -24160,23 +25499,15 @@
               <a:rPr lang="en-US" sz="2400" dirty="0">
                 <a:effectLst/>
               </a:rPr>
-              <a:t>Enable semantic search instead of keyword search.</a:t>
+              <a:t>Enable semantic search instead of keyword </a:t>
             </a:r>
-          </a:p>
-          <a:p>
             <a:r>
-              <a:rPr lang="en-US" sz="2400" dirty="0">
+              <a:rPr lang="en-US" sz="2400">
                 <a:effectLst/>
               </a:rPr>
-              <a:t>Building a scalable development and production product.</a:t>
+              <a:t>search.</a:t>
             </a:r>
             <a:endParaRPr lang="en-US" sz="2400" dirty="0">
-              <a:solidFill>
-                <a:schemeClr val="tx1">
-                  <a:lumMod val="95000"/>
-                  <a:lumOff val="5000"/>
-                </a:schemeClr>
-              </a:solidFill>
               <a:effectLst/>
             </a:endParaRPr>
           </a:p>
@@ -25220,9 +26551,23 @@
   <p:cSld>
     <p:bg>
       <p:bgPr>
-        <a:solidFill>
-          <a:schemeClr val="bg1"/>
-        </a:solidFill>
+        <a:blipFill rotWithShape="1">
+          <a:blip r:embed="rId2">
+            <a:duotone>
+              <a:schemeClr val="bg2">
+                <a:shade val="18000"/>
+                <a:satMod val="160000"/>
+                <a:lumMod val="28000"/>
+              </a:schemeClr>
+              <a:schemeClr val="bg2">
+                <a:tint val="95000"/>
+                <a:satMod val="160000"/>
+                <a:lumMod val="116000"/>
+              </a:schemeClr>
+            </a:duotone>
+          </a:blip>
+          <a:stretch/>
+        </a:blipFill>
         <a:effectLst/>
       </p:bgPr>
     </p:bg>
@@ -25242,70 +26587,10 @@
       </p:grpSpPr>
       <p:sp>
         <p:nvSpPr>
-          <p:cNvPr id="29" name="Rectangle 28">
-            <a:extLst>
-              <a:ext uri="{FF2B5EF4-FFF2-40B4-BE49-F238E27FC236}">
-                <a16:creationId xmlns:a16="http://schemas.microsoft.com/office/drawing/2014/main" id="{5C821777-3A3B-437E-B5C1-FBC7B0F48C56}"/>
-              </a:ext>
-              <a:ext uri="{C183D7F6-B498-43B3-948B-1728B52AA6E4}">
-                <adec:decorative xmlns:adec="http://schemas.microsoft.com/office/drawing/2017/decorative" val="1"/>
-              </a:ext>
-            </a:extLst>
-          </p:cNvPr>
-          <p:cNvSpPr>
-            <a:spLocks noGrp="1" noRot="1" noChangeAspect="1" noMove="1" noResize="1" noEditPoints="1" noAdjustHandles="1" noChangeArrowheads="1" noChangeShapeType="1" noTextEdit="1"/>
-          </p:cNvSpPr>
-          <p:nvPr>
-            <p:extLst>
-              <p:ext uri="{386F3935-93C4-4BCD-93E2-E3B085C9AB24}">
-                <p16:designElem xmlns:p16="http://schemas.microsoft.com/office/powerpoint/2015/main" val="1"/>
-              </p:ext>
-            </p:extLst>
-          </p:nvPr>
-        </p:nvSpPr>
-        <p:spPr>
-          <a:xfrm>
-            <a:off x="0" y="0"/>
-            <a:ext cx="12192000" cy="6858000"/>
-          </a:xfrm>
-          <a:prstGeom prst="rect">
-            <a:avLst/>
-          </a:prstGeom>
-          <a:ln>
-            <a:noFill/>
-          </a:ln>
-        </p:spPr>
-        <p:style>
-          <a:lnRef idx="2">
-            <a:schemeClr val="accent1">
-              <a:shade val="50000"/>
-            </a:schemeClr>
-          </a:lnRef>
-          <a:fillRef idx="1003">
-            <a:schemeClr val="dk2"/>
-          </a:fillRef>
-          <a:effectRef idx="0">
-            <a:schemeClr val="accent1"/>
-          </a:effectRef>
-          <a:fontRef idx="minor">
-            <a:schemeClr val="lt1"/>
-          </a:fontRef>
-        </p:style>
-        <p:txBody>
-          <a:bodyPr rtlCol="0" anchor="ctr"/>
-          <a:lstStyle/>
-          <a:p>
-            <a:pPr algn="ctr"/>
-            <a:endParaRPr lang="en-US"/>
-          </a:p>
-        </p:txBody>
-      </p:sp>
-      <p:sp>
-        <p:nvSpPr>
           <p:cNvPr id="2" name="Title 1">
             <a:extLst>
               <a:ext uri="{FF2B5EF4-FFF2-40B4-BE49-F238E27FC236}">
-                <a16:creationId xmlns:a16="http://schemas.microsoft.com/office/drawing/2014/main" id="{7E72B533-6A16-FA41-7A23-26DA0B207F1A}"/>
+                <a16:creationId xmlns:a16="http://schemas.microsoft.com/office/drawing/2014/main" id="{68112A1F-0B24-FAE7-69E0-1FBAD0CBB90A}"/>
               </a:ext>
             </a:extLst>
           </p:cNvPr>
@@ -25318,8 +26603,8 @@
         </p:nvSpPr>
         <p:spPr>
           <a:xfrm>
-            <a:off x="7881719" y="2468879"/>
-            <a:ext cx="3643150" cy="1591437"/>
+            <a:off x="7872575" y="3026663"/>
+            <a:ext cx="3643150" cy="1097661"/>
           </a:xfrm>
         </p:spPr>
         <p:txBody>
@@ -25328,23 +26613,20 @@
           </a:bodyPr>
           <a:lstStyle/>
           <a:p>
+            <a:pPr algn="l"/>
             <a:r>
-              <a:rPr lang="en-US" dirty="0">
-                <a:solidFill>
-                  <a:srgbClr val="FFFFFF"/>
-                </a:solidFill>
-              </a:rPr>
-              <a:t>Technology Stack</a:t>
+              <a:rPr lang="en-US" sz="4000" dirty="0"/>
+              <a:t>CINEBOT UI</a:t>
             </a:r>
           </a:p>
         </p:txBody>
       </p:sp>
       <p:sp>
         <p:nvSpPr>
-          <p:cNvPr id="31" name="Rectangle 30">
+          <p:cNvPr id="12" name="Rectangle 11">
             <a:extLst>
               <a:ext uri="{FF2B5EF4-FFF2-40B4-BE49-F238E27FC236}">
-                <a16:creationId xmlns:a16="http://schemas.microsoft.com/office/drawing/2014/main" id="{A31AD40C-CE73-4162-8681-421B8AF943A2}"/>
+                <a16:creationId xmlns:a16="http://schemas.microsoft.com/office/drawing/2014/main" id="{5BC51F77-AE74-4F38-B1DC-29475E38CABD}"/>
               </a:ext>
               <a:ext uri="{C183D7F6-B498-43B3-948B-1728B52AA6E4}">
                 <adec:decorative xmlns:adec="http://schemas.microsoft.com/office/drawing/2017/decorative" val="1"/>
@@ -25371,11 +26653,11 @@
             <a:avLst/>
           </a:prstGeom>
           <a:solidFill>
-            <a:schemeClr val="bg1"/>
+            <a:schemeClr val="tx1"/>
           </a:solidFill>
           <a:ln w="190500" cap="sq">
             <a:solidFill>
-              <a:schemeClr val="bg1"/>
+              <a:srgbClr val="FFFFFF"/>
             </a:solidFill>
             <a:miter lim="800000"/>
           </a:ln>
@@ -25421,12 +26703,49 @@
           </a:p>
         </p:txBody>
       </p:sp>
+      <p:pic>
+        <p:nvPicPr>
+          <p:cNvPr id="7" name="Picture 6">
+            <a:extLst>
+              <a:ext uri="{FF2B5EF4-FFF2-40B4-BE49-F238E27FC236}">
+                <a16:creationId xmlns:a16="http://schemas.microsoft.com/office/drawing/2014/main" id="{9B3E4506-F92C-A1DA-EF8D-9BF6C925BE26}"/>
+              </a:ext>
+            </a:extLst>
+          </p:cNvPr>
+          <p:cNvPicPr>
+            <a:picLocks noChangeAspect="1"/>
+          </p:cNvPicPr>
+          <p:nvPr/>
+        </p:nvPicPr>
+        <p:blipFill>
+          <a:blip r:embed="rId3">
+            <a:extLst>
+              <a:ext uri="{28A0092B-C50C-407E-A947-70E740481C1C}">
+                <a14:useLocalDpi xmlns:a14="http://schemas.microsoft.com/office/drawing/2010/main" val="0"/>
+              </a:ext>
+            </a:extLst>
+          </a:blip>
+          <a:srcRect l="15112" r="14787" b="2"/>
+          <a:stretch>
+            <a:fillRect/>
+          </a:stretch>
+        </p:blipFill>
+        <p:spPr>
+          <a:xfrm>
+            <a:off x="905256" y="933492"/>
+            <a:ext cx="6344710" cy="4955244"/>
+          </a:xfrm>
+          <a:prstGeom prst="rect">
+            <a:avLst/>
+          </a:prstGeom>
+        </p:spPr>
+      </p:pic>
       <p:sp>
         <p:nvSpPr>
-          <p:cNvPr id="33" name="Rectangle 32">
+          <p:cNvPr id="14" name="Rectangle 13">
             <a:extLst>
               <a:ext uri="{FF2B5EF4-FFF2-40B4-BE49-F238E27FC236}">
-                <a16:creationId xmlns:a16="http://schemas.microsoft.com/office/drawing/2014/main" id="{707A3B9D-B1BA-4989-A535-1A6D8D402CC6}"/>
+                <a16:creationId xmlns:a16="http://schemas.microsoft.com/office/drawing/2014/main" id="{FCE87B8C-E5AA-4044-AB91-DDA3084BE456}"/>
               </a:ext>
               <a:ext uri="{C183D7F6-B498-43B3-948B-1728B52AA6E4}">
                 <adec:decorative xmlns:adec="http://schemas.microsoft.com/office/drawing/2017/decorative" val="1"/>
@@ -25455,7 +26774,7 @@
           <a:noFill/>
           <a:ln w="12700">
             <a:solidFill>
-              <a:srgbClr val="2A5B7F"/>
+              <a:schemeClr val="bg2"/>
             </a:solidFill>
           </a:ln>
         </p:spPr>
@@ -25484,418 +26803,15 @@
           </a:p>
         </p:txBody>
       </p:sp>
-      <p:graphicFrame>
-        <p:nvGraphicFramePr>
-          <p:cNvPr id="7" name="Content Placeholder 3">
-            <a:extLst>
-              <a:ext uri="{FF2B5EF4-FFF2-40B4-BE49-F238E27FC236}">
-                <a16:creationId xmlns:a16="http://schemas.microsoft.com/office/drawing/2014/main" id="{7267186C-386F-720C-FF7B-A0ED79F4A8BB}"/>
-              </a:ext>
-            </a:extLst>
-          </p:cNvPr>
-          <p:cNvGraphicFramePr>
-            <a:graphicFrameLocks/>
-          </p:cNvGraphicFramePr>
-          <p:nvPr>
-            <p:extLst>
-              <p:ext uri="{D42A27DB-BD31-4B8C-83A1-F6EECF244321}">
-                <p14:modId xmlns:p14="http://schemas.microsoft.com/office/powerpoint/2010/main" val="2653386867"/>
-              </p:ext>
-            </p:extLst>
-          </p:nvPr>
-        </p:nvGraphicFramePr>
-        <p:xfrm>
-          <a:off x="987552" y="894455"/>
-          <a:ext cx="6227036" cy="4930272"/>
-        </p:xfrm>
-        <a:graphic>
-          <a:graphicData uri="http://schemas.openxmlformats.org/drawingml/2006/table">
-            <a:tbl>
-              <a:tblPr firstRow="1" bandRow="1">
-                <a:tableStyleId>{69C7853C-536D-4A76-A0AE-DD22124D55A5}</a:tableStyleId>
-              </a:tblPr>
-              <a:tblGrid>
-                <a:gridCol w="2583140">
-                  <a:extLst>
-                    <a:ext uri="{9D8B030D-6E8A-4147-A177-3AD203B41FA5}">
-                      <a16:colId xmlns:a16="http://schemas.microsoft.com/office/drawing/2014/main" val="2636987022"/>
-                    </a:ext>
-                  </a:extLst>
-                </a:gridCol>
-                <a:gridCol w="3643896">
-                  <a:extLst>
-                    <a:ext uri="{9D8B030D-6E8A-4147-A177-3AD203B41FA5}">
-                      <a16:colId xmlns:a16="http://schemas.microsoft.com/office/drawing/2014/main" val="1128870266"/>
-                    </a:ext>
-                  </a:extLst>
-                </a:gridCol>
-              </a:tblGrid>
-              <a:tr h="547808">
-                <a:tc>
-                  <a:txBody>
-                    <a:bodyPr/>
-                    <a:lstStyle/>
-                    <a:p>
-                      <a:pPr algn="ctr">
-                        <a:buNone/>
-                      </a:pPr>
-                      <a:r>
-                        <a:rPr lang="en-US" sz="2400" b="1" dirty="0"/>
-                        <a:t>Component</a:t>
-                      </a:r>
-                    </a:p>
-                  </a:txBody>
-                  <a:tcPr marL="112765" marR="112765" marT="56383" marB="56383"/>
-                </a:tc>
-                <a:tc>
-                  <a:txBody>
-                    <a:bodyPr/>
-                    <a:lstStyle/>
-                    <a:p>
-                      <a:pPr algn="ctr">
-                        <a:buNone/>
-                      </a:pPr>
-                      <a:r>
-                        <a:rPr lang="en-US" sz="2400" b="1" dirty="0"/>
-                        <a:t>Technology</a:t>
-                      </a:r>
-                    </a:p>
-                  </a:txBody>
-                  <a:tcPr marL="112765" marR="112765" marT="56383" marB="56383"/>
-                </a:tc>
-                <a:extLst>
-                  <a:ext uri="{0D108BD9-81ED-4DB2-BD59-A6C34878D82A}">
-                    <a16:rowId xmlns:a16="http://schemas.microsoft.com/office/drawing/2014/main" val="2295446832"/>
-                  </a:ext>
-                </a:extLst>
-              </a:tr>
-              <a:tr h="547808">
-                <a:tc>
-                  <a:txBody>
-                    <a:bodyPr/>
-                    <a:lstStyle/>
-                    <a:p>
-                      <a:pPr>
-                        <a:buNone/>
-                      </a:pPr>
-                      <a:r>
-                        <a:rPr lang="en-US" sz="2400" b="0" dirty="0"/>
-                        <a:t>Web Scraping</a:t>
-                      </a:r>
-                    </a:p>
-                  </a:txBody>
-                  <a:tcPr marL="112765" marR="112765" marT="56383" marB="56383"/>
-                </a:tc>
-                <a:tc>
-                  <a:txBody>
-                    <a:bodyPr/>
-                    <a:lstStyle/>
-                    <a:p>
-                      <a:pPr>
-                        <a:buNone/>
-                      </a:pPr>
-                      <a:r>
-                        <a:rPr lang="en-US" sz="2400" b="0" dirty="0" err="1"/>
-                        <a:t>ScraperAPI</a:t>
-                      </a:r>
-                      <a:endParaRPr lang="en-US" sz="2400" b="0" dirty="0"/>
-                    </a:p>
-                  </a:txBody>
-                  <a:tcPr marL="112765" marR="112765" marT="56383" marB="56383"/>
-                </a:tc>
-                <a:extLst>
-                  <a:ext uri="{0D108BD9-81ED-4DB2-BD59-A6C34878D82A}">
-                    <a16:rowId xmlns:a16="http://schemas.microsoft.com/office/drawing/2014/main" val="3027895069"/>
-                  </a:ext>
-                </a:extLst>
-              </a:tr>
-              <a:tr h="547808">
-                <a:tc>
-                  <a:txBody>
-                    <a:bodyPr/>
-                    <a:lstStyle/>
-                    <a:p>
-                      <a:pPr>
-                        <a:buNone/>
-                      </a:pPr>
-                      <a:r>
-                        <a:rPr lang="en-US" sz="2400" b="0"/>
-                        <a:t>Chunking</a:t>
-                      </a:r>
-                    </a:p>
-                  </a:txBody>
-                  <a:tcPr marL="112765" marR="112765" marT="56383" marB="56383"/>
-                </a:tc>
-                <a:tc>
-                  <a:txBody>
-                    <a:bodyPr/>
-                    <a:lstStyle/>
-                    <a:p>
-                      <a:pPr>
-                        <a:buNone/>
-                      </a:pPr>
-                      <a:r>
-                        <a:rPr lang="en-US" sz="2400" b="0"/>
-                        <a:t>LangChain Text Splitters</a:t>
-                      </a:r>
-                    </a:p>
-                  </a:txBody>
-                  <a:tcPr marL="112765" marR="112765" marT="56383" marB="56383"/>
-                </a:tc>
-                <a:extLst>
-                  <a:ext uri="{0D108BD9-81ED-4DB2-BD59-A6C34878D82A}">
-                    <a16:rowId xmlns:a16="http://schemas.microsoft.com/office/drawing/2014/main" val="3441628003"/>
-                  </a:ext>
-                </a:extLst>
-              </a:tr>
-              <a:tr h="547808">
-                <a:tc>
-                  <a:txBody>
-                    <a:bodyPr/>
-                    <a:lstStyle/>
-                    <a:p>
-                      <a:pPr>
-                        <a:buNone/>
-                      </a:pPr>
-                      <a:r>
-                        <a:rPr lang="en-US" sz="2400" b="0"/>
-                        <a:t>Embeddings</a:t>
-                      </a:r>
-                    </a:p>
-                  </a:txBody>
-                  <a:tcPr marL="112765" marR="112765" marT="56383" marB="56383"/>
-                </a:tc>
-                <a:tc>
-                  <a:txBody>
-                    <a:bodyPr/>
-                    <a:lstStyle/>
-                    <a:p>
-                      <a:pPr>
-                        <a:buNone/>
-                      </a:pPr>
-                      <a:r>
-                        <a:rPr lang="en-US" sz="2400" b="0" dirty="0"/>
-                        <a:t>Sentence Transformers</a:t>
-                      </a:r>
-                    </a:p>
-                  </a:txBody>
-                  <a:tcPr marL="112765" marR="112765" marT="56383" marB="56383"/>
-                </a:tc>
-                <a:extLst>
-                  <a:ext uri="{0D108BD9-81ED-4DB2-BD59-A6C34878D82A}">
-                    <a16:rowId xmlns:a16="http://schemas.microsoft.com/office/drawing/2014/main" val="2955006519"/>
-                  </a:ext>
-                </a:extLst>
-              </a:tr>
-              <a:tr h="547808">
-                <a:tc>
-                  <a:txBody>
-                    <a:bodyPr/>
-                    <a:lstStyle/>
-                    <a:p>
-                      <a:pPr>
-                        <a:buNone/>
-                      </a:pPr>
-                      <a:r>
-                        <a:rPr lang="en-US" sz="2400" b="0"/>
-                        <a:t>Vector Database</a:t>
-                      </a:r>
-                    </a:p>
-                  </a:txBody>
-                  <a:tcPr marL="112765" marR="112765" marT="56383" marB="56383"/>
-                </a:tc>
-                <a:tc>
-                  <a:txBody>
-                    <a:bodyPr/>
-                    <a:lstStyle/>
-                    <a:p>
-                      <a:pPr>
-                        <a:buNone/>
-                      </a:pPr>
-                      <a:r>
-                        <a:rPr lang="en-US" sz="2400" b="0" dirty="0" err="1"/>
-                        <a:t>ChromaDB</a:t>
-                      </a:r>
-                      <a:endParaRPr lang="en-US" sz="2400" b="0" dirty="0"/>
-                    </a:p>
-                  </a:txBody>
-                  <a:tcPr marL="112765" marR="112765" marT="56383" marB="56383"/>
-                </a:tc>
-                <a:extLst>
-                  <a:ext uri="{0D108BD9-81ED-4DB2-BD59-A6C34878D82A}">
-                    <a16:rowId xmlns:a16="http://schemas.microsoft.com/office/drawing/2014/main" val="1994325429"/>
-                  </a:ext>
-                </a:extLst>
-              </a:tr>
-              <a:tr h="547808">
-                <a:tc>
-                  <a:txBody>
-                    <a:bodyPr/>
-                    <a:lstStyle/>
-                    <a:p>
-                      <a:pPr>
-                        <a:buNone/>
-                      </a:pPr>
-                      <a:r>
-                        <a:rPr lang="en-US" sz="2400" b="0"/>
-                        <a:t>Backend</a:t>
-                      </a:r>
-                    </a:p>
-                  </a:txBody>
-                  <a:tcPr marL="112765" marR="112765" marT="56383" marB="56383"/>
-                </a:tc>
-                <a:tc>
-                  <a:txBody>
-                    <a:bodyPr/>
-                    <a:lstStyle/>
-                    <a:p>
-                      <a:pPr>
-                        <a:buNone/>
-                      </a:pPr>
-                      <a:r>
-                        <a:rPr lang="en-US" sz="2400" b="0"/>
-                        <a:t>Flask</a:t>
-                      </a:r>
-                    </a:p>
-                  </a:txBody>
-                  <a:tcPr marL="112765" marR="112765" marT="56383" marB="56383"/>
-                </a:tc>
-                <a:extLst>
-                  <a:ext uri="{0D108BD9-81ED-4DB2-BD59-A6C34878D82A}">
-                    <a16:rowId xmlns:a16="http://schemas.microsoft.com/office/drawing/2014/main" val="2685071668"/>
-                  </a:ext>
-                </a:extLst>
-              </a:tr>
-              <a:tr h="547808">
-                <a:tc>
-                  <a:txBody>
-                    <a:bodyPr/>
-                    <a:lstStyle/>
-                    <a:p>
-                      <a:pPr>
-                        <a:buNone/>
-                      </a:pPr>
-                      <a:r>
-                        <a:rPr lang="en-US" sz="2400" b="0"/>
-                        <a:t>Frontend</a:t>
-                      </a:r>
-                    </a:p>
-                  </a:txBody>
-                  <a:tcPr marL="112765" marR="112765" marT="56383" marB="56383"/>
-                </a:tc>
-                <a:tc>
-                  <a:txBody>
-                    <a:bodyPr/>
-                    <a:lstStyle/>
-                    <a:p>
-                      <a:pPr>
-                        <a:buNone/>
-                      </a:pPr>
-                      <a:r>
-                        <a:rPr lang="en-US" sz="2400" b="0"/>
-                        <a:t>Next.js + Material UI</a:t>
-                      </a:r>
-                    </a:p>
-                  </a:txBody>
-                  <a:tcPr marL="112765" marR="112765" marT="56383" marB="56383"/>
-                </a:tc>
-                <a:extLst>
-                  <a:ext uri="{0D108BD9-81ED-4DB2-BD59-A6C34878D82A}">
-                    <a16:rowId xmlns:a16="http://schemas.microsoft.com/office/drawing/2014/main" val="1379850787"/>
-                  </a:ext>
-                </a:extLst>
-              </a:tr>
-              <a:tr h="547808">
-                <a:tc>
-                  <a:txBody>
-                    <a:bodyPr/>
-                    <a:lstStyle/>
-                    <a:p>
-                      <a:pPr>
-                        <a:buNone/>
-                      </a:pPr>
-                      <a:r>
-                        <a:rPr lang="en-US" sz="2400" b="0"/>
-                        <a:t>LLM</a:t>
-                      </a:r>
-                    </a:p>
-                  </a:txBody>
-                  <a:tcPr marL="112765" marR="112765" marT="56383" marB="56383"/>
-                </a:tc>
-                <a:tc>
-                  <a:txBody>
-                    <a:bodyPr/>
-                    <a:lstStyle/>
-                    <a:p>
-                      <a:pPr>
-                        <a:buNone/>
-                      </a:pPr>
-                      <a:r>
-                        <a:rPr lang="en-US" sz="2400" b="0"/>
-                        <a:t>OpenAI API</a:t>
-                      </a:r>
-                    </a:p>
-                  </a:txBody>
-                  <a:tcPr marL="112765" marR="112765" marT="56383" marB="56383"/>
-                </a:tc>
-                <a:extLst>
-                  <a:ext uri="{0D108BD9-81ED-4DB2-BD59-A6C34878D82A}">
-                    <a16:rowId xmlns:a16="http://schemas.microsoft.com/office/drawing/2014/main" val="2625276791"/>
-                  </a:ext>
-                </a:extLst>
-              </a:tr>
-              <a:tr h="547808">
-                <a:tc>
-                  <a:txBody>
-                    <a:bodyPr/>
-                    <a:lstStyle/>
-                    <a:p>
-                      <a:pPr>
-                        <a:buNone/>
-                      </a:pPr>
-                      <a:r>
-                        <a:rPr lang="en-US" sz="2400" b="0"/>
-                        <a:t>Version Control</a:t>
-                      </a:r>
-                    </a:p>
-                  </a:txBody>
-                  <a:tcPr marL="112765" marR="112765" marT="56383" marB="56383"/>
-                </a:tc>
-                <a:tc>
-                  <a:txBody>
-                    <a:bodyPr/>
-                    <a:lstStyle/>
-                    <a:p>
-                      <a:pPr>
-                        <a:buNone/>
-                      </a:pPr>
-                      <a:r>
-                        <a:rPr lang="en-US" sz="2400" b="0" dirty="0"/>
-                        <a:t>GitHub</a:t>
-                      </a:r>
-                    </a:p>
-                  </a:txBody>
-                  <a:tcPr marL="112765" marR="112765" marT="56383" marB="56383"/>
-                </a:tc>
-                <a:extLst>
-                  <a:ext uri="{0D108BD9-81ED-4DB2-BD59-A6C34878D82A}">
-                    <a16:rowId xmlns:a16="http://schemas.microsoft.com/office/drawing/2014/main" val="3225996566"/>
-                  </a:ext>
-                </a:extLst>
-              </a:tr>
-            </a:tbl>
-          </a:graphicData>
-        </a:graphic>
-      </p:graphicFrame>
     </p:spTree>
     <p:extLst>
       <p:ext uri="{BB962C8B-B14F-4D97-AF65-F5344CB8AC3E}">
-        <p14:creationId xmlns:p14="http://schemas.microsoft.com/office/powerpoint/2010/main" val="397872167"/>
+        <p14:creationId xmlns:p14="http://schemas.microsoft.com/office/powerpoint/2010/main" val="4117573305"/>
       </p:ext>
     </p:extLst>
   </p:cSld>
   <p:clrMapOvr>
-    <a:overrideClrMapping bg1="lt1" tx1="dk1" bg2="lt2" tx2="dk2" accent1="accent1" accent2="accent2" accent3="accent3" accent4="accent4" accent5="accent5" accent6="accent6" hlink="hlink" folHlink="folHlink"/>
+    <a:masterClrMapping/>
   </p:clrMapOvr>
 </p:sld>
 </file>

--- a/documentation/Presentation-IMDB_RAG-Model.pptx
+++ b/documentation/Presentation-IMDB_RAG-Model.pptx
@@ -147,7 +147,7 @@
   <pc:docChgLst>
     <pc:chgData name="Swati Mishra" userId="4ecbbe41-a93b-48f9-aa26-d01cbfd2c273" providerId="ADAL" clId="{66DB6158-1A18-4199-BA6D-06674FF3C921}"/>
     <pc:docChg chg="undo custSel addSld delSld modSld sldOrd addMainMaster delMainMaster modMainMaster">
-      <pc:chgData name="Swati Mishra" userId="4ecbbe41-a93b-48f9-aa26-d01cbfd2c273" providerId="ADAL" clId="{66DB6158-1A18-4199-BA6D-06674FF3C921}" dt="2026-07-26T15:29:12.226" v="2474" actId="20577"/>
+      <pc:chgData name="Swati Mishra" userId="4ecbbe41-a93b-48f9-aa26-d01cbfd2c273" providerId="ADAL" clId="{66DB6158-1A18-4199-BA6D-06674FF3C921}" dt="2026-07-26T15:45:08.933" v="2481" actId="20577"/>
       <pc:docMkLst>
         <pc:docMk/>
       </pc:docMkLst>
@@ -1850,7 +1850,7 @@
         </pc:cxnChg>
       </pc:sldChg>
       <pc:sldChg chg="addSp delSp modSp new mod setBg">
-        <pc:chgData name="Swati Mishra" userId="4ecbbe41-a93b-48f9-aa26-d01cbfd2c273" providerId="ADAL" clId="{66DB6158-1A18-4199-BA6D-06674FF3C921}" dt="2026-07-25T22:24:07.100" v="2133" actId="207"/>
+        <pc:chgData name="Swati Mishra" userId="4ecbbe41-a93b-48f9-aa26-d01cbfd2c273" providerId="ADAL" clId="{66DB6158-1A18-4199-BA6D-06674FF3C921}" dt="2026-07-26T15:45:08.933" v="2481" actId="20577"/>
         <pc:sldMkLst>
           <pc:docMk/>
           <pc:sldMk cId="1438600951" sldId="276"/>
@@ -1879,6 +1879,14 @@
             <ac:spMk id="9" creationId="{EFA2AC96-1E47-421C-A03F-F98E354EB4E6}"/>
           </ac:spMkLst>
         </pc:spChg>
+        <pc:spChg chg="add">
+          <ac:chgData name="Swati Mishra" userId="4ecbbe41-a93b-48f9-aa26-d01cbfd2c273" providerId="ADAL" clId="{66DB6158-1A18-4199-BA6D-06674FF3C921}" dt="2026-07-26T15:45:02.591" v="2480" actId="26606"/>
+          <ac:spMkLst>
+            <pc:docMk/>
+            <pc:sldMk cId="1438600951" sldId="276"/>
+            <ac:spMk id="16" creationId="{EFA2AC96-1E47-421C-A03F-F98E354EB4E6}"/>
+          </ac:spMkLst>
+        </pc:spChg>
         <pc:graphicFrameChg chg="add del">
           <ac:chgData name="Swati Mishra" userId="4ecbbe41-a93b-48f9-aa26-d01cbfd2c273" providerId="ADAL" clId="{66DB6158-1A18-4199-BA6D-06674FF3C921}" dt="2026-07-25T21:55:10.302" v="1786" actId="26606"/>
           <ac:graphicFrameMkLst>
@@ -1888,7 +1896,7 @@
           </ac:graphicFrameMkLst>
         </pc:graphicFrameChg>
         <pc:graphicFrameChg chg="add mod modGraphic">
-          <ac:chgData name="Swati Mishra" userId="4ecbbe41-a93b-48f9-aa26-d01cbfd2c273" providerId="ADAL" clId="{66DB6158-1A18-4199-BA6D-06674FF3C921}" dt="2026-07-25T22:24:07.100" v="2133" actId="207"/>
+          <ac:chgData name="Swati Mishra" userId="4ecbbe41-a93b-48f9-aa26-d01cbfd2c273" providerId="ADAL" clId="{66DB6158-1A18-4199-BA6D-06674FF3C921}" dt="2026-07-26T15:45:08.933" v="2481" actId="20577"/>
           <ac:graphicFrameMkLst>
             <pc:docMk/>
             <pc:sldMk cId="1438600951" sldId="276"/>
@@ -3734,11 +3742,11 @@
 </file>
 
 <file path=ppt/diagrams/colors2.xml><?xml version="1.0" encoding="utf-8"?>
-<dgm:colorsDef xmlns:dgm="http://schemas.openxmlformats.org/drawingml/2006/diagram" xmlns:a="http://schemas.openxmlformats.org/drawingml/2006/main" uniqueId="urn:microsoft.com/office/officeart/2005/8/colors/colorful2">
+<dgm:colorsDef xmlns:dgm="http://schemas.openxmlformats.org/drawingml/2006/diagram" xmlns:a="http://schemas.openxmlformats.org/drawingml/2006/main" uniqueId="urn:microsoft.com/office/officeart/2018/5/colors/Iconchunking_neutralicon_colorful1">
   <dgm:title val=""/>
   <dgm:desc val=""/>
   <dgm:catLst>
-    <dgm:cat type="colorful" pri="10200"/>
+    <dgm:cat type="colorful" pri="10100"/>
   </dgm:catLst>
   <dgm:styleLbl name="node0">
     <dgm:fillClrLst meth="repeat">
@@ -3753,9 +3761,48 @@
     <dgm:txEffectClrLst/>
   </dgm:styleLbl>
   <dgm:styleLbl name="node1">
-    <dgm:fillClrLst>
+    <dgm:fillClrLst meth="repeat">
+      <a:schemeClr val="bg1"/>
+    </dgm:fillClrLst>
+    <dgm:linClrLst meth="repeat">
+      <a:schemeClr val="lt1">
+        <a:alpha val="0"/>
+      </a:schemeClr>
+    </dgm:linClrLst>
+    <dgm:effectClrLst/>
+    <dgm:txLinClrLst/>
+    <dgm:txFillClrLst meth="repeat">
+      <a:schemeClr val="dk1"/>
+    </dgm:txFillClrLst>
+    <dgm:txEffectClrLst/>
+  </dgm:styleLbl>
+  <dgm:styleLbl name="alignNode1">
+    <dgm:fillClrLst meth="repeat">
       <a:schemeClr val="accent2"/>
       <a:schemeClr val="accent3"/>
+      <a:schemeClr val="accent4"/>
+      <a:schemeClr val="accent5"/>
+      <a:schemeClr val="accent6"/>
+    </dgm:fillClrLst>
+    <dgm:linClrLst meth="repeat">
+      <a:schemeClr val="accent2"/>
+      <a:schemeClr val="accent3"/>
+      <a:schemeClr val="accent4"/>
+      <a:schemeClr val="accent5"/>
+      <a:schemeClr val="accent6"/>
+    </dgm:linClrLst>
+    <dgm:effectClrLst/>
+    <dgm:txLinClrLst/>
+    <dgm:txFillClrLst/>
+    <dgm:txEffectClrLst/>
+  </dgm:styleLbl>
+  <dgm:styleLbl name="lnNode1">
+    <dgm:fillClrLst meth="repeat">
+      <a:schemeClr val="accent2"/>
+      <a:schemeClr val="accent3"/>
+      <a:schemeClr val="accent4"/>
+      <a:schemeClr val="accent5"/>
+      <a:schemeClr val="accent6"/>
     </dgm:fillClrLst>
     <dgm:linClrLst meth="repeat">
       <a:schemeClr val="lt1"/>
@@ -3765,39 +3812,21 @@
     <dgm:txFillClrLst/>
     <dgm:txEffectClrLst/>
   </dgm:styleLbl>
-  <dgm:styleLbl name="alignNode1">
-    <dgm:fillClrLst>
-      <a:schemeClr val="accent2"/>
-      <a:schemeClr val="accent3"/>
-    </dgm:fillClrLst>
-    <dgm:linClrLst>
-      <a:schemeClr val="accent2"/>
-      <a:schemeClr val="accent3"/>
-    </dgm:linClrLst>
-    <dgm:effectClrLst/>
-    <dgm:txLinClrLst/>
-    <dgm:txFillClrLst/>
-    <dgm:txEffectClrLst/>
-  </dgm:styleLbl>
-  <dgm:styleLbl name="lnNode1">
-    <dgm:fillClrLst>
-      <a:schemeClr val="accent2"/>
-      <a:schemeClr val="accent3"/>
-    </dgm:fillClrLst>
-    <dgm:linClrLst meth="repeat">
-      <a:schemeClr val="lt1"/>
-    </dgm:linClrLst>
-    <dgm:effectClrLst/>
-    <dgm:txLinClrLst/>
-    <dgm:txFillClrLst/>
-    <dgm:txEffectClrLst/>
-  </dgm:styleLbl>
   <dgm:styleLbl name="vennNode1">
-    <dgm:fillClrLst>
+    <dgm:fillClrLst meth="repeat">
       <a:schemeClr val="accent2">
         <a:alpha val="50000"/>
       </a:schemeClr>
       <a:schemeClr val="accent3">
+        <a:alpha val="50000"/>
+      </a:schemeClr>
+      <a:schemeClr val="accent4">
+        <a:alpha val="50000"/>
+      </a:schemeClr>
+      <a:schemeClr val="accent5">
+        <a:alpha val="50000"/>
+      </a:schemeClr>
+      <a:schemeClr val="accent6">
         <a:alpha val="50000"/>
       </a:schemeClr>
     </dgm:fillClrLst>
@@ -3811,6 +3840,18 @@
   </dgm:styleLbl>
   <dgm:styleLbl name="node2">
     <dgm:fillClrLst>
+      <a:schemeClr val="accent2"/>
+    </dgm:fillClrLst>
+    <dgm:linClrLst meth="repeat">
+      <a:schemeClr val="lt1"/>
+    </dgm:linClrLst>
+    <dgm:effectClrLst/>
+    <dgm:txLinClrLst/>
+    <dgm:txFillClrLst/>
+    <dgm:txEffectClrLst/>
+  </dgm:styleLbl>
+  <dgm:styleLbl name="node3">
+    <dgm:fillClrLst>
       <a:schemeClr val="accent3"/>
     </dgm:fillClrLst>
     <dgm:linClrLst meth="repeat">
@@ -3821,7 +3862,7 @@
     <dgm:txFillClrLst/>
     <dgm:txEffectClrLst/>
   </dgm:styleLbl>
-  <dgm:styleLbl name="node3">
+  <dgm:styleLbl name="node4">
     <dgm:fillClrLst>
       <a:schemeClr val="accent4"/>
     </dgm:fillClrLst>
@@ -3833,24 +3874,21 @@
     <dgm:txFillClrLst/>
     <dgm:txEffectClrLst/>
   </dgm:styleLbl>
-  <dgm:styleLbl name="node4">
-    <dgm:fillClrLst>
-      <a:schemeClr val="accent5"/>
-    </dgm:fillClrLst>
-    <dgm:linClrLst meth="repeat">
-      <a:schemeClr val="lt1"/>
-    </dgm:linClrLst>
-    <dgm:effectClrLst/>
-    <dgm:txLinClrLst/>
-    <dgm:txFillClrLst/>
-    <dgm:txEffectClrLst/>
-  </dgm:styleLbl>
   <dgm:styleLbl name="fgImgPlace1">
-    <dgm:fillClrLst>
+    <dgm:fillClrLst meth="repeat">
       <a:schemeClr val="accent2">
         <a:tint val="50000"/>
       </a:schemeClr>
       <a:schemeClr val="accent3">
+        <a:tint val="50000"/>
+      </a:schemeClr>
+      <a:schemeClr val="accent4">
+        <a:tint val="50000"/>
+      </a:schemeClr>
+      <a:schemeClr val="accent5">
+        <a:tint val="50000"/>
+      </a:schemeClr>
+      <a:schemeClr val="accent6">
         <a:tint val="50000"/>
       </a:schemeClr>
     </dgm:fillClrLst>
@@ -3866,10 +3904,10 @@
   </dgm:styleLbl>
   <dgm:styleLbl name="alignImgPlace1">
     <dgm:fillClrLst>
-      <a:schemeClr val="accent2">
+      <a:schemeClr val="accent1">
         <a:tint val="50000"/>
       </a:schemeClr>
-      <a:schemeClr val="accent3">
+      <a:schemeClr val="accent2">
         <a:tint val="20000"/>
       </a:schemeClr>
     </dgm:fillClrLst>
@@ -3885,10 +3923,10 @@
   </dgm:styleLbl>
   <dgm:styleLbl name="bgImgPlace1">
     <dgm:fillClrLst>
-      <a:schemeClr val="accent2">
+      <a:schemeClr val="accent1">
         <a:tint val="50000"/>
       </a:schemeClr>
-      <a:schemeClr val="accent3">
+      <a:schemeClr val="accent2">
         <a:tint val="20000"/>
       </a:schemeClr>
     </dgm:fillClrLst>
@@ -3903,11 +3941,14 @@
     <dgm:txEffectClrLst/>
   </dgm:styleLbl>
   <dgm:styleLbl name="sibTrans2D1">
-    <dgm:fillClrLst>
+    <dgm:fillClrLst meth="repeat">
       <a:schemeClr val="accent2"/>
       <a:schemeClr val="accent3"/>
+      <a:schemeClr val="accent4"/>
+      <a:schemeClr val="accent5"/>
+      <a:schemeClr val="accent6"/>
     </dgm:fillClrLst>
-    <dgm:linClrLst meth="repeat">
+    <dgm:linClrLst meth="cycle">
       <a:schemeClr val="lt1"/>
     </dgm:linClrLst>
     <dgm:effectClrLst/>
@@ -3916,11 +3957,14 @@
     <dgm:txEffectClrLst/>
   </dgm:styleLbl>
   <dgm:styleLbl name="fgSibTrans2D1">
-    <dgm:fillClrLst>
+    <dgm:fillClrLst meth="repeat">
       <a:schemeClr val="accent2"/>
       <a:schemeClr val="accent3"/>
+      <a:schemeClr val="accent4"/>
+      <a:schemeClr val="accent5"/>
+      <a:schemeClr val="accent6"/>
     </dgm:fillClrLst>
-    <dgm:linClrLst meth="repeat">
+    <dgm:linClrLst meth="cycle">
       <a:schemeClr val="lt1"/>
     </dgm:linClrLst>
     <dgm:effectClrLst/>
@@ -3931,11 +3975,14 @@
     <dgm:txEffectClrLst/>
   </dgm:styleLbl>
   <dgm:styleLbl name="bgSibTrans2D1">
-    <dgm:fillClrLst>
+    <dgm:fillClrLst meth="repeat">
       <a:schemeClr val="accent2"/>
       <a:schemeClr val="accent3"/>
+      <a:schemeClr val="accent4"/>
+      <a:schemeClr val="accent5"/>
+      <a:schemeClr val="accent6"/>
     </dgm:fillClrLst>
-    <dgm:linClrLst meth="repeat">
+    <dgm:linClrLst meth="cycle">
       <a:schemeClr val="lt1"/>
     </dgm:linClrLst>
     <dgm:effectClrLst/>
@@ -3946,10 +3993,19 @@
     <dgm:txEffectClrLst/>
   </dgm:styleLbl>
   <dgm:styleLbl name="sibTrans1D1">
-    <dgm:fillClrLst/>
-    <dgm:linClrLst>
+    <dgm:fillClrLst meth="repeat">
       <a:schemeClr val="accent2"/>
       <a:schemeClr val="accent3"/>
+      <a:schemeClr val="accent4"/>
+      <a:schemeClr val="accent5"/>
+      <a:schemeClr val="accent6"/>
+    </dgm:fillClrLst>
+    <dgm:linClrLst meth="repeat">
+      <a:schemeClr val="accent2"/>
+      <a:schemeClr val="accent3"/>
+      <a:schemeClr val="accent4"/>
+      <a:schemeClr val="accent5"/>
+      <a:schemeClr val="accent6"/>
     </dgm:linClrLst>
     <dgm:effectClrLst/>
     <dgm:txLinClrLst/>
@@ -3976,12 +4032,10 @@
   </dgm:styleLbl>
   <dgm:styleLbl name="asst0">
     <dgm:fillClrLst meth="repeat">
-      <a:schemeClr val="accent2"/>
+      <a:schemeClr val="accent1"/>
     </dgm:fillClrLst>
     <dgm:linClrLst meth="repeat">
-      <a:schemeClr val="lt1">
-        <a:shade val="80000"/>
-      </a:schemeClr>
+      <a:schemeClr val="lt1"/>
     </dgm:linClrLst>
     <dgm:effectClrLst/>
     <dgm:txLinClrLst/>
@@ -3990,12 +4044,10 @@
   </dgm:styleLbl>
   <dgm:styleLbl name="asst1">
     <dgm:fillClrLst meth="repeat">
-      <a:schemeClr val="accent3"/>
+      <a:schemeClr val="accent2"/>
     </dgm:fillClrLst>
     <dgm:linClrLst meth="repeat">
-      <a:schemeClr val="lt1">
-        <a:shade val="80000"/>
-      </a:schemeClr>
+      <a:schemeClr val="lt1"/>
     </dgm:linClrLst>
     <dgm:effectClrLst/>
     <dgm:txLinClrLst/>
@@ -4003,6 +4055,18 @@
     <dgm:txEffectClrLst/>
   </dgm:styleLbl>
   <dgm:styleLbl name="asst2">
+    <dgm:fillClrLst>
+      <a:schemeClr val="accent3"/>
+    </dgm:fillClrLst>
+    <dgm:linClrLst meth="repeat">
+      <a:schemeClr val="lt1"/>
+    </dgm:linClrLst>
+    <dgm:effectClrLst/>
+    <dgm:txLinClrLst/>
+    <dgm:txFillClrLst/>
+    <dgm:txEffectClrLst/>
+  </dgm:styleLbl>
+  <dgm:styleLbl name="asst3">
     <dgm:fillClrLst>
       <a:schemeClr val="accent4"/>
     </dgm:fillClrLst>
@@ -4014,21 +4078,9 @@
     <dgm:txFillClrLst/>
     <dgm:txEffectClrLst/>
   </dgm:styleLbl>
-  <dgm:styleLbl name="asst3">
+  <dgm:styleLbl name="asst4">
     <dgm:fillClrLst>
       <a:schemeClr val="accent5"/>
-    </dgm:fillClrLst>
-    <dgm:linClrLst meth="repeat">
-      <a:schemeClr val="lt1"/>
-    </dgm:linClrLst>
-    <dgm:effectClrLst/>
-    <dgm:txLinClrLst/>
-    <dgm:txFillClrLst/>
-    <dgm:txEffectClrLst/>
-  </dgm:styleLbl>
-  <dgm:styleLbl name="asst4">
-    <dgm:fillClrLst>
-      <a:schemeClr val="accent6"/>
     </dgm:fillClrLst>
     <dgm:linClrLst meth="repeat">
       <a:schemeClr val="lt1"/>
@@ -4095,6 +4147,22 @@
       <a:schemeClr val="accent2"/>
     </dgm:fillClrLst>
     <dgm:linClrLst meth="repeat">
+      <a:schemeClr val="accent1"/>
+    </dgm:linClrLst>
+    <dgm:effectClrLst/>
+    <dgm:txLinClrLst/>
+    <dgm:txFillClrLst meth="repeat">
+      <a:schemeClr val="tx1"/>
+    </dgm:txFillClrLst>
+    <dgm:txEffectClrLst/>
+  </dgm:styleLbl>
+  <dgm:styleLbl name="parChTrans1D2">
+    <dgm:fillClrLst meth="repeat">
+      <a:schemeClr val="accent3">
+        <a:tint val="90000"/>
+      </a:schemeClr>
+    </dgm:fillClrLst>
+    <dgm:linClrLst meth="repeat">
       <a:schemeClr val="accent2"/>
     </dgm:linClrLst>
     <dgm:effectClrLst/>
@@ -4104,10 +4172,10 @@
     </dgm:txFillClrLst>
     <dgm:txEffectClrLst/>
   </dgm:styleLbl>
-  <dgm:styleLbl name="parChTrans1D2">
+  <dgm:styleLbl name="parChTrans1D3">
     <dgm:fillClrLst meth="repeat">
-      <a:schemeClr val="accent2">
-        <a:tint val="90000"/>
+      <a:schemeClr val="accent4">
+        <a:tint val="70000"/>
       </a:schemeClr>
     </dgm:fillClrLst>
     <dgm:linClrLst meth="repeat">
@@ -4120,10 +4188,10 @@
     </dgm:txFillClrLst>
     <dgm:txEffectClrLst/>
   </dgm:styleLbl>
-  <dgm:styleLbl name="parChTrans1D3">
+  <dgm:styleLbl name="parChTrans1D4">
     <dgm:fillClrLst meth="repeat">
-      <a:schemeClr val="accent2">
-        <a:tint val="70000"/>
+      <a:schemeClr val="accent5">
+        <a:tint val="50000"/>
       </a:schemeClr>
     </dgm:fillClrLst>
     <dgm:linClrLst meth="repeat">
@@ -4136,31 +4204,18 @@
     </dgm:txFillClrLst>
     <dgm:txEffectClrLst/>
   </dgm:styleLbl>
-  <dgm:styleLbl name="parChTrans1D4">
-    <dgm:fillClrLst meth="repeat">
-      <a:schemeClr val="accent2">
-        <a:tint val="50000"/>
-      </a:schemeClr>
-    </dgm:fillClrLst>
-    <dgm:linClrLst meth="repeat">
-      <a:schemeClr val="accent5"/>
-    </dgm:linClrLst>
-    <dgm:effectClrLst/>
-    <dgm:txLinClrLst/>
-    <dgm:txFillClrLst meth="repeat">
-      <a:schemeClr val="tx1"/>
-    </dgm:txFillClrLst>
-    <dgm:txEffectClrLst/>
-  </dgm:styleLbl>
   <dgm:styleLbl name="fgAcc1">
     <dgm:fillClrLst meth="repeat">
       <a:schemeClr val="lt1">
         <a:alpha val="90000"/>
       </a:schemeClr>
     </dgm:fillClrLst>
-    <dgm:linClrLst>
+    <dgm:linClrLst meth="repeat">
       <a:schemeClr val="accent2"/>
       <a:schemeClr val="accent3"/>
+      <a:schemeClr val="accent4"/>
+      <a:schemeClr val="accent5"/>
+      <a:schemeClr val="accent6"/>
     </dgm:linClrLst>
     <dgm:effectClrLst/>
     <dgm:txLinClrLst/>
@@ -4175,9 +4230,12 @@
         <a:alpha val="90000"/>
       </a:schemeClr>
     </dgm:fillClrLst>
-    <dgm:linClrLst>
+    <dgm:linClrLst meth="repeat">
       <a:schemeClr val="accent2"/>
       <a:schemeClr val="accent3"/>
+      <a:schemeClr val="accent4"/>
+      <a:schemeClr val="accent5"/>
+      <a:schemeClr val="accent6"/>
     </dgm:linClrLst>
     <dgm:effectClrLst/>
     <dgm:txLinClrLst/>
@@ -4192,9 +4250,12 @@
         <a:alpha val="90000"/>
       </a:schemeClr>
     </dgm:fillClrLst>
-    <dgm:linClrLst>
+    <dgm:linClrLst meth="repeat">
       <a:schemeClr val="accent2"/>
       <a:schemeClr val="accent3"/>
+      <a:schemeClr val="accent4"/>
+      <a:schemeClr val="accent5"/>
+      <a:schemeClr val="accent6"/>
     </dgm:linClrLst>
     <dgm:effectClrLst/>
     <dgm:txLinClrLst/>
@@ -4210,7 +4271,7 @@
       </a:schemeClr>
     </dgm:fillClrLst>
     <dgm:linClrLst meth="repeat">
-      <a:schemeClr val="accent2"/>
+      <a:schemeClr val="accent1"/>
     </dgm:linClrLst>
     <dgm:effectClrLst/>
     <dgm:txLinClrLst/>
@@ -4225,9 +4286,12 @@
         <a:alpha val="90000"/>
       </a:schemeClr>
     </dgm:fillClrLst>
-    <dgm:linClrLst>
+    <dgm:linClrLst meth="repeat">
       <a:schemeClr val="accent2"/>
       <a:schemeClr val="accent3"/>
+      <a:schemeClr val="accent4"/>
+      <a:schemeClr val="accent5"/>
+      <a:schemeClr val="accent6"/>
     </dgm:linClrLst>
     <dgm:effectClrLst/>
     <dgm:txLinClrLst/>
@@ -4240,9 +4304,12 @@
     <dgm:fillClrLst meth="repeat">
       <a:schemeClr val="lt1"/>
     </dgm:fillClrLst>
-    <dgm:linClrLst>
+    <dgm:linClrLst meth="repeat">
       <a:schemeClr val="accent2"/>
       <a:schemeClr val="accent3"/>
+      <a:schemeClr val="accent4"/>
+      <a:schemeClr val="accent5"/>
+      <a:schemeClr val="accent6"/>
     </dgm:linClrLst>
     <dgm:effectClrLst/>
     <dgm:txLinClrLst/>
@@ -4255,9 +4322,12 @@
     <dgm:fillClrLst meth="repeat">
       <a:schemeClr val="lt1"/>
     </dgm:fillClrLst>
-    <dgm:linClrLst>
+    <dgm:linClrLst meth="repeat">
       <a:schemeClr val="accent2"/>
       <a:schemeClr val="accent3"/>
+      <a:schemeClr val="accent4"/>
+      <a:schemeClr val="accent5"/>
+      <a:schemeClr val="accent6"/>
     </dgm:linClrLst>
     <dgm:effectClrLst/>
     <dgm:txLinClrLst/>
@@ -4270,9 +4340,12 @@
     <dgm:fillClrLst meth="repeat">
       <a:schemeClr val="lt1"/>
     </dgm:fillClrLst>
-    <dgm:linClrLst>
+    <dgm:linClrLst meth="repeat">
       <a:schemeClr val="accent2"/>
       <a:schemeClr val="accent3"/>
+      <a:schemeClr val="accent4"/>
+      <a:schemeClr val="accent5"/>
+      <a:schemeClr val="accent6"/>
     </dgm:linClrLst>
     <dgm:effectClrLst/>
     <dgm:txLinClrLst/>
@@ -4282,7 +4355,7 @@
     <dgm:txEffectClrLst/>
   </dgm:styleLbl>
   <dgm:styleLbl name="fgAccFollowNode1">
-    <dgm:fillClrLst>
+    <dgm:fillClrLst meth="repeat">
       <a:schemeClr val="accent2">
         <a:tint val="40000"/>
         <a:alpha val="90000"/>
@@ -4291,13 +4364,37 @@
         <a:tint val="40000"/>
         <a:alpha val="90000"/>
       </a:schemeClr>
+      <a:schemeClr val="accent4">
+        <a:tint val="40000"/>
+        <a:alpha val="90000"/>
+      </a:schemeClr>
+      <a:schemeClr val="accent5">
+        <a:tint val="40000"/>
+        <a:alpha val="90000"/>
+      </a:schemeClr>
+      <a:schemeClr val="accent6">
+        <a:tint val="40000"/>
+        <a:alpha val="90000"/>
+      </a:schemeClr>
     </dgm:fillClrLst>
-    <dgm:linClrLst>
+    <dgm:linClrLst meth="repeat">
       <a:schemeClr val="accent2">
         <a:tint val="40000"/>
         <a:alpha val="90000"/>
       </a:schemeClr>
       <a:schemeClr val="accent3">
+        <a:tint val="40000"/>
+        <a:alpha val="90000"/>
+      </a:schemeClr>
+      <a:schemeClr val="accent4">
+        <a:tint val="40000"/>
+        <a:alpha val="90000"/>
+      </a:schemeClr>
+      <a:schemeClr val="accent5">
+        <a:tint val="40000"/>
+        <a:alpha val="90000"/>
+      </a:schemeClr>
+      <a:schemeClr val="accent6">
         <a:tint val="40000"/>
         <a:alpha val="90000"/>
       </a:schemeClr>
@@ -4310,7 +4407,7 @@
     <dgm:txEffectClrLst/>
   </dgm:styleLbl>
   <dgm:styleLbl name="alignAccFollowNode1">
-    <dgm:fillClrLst>
+    <dgm:fillClrLst meth="repeat">
       <a:schemeClr val="accent2">
         <a:tint val="40000"/>
         <a:alpha val="90000"/>
@@ -4319,13 +4416,37 @@
         <a:tint val="40000"/>
         <a:alpha val="90000"/>
       </a:schemeClr>
+      <a:schemeClr val="accent4">
+        <a:tint val="40000"/>
+        <a:alpha val="90000"/>
+      </a:schemeClr>
+      <a:schemeClr val="accent5">
+        <a:tint val="40000"/>
+        <a:alpha val="90000"/>
+      </a:schemeClr>
+      <a:schemeClr val="accent6">
+        <a:tint val="40000"/>
+        <a:alpha val="90000"/>
+      </a:schemeClr>
     </dgm:fillClrLst>
-    <dgm:linClrLst>
+    <dgm:linClrLst meth="repeat">
       <a:schemeClr val="accent2">
         <a:tint val="40000"/>
         <a:alpha val="90000"/>
       </a:schemeClr>
       <a:schemeClr val="accent3">
+        <a:tint val="40000"/>
+        <a:alpha val="90000"/>
+      </a:schemeClr>
+      <a:schemeClr val="accent4">
+        <a:tint val="40000"/>
+        <a:alpha val="90000"/>
+      </a:schemeClr>
+      <a:schemeClr val="accent5">
+        <a:tint val="40000"/>
+        <a:alpha val="90000"/>
+      </a:schemeClr>
+      <a:schemeClr val="accent6">
         <a:tint val="40000"/>
         <a:alpha val="90000"/>
       </a:schemeClr>
@@ -4338,7 +4459,7 @@
     <dgm:txEffectClrLst/>
   </dgm:styleLbl>
   <dgm:styleLbl name="bgAccFollowNode1">
-    <dgm:fillClrLst>
+    <dgm:fillClrLst meth="repeat">
       <a:schemeClr val="accent2">
         <a:tint val="40000"/>
         <a:alpha val="90000"/>
@@ -4347,13 +4468,37 @@
         <a:tint val="40000"/>
         <a:alpha val="90000"/>
       </a:schemeClr>
+      <a:schemeClr val="accent4">
+        <a:tint val="40000"/>
+        <a:alpha val="90000"/>
+      </a:schemeClr>
+      <a:schemeClr val="accent5">
+        <a:tint val="40000"/>
+        <a:alpha val="90000"/>
+      </a:schemeClr>
+      <a:schemeClr val="accent6">
+        <a:tint val="40000"/>
+        <a:alpha val="90000"/>
+      </a:schemeClr>
     </dgm:fillClrLst>
-    <dgm:linClrLst>
+    <dgm:linClrLst meth="repeat">
       <a:schemeClr val="accent2">
         <a:tint val="40000"/>
         <a:alpha val="90000"/>
       </a:schemeClr>
       <a:schemeClr val="accent3">
+        <a:tint val="40000"/>
+        <a:alpha val="90000"/>
+      </a:schemeClr>
+      <a:schemeClr val="accent4">
+        <a:tint val="40000"/>
+        <a:alpha val="90000"/>
+      </a:schemeClr>
+      <a:schemeClr val="accent5">
+        <a:tint val="40000"/>
+        <a:alpha val="90000"/>
+      </a:schemeClr>
+      <a:schemeClr val="accent6">
         <a:tint val="40000"/>
         <a:alpha val="90000"/>
       </a:schemeClr>
@@ -4388,6 +4533,22 @@
       </a:schemeClr>
     </dgm:fillClrLst>
     <dgm:linClrLst>
+      <a:schemeClr val="accent2"/>
+    </dgm:linClrLst>
+    <dgm:effectClrLst/>
+    <dgm:txLinClrLst/>
+    <dgm:txFillClrLst meth="repeat">
+      <a:schemeClr val="dk1"/>
+    </dgm:txFillClrLst>
+    <dgm:txEffectClrLst/>
+  </dgm:styleLbl>
+  <dgm:styleLbl name="fgAcc3">
+    <dgm:fillClrLst meth="repeat">
+      <a:schemeClr val="lt1">
+        <a:alpha val="90000"/>
+      </a:schemeClr>
+    </dgm:fillClrLst>
+    <dgm:linClrLst>
       <a:schemeClr val="accent3"/>
     </dgm:linClrLst>
     <dgm:effectClrLst/>
@@ -4397,7 +4558,7 @@
     </dgm:txFillClrLst>
     <dgm:txEffectClrLst/>
   </dgm:styleLbl>
-  <dgm:styleLbl name="fgAcc3">
+  <dgm:styleLbl name="fgAcc4">
     <dgm:fillClrLst meth="repeat">
       <a:schemeClr val="lt1">
         <a:alpha val="90000"/>
@@ -4413,36 +4574,22 @@
     </dgm:txFillClrLst>
     <dgm:txEffectClrLst/>
   </dgm:styleLbl>
-  <dgm:styleLbl name="fgAcc4">
+  <dgm:styleLbl name="bgShp">
     <dgm:fillClrLst meth="repeat">
+      <a:schemeClr val="accent2"/>
+      <a:schemeClr val="accent3"/>
+      <a:schemeClr val="accent4"/>
+      <a:schemeClr val="accent5"/>
+      <a:schemeClr val="accent6"/>
+    </dgm:fillClrLst>
+    <dgm:linClrLst meth="repeat">
       <a:schemeClr val="lt1">
-        <a:alpha val="90000"/>
+        <a:alpha val="0"/>
       </a:schemeClr>
-    </dgm:fillClrLst>
-    <dgm:linClrLst>
-      <a:schemeClr val="accent5"/>
     </dgm:linClrLst>
     <dgm:effectClrLst/>
     <dgm:txLinClrLst/>
-    <dgm:txFillClrLst meth="repeat">
-      <a:schemeClr val="dk1"/>
-    </dgm:txFillClrLst>
-    <dgm:txEffectClrLst/>
-  </dgm:styleLbl>
-  <dgm:styleLbl name="bgShp">
-    <dgm:fillClrLst meth="repeat">
-      <a:schemeClr val="accent2">
-        <a:tint val="40000"/>
-      </a:schemeClr>
-    </dgm:fillClrLst>
-    <dgm:linClrLst meth="repeat">
-      <a:schemeClr val="dk1"/>
-    </dgm:linClrLst>
-    <dgm:effectClrLst/>
-    <dgm:txLinClrLst/>
-    <dgm:txFillClrLst meth="repeat">
-      <a:schemeClr val="dk1"/>
-    </dgm:txFillClrLst>
+    <dgm:txFillClrLst/>
     <dgm:txEffectClrLst/>
   </dgm:styleLbl>
   <dgm:styleLbl name="dkBgShp">
@@ -4463,7 +4610,7 @@
   </dgm:styleLbl>
   <dgm:styleLbl name="trBgShp">
     <dgm:fillClrLst meth="repeat">
-      <a:schemeClr val="accent2">
+      <a:schemeClr val="accent1">
         <a:tint val="50000"/>
         <a:alpha val="40000"/>
       </a:schemeClr>
@@ -6007,7 +6154,7 @@
 <dgm:dataModel xmlns:dgm="http://schemas.openxmlformats.org/drawingml/2006/diagram" xmlns:a="http://schemas.openxmlformats.org/drawingml/2006/main">
   <dgm:ptLst>
     <dgm:pt modelId="{C5C06BB2-0B4D-4772-925E-928CCB806C0D}" type="doc">
-      <dgm:prSet loTypeId="urn:microsoft.com/office/officeart/2005/8/layout/hierarchy1" loCatId="hierarchy" qsTypeId="urn:microsoft.com/office/officeart/2005/8/quickstyle/simple4" qsCatId="simple" csTypeId="urn:microsoft.com/office/officeart/2005/8/colors/colorful2" csCatId="colorful" phldr="1"/>
+      <dgm:prSet loTypeId="urn:microsoft.com/office/officeart/2018/5/layout/IconLeafLabelList" loCatId="icon" qsTypeId="urn:microsoft.com/office/officeart/2005/8/quickstyle/simple1" qsCatId="simple" csTypeId="urn:microsoft.com/office/officeart/2018/5/colors/Iconchunking_neutralicon_colorful1" csCatId="colorful" phldr="1"/>
       <dgm:spPr/>
       <dgm:t>
         <a:bodyPr/>
@@ -6018,15 +6165,21 @@
       </dgm:t>
     </dgm:pt>
     <dgm:pt modelId="{5CBD6EEC-0FA5-4E86-A089-47E686326810}">
-      <dgm:prSet custT="1"/>
+      <dgm:prSet/>
       <dgm:spPr/>
       <dgm:t>
         <a:bodyPr/>
         <a:lstStyle/>
         <a:p>
+          <a:pPr>
+            <a:lnSpc>
+              <a:spcPct val="100000"/>
+            </a:lnSpc>
+            <a:defRPr cap="all"/>
+          </a:pPr>
           <a:r>
-            <a:rPr lang="en-US" sz="3200" dirty="0"/>
-            <a:t>Embedding Quality</a:t>
+            <a:rPr lang="en-US"/>
+            <a:t>API Limitations</a:t>
           </a:r>
         </a:p>
       </dgm:t>
@@ -6053,54 +6206,23 @@
         </a:p>
       </dgm:t>
     </dgm:pt>
-    <dgm:pt modelId="{2A6330B4-4684-4594-9229-7F258D465293}">
-      <dgm:prSet custT="1"/>
-      <dgm:spPr/>
-      <dgm:t>
-        <a:bodyPr/>
-        <a:lstStyle/>
-        <a:p>
-          <a:r>
-            <a:rPr lang="en-US" sz="3200" dirty="0"/>
-            <a:t>API Limitations</a:t>
-          </a:r>
-        </a:p>
-      </dgm:t>
-    </dgm:pt>
-    <dgm:pt modelId="{300AE169-C85E-4A38-9BB2-9AACC09920BF}" type="parTrans" cxnId="{5FDE75CA-6ED8-4511-BC31-F795E6A16E2B}">
+    <dgm:pt modelId="{94A377AA-8C38-4FDA-B6AB-1D0B9EA35736}">
       <dgm:prSet/>
       <dgm:spPr/>
       <dgm:t>
         <a:bodyPr/>
         <a:lstStyle/>
         <a:p>
-          <a:endParaRPr lang="en-US"/>
-        </a:p>
-      </dgm:t>
-    </dgm:pt>
-    <dgm:pt modelId="{2DAAFDD5-7ACE-466D-8D0C-2E705C9032BB}" type="sibTrans" cxnId="{5FDE75CA-6ED8-4511-BC31-F795E6A16E2B}">
-      <dgm:prSet/>
-      <dgm:spPr/>
-      <dgm:t>
-        <a:bodyPr/>
-        <a:lstStyle/>
-        <a:p>
-          <a:endParaRPr lang="en-US"/>
-        </a:p>
-      </dgm:t>
-    </dgm:pt>
-    <dgm:pt modelId="{94A377AA-8C38-4FDA-B6AB-1D0B9EA35736}">
-      <dgm:prSet custT="1"/>
-      <dgm:spPr/>
-      <dgm:t>
-        <a:bodyPr/>
-        <a:lstStyle/>
-        <a:p>
+          <a:pPr>
+            <a:lnSpc>
+              <a:spcPct val="100000"/>
+            </a:lnSpc>
+            <a:defRPr cap="all"/>
+          </a:pPr>
           <a:r>
-            <a:rPr lang="en-US" sz="3200"/>
-            <a:t>Source data is not full fetched.</a:t>
+            <a:rPr lang="en-US"/>
+            <a:t>Source data is not fully fetched.</a:t>
           </a:r>
-          <a:endParaRPr lang="en-US" sz="3200" dirty="0"/>
         </a:p>
       </dgm:t>
     </dgm:pt>
@@ -6126,135 +6248,149 @@
         </a:p>
       </dgm:t>
     </dgm:pt>
-    <dgm:pt modelId="{AC0F051C-2738-4B82-97B5-CEC36307B4EC}" type="pres">
-      <dgm:prSet presAssocID="{C5C06BB2-0B4D-4772-925E-928CCB806C0D}" presName="hierChild1" presStyleCnt="0">
+    <dgm:pt modelId="{0E67C569-98E1-4151-83C2-F29F1A75070A}" type="pres">
+      <dgm:prSet presAssocID="{C5C06BB2-0B4D-4772-925E-928CCB806C0D}" presName="root" presStyleCnt="0">
         <dgm:presLayoutVars>
-          <dgm:chPref val="1"/>
           <dgm:dir/>
-          <dgm:animOne val="branch"/>
-          <dgm:animLvl val="lvl"/>
-          <dgm:resizeHandles/>
+          <dgm:resizeHandles val="exact"/>
         </dgm:presLayoutVars>
       </dgm:prSet>
       <dgm:spPr/>
     </dgm:pt>
-    <dgm:pt modelId="{75F629B1-5CF3-4637-8397-C964C18E5219}" type="pres">
-      <dgm:prSet presAssocID="{5CBD6EEC-0FA5-4E86-A089-47E686326810}" presName="hierRoot1" presStyleCnt="0"/>
+    <dgm:pt modelId="{B26F73C3-9708-466D-BA02-E39259802ACD}" type="pres">
+      <dgm:prSet presAssocID="{5CBD6EEC-0FA5-4E86-A089-47E686326810}" presName="compNode" presStyleCnt="0"/>
       <dgm:spPr/>
     </dgm:pt>
-    <dgm:pt modelId="{42745B1E-E34D-475D-A76A-E25AC342A8F2}" type="pres">
-      <dgm:prSet presAssocID="{5CBD6EEC-0FA5-4E86-A089-47E686326810}" presName="composite" presStyleCnt="0"/>
+    <dgm:pt modelId="{830428B4-0A51-4D19-8195-3E84D0853D44}" type="pres">
+      <dgm:prSet presAssocID="{5CBD6EEC-0FA5-4E86-A089-47E686326810}" presName="iconBgRect" presStyleLbl="bgShp" presStyleIdx="0" presStyleCnt="2"/>
+      <dgm:spPr>
+        <a:prstGeom prst="round2DiagRect">
+          <a:avLst>
+            <a:gd name="adj1" fmla="val 29727"/>
+            <a:gd name="adj2" fmla="val 0"/>
+          </a:avLst>
+        </a:prstGeom>
+      </dgm:spPr>
+    </dgm:pt>
+    <dgm:pt modelId="{02329271-45DF-4E67-8F0D-5D298A28BD80}" type="pres">
+      <dgm:prSet presAssocID="{5CBD6EEC-0FA5-4E86-A089-47E686326810}" presName="iconRect" presStyleLbl="node1" presStyleIdx="0" presStyleCnt="2"/>
+      <dgm:spPr>
+        <a:blipFill>
+          <a:blip xmlns:r="http://schemas.openxmlformats.org/officeDocument/2006/relationships">
+            <a:extLst>
+              <a:ext uri="{28A0092B-C50C-407E-A947-70E740481C1C}">
+                <a14:useLocalDpi xmlns:a14="http://schemas.microsoft.com/office/drawing/2010/main" val="0"/>
+              </a:ext>
+              <a:ext uri="{96DAC541-7B7A-43D3-8B79-37D633B846F1}">
+                <asvg:svgBlip xmlns:asvg="http://schemas.microsoft.com/office/drawing/2016/SVG/main" r:embed="rId1"/>
+              </a:ext>
+            </a:extLst>
+          </a:blip>
+          <a:stretch>
+            <a:fillRect/>
+          </a:stretch>
+        </a:blipFill>
+        <a:ln>
+          <a:noFill/>
+        </a:ln>
+      </dgm:spPr>
+      <dgm:extLst>
+        <a:ext uri="{E40237B7-FDA0-4F09-8148-C483321AD2D9}">
+          <dgm14:cNvPr xmlns:dgm14="http://schemas.microsoft.com/office/drawing/2010/diagram" id="0" name="" descr="Warning"/>
+        </a:ext>
+      </dgm:extLst>
+    </dgm:pt>
+    <dgm:pt modelId="{5705C709-0706-487F-8AE7-7FF2FB1D996E}" type="pres">
+      <dgm:prSet presAssocID="{5CBD6EEC-0FA5-4E86-A089-47E686326810}" presName="spaceRect" presStyleCnt="0"/>
       <dgm:spPr/>
     </dgm:pt>
-    <dgm:pt modelId="{7993751A-6108-4827-9473-CB9ED31D2896}" type="pres">
-      <dgm:prSet presAssocID="{5CBD6EEC-0FA5-4E86-A089-47E686326810}" presName="background" presStyleLbl="node0" presStyleIdx="0" presStyleCnt="3"/>
-      <dgm:spPr>
-        <a:solidFill>
-          <a:schemeClr val="bg2">
-            <a:lumMod val="40000"/>
-            <a:lumOff val="60000"/>
-          </a:schemeClr>
-        </a:solidFill>
-      </dgm:spPr>
-    </dgm:pt>
-    <dgm:pt modelId="{C91ECF8C-25B9-4976-BF13-6F893978DACD}" type="pres">
-      <dgm:prSet presAssocID="{5CBD6EEC-0FA5-4E86-A089-47E686326810}" presName="text" presStyleLbl="fgAcc0" presStyleIdx="0" presStyleCnt="3">
+    <dgm:pt modelId="{8C219131-75F5-4AD6-A8A5-EBDFB923F2C1}" type="pres">
+      <dgm:prSet presAssocID="{5CBD6EEC-0FA5-4E86-A089-47E686326810}" presName="textRect" presStyleLbl="revTx" presStyleIdx="0" presStyleCnt="2">
         <dgm:presLayoutVars>
-          <dgm:chPref val="3"/>
+          <dgm:chMax val="1"/>
+          <dgm:chPref val="1"/>
         </dgm:presLayoutVars>
       </dgm:prSet>
       <dgm:spPr/>
     </dgm:pt>
-    <dgm:pt modelId="{5788EBB4-182E-43E5-9173-EFD21ED91611}" type="pres">
-      <dgm:prSet presAssocID="{5CBD6EEC-0FA5-4E86-A089-47E686326810}" presName="hierChild2" presStyleCnt="0"/>
+    <dgm:pt modelId="{EE117214-25CA-4C15-A6E2-DE2A38AC5296}" type="pres">
+      <dgm:prSet presAssocID="{20A78CA6-E60F-49BE-96F6-D9E29E5864E0}" presName="sibTrans" presStyleCnt="0"/>
       <dgm:spPr/>
     </dgm:pt>
-    <dgm:pt modelId="{87B2E8DA-6AD5-4839-AA7D-931663E72D87}" type="pres">
-      <dgm:prSet presAssocID="{2A6330B4-4684-4594-9229-7F258D465293}" presName="hierRoot1" presStyleCnt="0"/>
+    <dgm:pt modelId="{2E8E78E7-9FF4-4828-8AA1-CDB9F2D18EC7}" type="pres">
+      <dgm:prSet presAssocID="{94A377AA-8C38-4FDA-B6AB-1D0B9EA35736}" presName="compNode" presStyleCnt="0"/>
       <dgm:spPr/>
     </dgm:pt>
-    <dgm:pt modelId="{3B3F5344-F531-4E25-8B6D-2A2F38D6E1C2}" type="pres">
-      <dgm:prSet presAssocID="{2A6330B4-4684-4594-9229-7F258D465293}" presName="composite" presStyleCnt="0"/>
+    <dgm:pt modelId="{D7AA7466-E348-460E-8EED-84B3C69854AF}" type="pres">
+      <dgm:prSet presAssocID="{94A377AA-8C38-4FDA-B6AB-1D0B9EA35736}" presName="iconBgRect" presStyleLbl="bgShp" presStyleIdx="1" presStyleCnt="2"/>
+      <dgm:spPr>
+        <a:prstGeom prst="round2DiagRect">
+          <a:avLst>
+            <a:gd name="adj1" fmla="val 29727"/>
+            <a:gd name="adj2" fmla="val 0"/>
+          </a:avLst>
+        </a:prstGeom>
+      </dgm:spPr>
+    </dgm:pt>
+    <dgm:pt modelId="{596EC4A1-9BE3-4FEC-91BB-828F98E722E9}" type="pres">
+      <dgm:prSet presAssocID="{94A377AA-8C38-4FDA-B6AB-1D0B9EA35736}" presName="iconRect" presStyleLbl="node1" presStyleIdx="1" presStyleCnt="2"/>
+      <dgm:spPr>
+        <a:blipFill>
+          <a:blip xmlns:r="http://schemas.openxmlformats.org/officeDocument/2006/relationships">
+            <a:extLst>
+              <a:ext uri="{28A0092B-C50C-407E-A947-70E740481C1C}">
+                <a14:useLocalDpi xmlns:a14="http://schemas.microsoft.com/office/drawing/2010/main" val="0"/>
+              </a:ext>
+              <a:ext uri="{96DAC541-7B7A-43D3-8B79-37D633B846F1}">
+                <asvg:svgBlip xmlns:asvg="http://schemas.microsoft.com/office/drawing/2016/SVG/main" r:embed="rId2"/>
+              </a:ext>
+            </a:extLst>
+          </a:blip>
+          <a:stretch>
+            <a:fillRect/>
+          </a:stretch>
+        </a:blipFill>
+        <a:ln>
+          <a:noFill/>
+        </a:ln>
+      </dgm:spPr>
+      <dgm:extLst>
+        <a:ext uri="{E40237B7-FDA0-4F09-8148-C483321AD2D9}">
+          <dgm14:cNvPr xmlns:dgm14="http://schemas.microsoft.com/office/drawing/2010/diagram" id="0" name="" descr="Database"/>
+        </a:ext>
+      </dgm:extLst>
+    </dgm:pt>
+    <dgm:pt modelId="{DB4FBBE4-7473-4D4D-BE50-501E36118D31}" type="pres">
+      <dgm:prSet presAssocID="{94A377AA-8C38-4FDA-B6AB-1D0B9EA35736}" presName="spaceRect" presStyleCnt="0"/>
       <dgm:spPr/>
     </dgm:pt>
-    <dgm:pt modelId="{73F6CAAE-BF03-46F0-9B45-0326CBC29348}" type="pres">
-      <dgm:prSet presAssocID="{2A6330B4-4684-4594-9229-7F258D465293}" presName="background" presStyleLbl="node0" presStyleIdx="1" presStyleCnt="3"/>
-      <dgm:spPr>
-        <a:solidFill>
-          <a:schemeClr val="bg2">
-            <a:lumMod val="40000"/>
-            <a:lumOff val="60000"/>
-          </a:schemeClr>
-        </a:solidFill>
-      </dgm:spPr>
-    </dgm:pt>
-    <dgm:pt modelId="{2C559581-068B-4A7A-958E-6B26829D43A8}" type="pres">
-      <dgm:prSet presAssocID="{2A6330B4-4684-4594-9229-7F258D465293}" presName="text" presStyleLbl="fgAcc0" presStyleIdx="1" presStyleCnt="3" custLinFactNeighborX="17">
+    <dgm:pt modelId="{E5479DD7-3E56-4022-BA40-AFB27F644876}" type="pres">
+      <dgm:prSet presAssocID="{94A377AA-8C38-4FDA-B6AB-1D0B9EA35736}" presName="textRect" presStyleLbl="revTx" presStyleIdx="1" presStyleCnt="2">
         <dgm:presLayoutVars>
-          <dgm:chPref val="3"/>
+          <dgm:chMax val="1"/>
+          <dgm:chPref val="1"/>
         </dgm:presLayoutVars>
       </dgm:prSet>
       <dgm:spPr/>
     </dgm:pt>
-    <dgm:pt modelId="{505436CA-ED15-4D95-9B6A-C62E835276F2}" type="pres">
-      <dgm:prSet presAssocID="{2A6330B4-4684-4594-9229-7F258D465293}" presName="hierChild2" presStyleCnt="0"/>
-      <dgm:spPr/>
-    </dgm:pt>
-    <dgm:pt modelId="{6F207C9E-9656-46BC-B4D6-E5C950C67CBA}" type="pres">
-      <dgm:prSet presAssocID="{94A377AA-8C38-4FDA-B6AB-1D0B9EA35736}" presName="hierRoot1" presStyleCnt="0"/>
-      <dgm:spPr/>
-    </dgm:pt>
-    <dgm:pt modelId="{858A05FA-BF42-42BC-892F-CC52B6F59DC6}" type="pres">
-      <dgm:prSet presAssocID="{94A377AA-8C38-4FDA-B6AB-1D0B9EA35736}" presName="composite" presStyleCnt="0"/>
-      <dgm:spPr/>
-    </dgm:pt>
-    <dgm:pt modelId="{3573E094-E031-4291-AE6E-E75B6AE4F760}" type="pres">
-      <dgm:prSet presAssocID="{94A377AA-8C38-4FDA-B6AB-1D0B9EA35736}" presName="background" presStyleLbl="node0" presStyleIdx="2" presStyleCnt="3"/>
-      <dgm:spPr>
-        <a:solidFill>
-          <a:schemeClr val="bg2">
-            <a:lumMod val="40000"/>
-            <a:lumOff val="60000"/>
-          </a:schemeClr>
-        </a:solidFill>
-      </dgm:spPr>
-    </dgm:pt>
-    <dgm:pt modelId="{D1E0B123-C0F6-45C1-ABA9-3D3D97FBD1E2}" type="pres">
-      <dgm:prSet presAssocID="{94A377AA-8C38-4FDA-B6AB-1D0B9EA35736}" presName="text" presStyleLbl="fgAcc0" presStyleIdx="2" presStyleCnt="3">
-        <dgm:presLayoutVars>
-          <dgm:chPref val="3"/>
-        </dgm:presLayoutVars>
-      </dgm:prSet>
-      <dgm:spPr/>
-    </dgm:pt>
-    <dgm:pt modelId="{E53F139B-1FE9-4F4D-9444-26A2154184DF}" type="pres">
-      <dgm:prSet presAssocID="{94A377AA-8C38-4FDA-B6AB-1D0B9EA35736}" presName="hierChild2" presStyleCnt="0"/>
-      <dgm:spPr/>
-    </dgm:pt>
   </dgm:ptLst>
   <dgm:cxnLst>
-    <dgm:cxn modelId="{1C7C8238-574E-4867-9008-C83DFDD97E9F}" type="presOf" srcId="{2A6330B4-4684-4594-9229-7F258D465293}" destId="{2C559581-068B-4A7A-958E-6B26829D43A8}" srcOrd="0" destOrd="0" presId="urn:microsoft.com/office/officeart/2005/8/layout/hierarchy1"/>
-    <dgm:cxn modelId="{30F1FF8D-C6C3-4A15-BA34-514ACDD2E700}" srcId="{C5C06BB2-0B4D-4772-925E-928CCB806C0D}" destId="{94A377AA-8C38-4FDA-B6AB-1D0B9EA35736}" srcOrd="2" destOrd="0" parTransId="{D7AAC7EF-72D3-4377-820B-BBD5F35CFCE5}" sibTransId="{EF2BFC51-BA17-4186-8904-BAA23BE42D7A}"/>
+    <dgm:cxn modelId="{0FACF747-4D72-442E-B0A3-60CD87074912}" type="presOf" srcId="{94A377AA-8C38-4FDA-B6AB-1D0B9EA35736}" destId="{E5479DD7-3E56-4022-BA40-AFB27F644876}" srcOrd="0" destOrd="0" presId="urn:microsoft.com/office/officeart/2018/5/layout/IconLeafLabelList"/>
+    <dgm:cxn modelId="{A881D851-50A1-4FF7-A487-BFF99AD7F7B9}" type="presOf" srcId="{5CBD6EEC-0FA5-4E86-A089-47E686326810}" destId="{8C219131-75F5-4AD6-A8A5-EBDFB923F2C1}" srcOrd="0" destOrd="0" presId="urn:microsoft.com/office/officeart/2018/5/layout/IconLeafLabelList"/>
+    <dgm:cxn modelId="{30F1FF8D-C6C3-4A15-BA34-514ACDD2E700}" srcId="{C5C06BB2-0B4D-4772-925E-928CCB806C0D}" destId="{94A377AA-8C38-4FDA-B6AB-1D0B9EA35736}" srcOrd="1" destOrd="0" parTransId="{D7AAC7EF-72D3-4377-820B-BBD5F35CFCE5}" sibTransId="{EF2BFC51-BA17-4186-8904-BAA23BE42D7A}"/>
     <dgm:cxn modelId="{C5663AA2-E088-4A66-8A0A-4B858692E9E8}" srcId="{C5C06BB2-0B4D-4772-925E-928CCB806C0D}" destId="{5CBD6EEC-0FA5-4E86-A089-47E686326810}" srcOrd="0" destOrd="0" parTransId="{D352E9B1-2F58-49CF-BECE-9731919524BE}" sibTransId="{20A78CA6-E60F-49BE-96F6-D9E29E5864E0}"/>
-    <dgm:cxn modelId="{5FDE75CA-6ED8-4511-BC31-F795E6A16E2B}" srcId="{C5C06BB2-0B4D-4772-925E-928CCB806C0D}" destId="{2A6330B4-4684-4594-9229-7F258D465293}" srcOrd="1" destOrd="0" parTransId="{300AE169-C85E-4A38-9BB2-9AACC09920BF}" sibTransId="{2DAAFDD5-7ACE-466D-8D0C-2E705C9032BB}"/>
-    <dgm:cxn modelId="{3F6B91CD-FF1F-41BF-BBA7-D01479A28CB8}" type="presOf" srcId="{5CBD6EEC-0FA5-4E86-A089-47E686326810}" destId="{C91ECF8C-25B9-4976-BF13-6F893978DACD}" srcOrd="0" destOrd="0" presId="urn:microsoft.com/office/officeart/2005/8/layout/hierarchy1"/>
-    <dgm:cxn modelId="{E3D6BAF4-9E4E-4473-B349-5C91DAEBD9E1}" type="presOf" srcId="{94A377AA-8C38-4FDA-B6AB-1D0B9EA35736}" destId="{D1E0B123-C0F6-45C1-ABA9-3D3D97FBD1E2}" srcOrd="0" destOrd="0" presId="urn:microsoft.com/office/officeart/2005/8/layout/hierarchy1"/>
-    <dgm:cxn modelId="{283D7DFA-62E4-491D-B03B-4F25BBB9170F}" type="presOf" srcId="{C5C06BB2-0B4D-4772-925E-928CCB806C0D}" destId="{AC0F051C-2738-4B82-97B5-CEC36307B4EC}" srcOrd="0" destOrd="0" presId="urn:microsoft.com/office/officeart/2005/8/layout/hierarchy1"/>
-    <dgm:cxn modelId="{C415C971-C796-49F2-B81F-431EF0524653}" type="presParOf" srcId="{AC0F051C-2738-4B82-97B5-CEC36307B4EC}" destId="{75F629B1-5CF3-4637-8397-C964C18E5219}" srcOrd="0" destOrd="0" presId="urn:microsoft.com/office/officeart/2005/8/layout/hierarchy1"/>
-    <dgm:cxn modelId="{F741FC2D-E1D1-4507-B65F-A5E7D9C3D7A3}" type="presParOf" srcId="{75F629B1-5CF3-4637-8397-C964C18E5219}" destId="{42745B1E-E34D-475D-A76A-E25AC342A8F2}" srcOrd="0" destOrd="0" presId="urn:microsoft.com/office/officeart/2005/8/layout/hierarchy1"/>
-    <dgm:cxn modelId="{DB1948BA-0C81-48A1-A4CE-B805A0FDBC8E}" type="presParOf" srcId="{42745B1E-E34D-475D-A76A-E25AC342A8F2}" destId="{7993751A-6108-4827-9473-CB9ED31D2896}" srcOrd="0" destOrd="0" presId="urn:microsoft.com/office/officeart/2005/8/layout/hierarchy1"/>
-    <dgm:cxn modelId="{388E6D18-22CC-4373-B8CA-FEA5F9895878}" type="presParOf" srcId="{42745B1E-E34D-475D-A76A-E25AC342A8F2}" destId="{C91ECF8C-25B9-4976-BF13-6F893978DACD}" srcOrd="1" destOrd="0" presId="urn:microsoft.com/office/officeart/2005/8/layout/hierarchy1"/>
-    <dgm:cxn modelId="{0A45C87F-9B7F-4700-A1A8-F39BF06376F0}" type="presParOf" srcId="{75F629B1-5CF3-4637-8397-C964C18E5219}" destId="{5788EBB4-182E-43E5-9173-EFD21ED91611}" srcOrd="1" destOrd="0" presId="urn:microsoft.com/office/officeart/2005/8/layout/hierarchy1"/>
-    <dgm:cxn modelId="{8A44E7C3-B0F1-4EDF-ABCC-EAD885BD4110}" type="presParOf" srcId="{AC0F051C-2738-4B82-97B5-CEC36307B4EC}" destId="{87B2E8DA-6AD5-4839-AA7D-931663E72D87}" srcOrd="1" destOrd="0" presId="urn:microsoft.com/office/officeart/2005/8/layout/hierarchy1"/>
-    <dgm:cxn modelId="{0328031D-3B0D-49C2-871D-2FF0B52AAF9D}" type="presParOf" srcId="{87B2E8DA-6AD5-4839-AA7D-931663E72D87}" destId="{3B3F5344-F531-4E25-8B6D-2A2F38D6E1C2}" srcOrd="0" destOrd="0" presId="urn:microsoft.com/office/officeart/2005/8/layout/hierarchy1"/>
-    <dgm:cxn modelId="{0812A623-DD77-4254-B0CE-294BE57F3E1A}" type="presParOf" srcId="{3B3F5344-F531-4E25-8B6D-2A2F38D6E1C2}" destId="{73F6CAAE-BF03-46F0-9B45-0326CBC29348}" srcOrd="0" destOrd="0" presId="urn:microsoft.com/office/officeart/2005/8/layout/hierarchy1"/>
-    <dgm:cxn modelId="{CE928522-CD91-408C-8E4E-D5DA55B9114D}" type="presParOf" srcId="{3B3F5344-F531-4E25-8B6D-2A2F38D6E1C2}" destId="{2C559581-068B-4A7A-958E-6B26829D43A8}" srcOrd="1" destOrd="0" presId="urn:microsoft.com/office/officeart/2005/8/layout/hierarchy1"/>
-    <dgm:cxn modelId="{5E3EB628-7A6A-4DB7-B6C8-57A358CC74D6}" type="presParOf" srcId="{87B2E8DA-6AD5-4839-AA7D-931663E72D87}" destId="{505436CA-ED15-4D95-9B6A-C62E835276F2}" srcOrd="1" destOrd="0" presId="urn:microsoft.com/office/officeart/2005/8/layout/hierarchy1"/>
-    <dgm:cxn modelId="{60BDF6C4-74BA-4394-B900-B66319BDD962}" type="presParOf" srcId="{AC0F051C-2738-4B82-97B5-CEC36307B4EC}" destId="{6F207C9E-9656-46BC-B4D6-E5C950C67CBA}" srcOrd="2" destOrd="0" presId="urn:microsoft.com/office/officeart/2005/8/layout/hierarchy1"/>
-    <dgm:cxn modelId="{60AEF291-23DC-4D80-936E-447E52D83042}" type="presParOf" srcId="{6F207C9E-9656-46BC-B4D6-E5C950C67CBA}" destId="{858A05FA-BF42-42BC-892F-CC52B6F59DC6}" srcOrd="0" destOrd="0" presId="urn:microsoft.com/office/officeart/2005/8/layout/hierarchy1"/>
-    <dgm:cxn modelId="{8AC0DCFC-03B4-461A-AC78-A10FC27F9B5B}" type="presParOf" srcId="{858A05FA-BF42-42BC-892F-CC52B6F59DC6}" destId="{3573E094-E031-4291-AE6E-E75B6AE4F760}" srcOrd="0" destOrd="0" presId="urn:microsoft.com/office/officeart/2005/8/layout/hierarchy1"/>
-    <dgm:cxn modelId="{D397DDC9-E49C-4671-9E3D-099DCDFEB680}" type="presParOf" srcId="{858A05FA-BF42-42BC-892F-CC52B6F59DC6}" destId="{D1E0B123-C0F6-45C1-ABA9-3D3D97FBD1E2}" srcOrd="1" destOrd="0" presId="urn:microsoft.com/office/officeart/2005/8/layout/hierarchy1"/>
-    <dgm:cxn modelId="{607113B7-C67D-454A-9061-EC5F02E6A440}" type="presParOf" srcId="{6F207C9E-9656-46BC-B4D6-E5C950C67CBA}" destId="{E53F139B-1FE9-4F4D-9444-26A2154184DF}" srcOrd="1" destOrd="0" presId="urn:microsoft.com/office/officeart/2005/8/layout/hierarchy1"/>
+    <dgm:cxn modelId="{2BEE86AE-67C0-4025-9049-205DBB3BF138}" type="presOf" srcId="{C5C06BB2-0B4D-4772-925E-928CCB806C0D}" destId="{0E67C569-98E1-4151-83C2-F29F1A75070A}" srcOrd="0" destOrd="0" presId="urn:microsoft.com/office/officeart/2018/5/layout/IconLeafLabelList"/>
+    <dgm:cxn modelId="{201A0FDA-1727-4513-B1C5-DB486CB423B9}" type="presParOf" srcId="{0E67C569-98E1-4151-83C2-F29F1A75070A}" destId="{B26F73C3-9708-466D-BA02-E39259802ACD}" srcOrd="0" destOrd="0" presId="urn:microsoft.com/office/officeart/2018/5/layout/IconLeafLabelList"/>
+    <dgm:cxn modelId="{DF54F53C-584A-45A1-B3F1-8D3E337043BC}" type="presParOf" srcId="{B26F73C3-9708-466D-BA02-E39259802ACD}" destId="{830428B4-0A51-4D19-8195-3E84D0853D44}" srcOrd="0" destOrd="0" presId="urn:microsoft.com/office/officeart/2018/5/layout/IconLeafLabelList"/>
+    <dgm:cxn modelId="{B1BC3AA3-F232-4DDE-B9E9-C558131B6331}" type="presParOf" srcId="{B26F73C3-9708-466D-BA02-E39259802ACD}" destId="{02329271-45DF-4E67-8F0D-5D298A28BD80}" srcOrd="1" destOrd="0" presId="urn:microsoft.com/office/officeart/2018/5/layout/IconLeafLabelList"/>
+    <dgm:cxn modelId="{CC0FBA7A-34AD-480B-A6DF-8DE1D497E6DF}" type="presParOf" srcId="{B26F73C3-9708-466D-BA02-E39259802ACD}" destId="{5705C709-0706-487F-8AE7-7FF2FB1D996E}" srcOrd="2" destOrd="0" presId="urn:microsoft.com/office/officeart/2018/5/layout/IconLeafLabelList"/>
+    <dgm:cxn modelId="{D44EC74E-4144-4AD2-B1DA-4E7A275198D2}" type="presParOf" srcId="{B26F73C3-9708-466D-BA02-E39259802ACD}" destId="{8C219131-75F5-4AD6-A8A5-EBDFB923F2C1}" srcOrd="3" destOrd="0" presId="urn:microsoft.com/office/officeart/2018/5/layout/IconLeafLabelList"/>
+    <dgm:cxn modelId="{728AB580-A5F5-49EB-91B5-63EB3DD6485C}" type="presParOf" srcId="{0E67C569-98E1-4151-83C2-F29F1A75070A}" destId="{EE117214-25CA-4C15-A6E2-DE2A38AC5296}" srcOrd="1" destOrd="0" presId="urn:microsoft.com/office/officeart/2018/5/layout/IconLeafLabelList"/>
+    <dgm:cxn modelId="{43AF24ED-B448-4023-83FC-DBD4037FCE77}" type="presParOf" srcId="{0E67C569-98E1-4151-83C2-F29F1A75070A}" destId="{2E8E78E7-9FF4-4828-8AA1-CDB9F2D18EC7}" srcOrd="2" destOrd="0" presId="urn:microsoft.com/office/officeart/2018/5/layout/IconLeafLabelList"/>
+    <dgm:cxn modelId="{19FE0959-6598-41CF-A207-BFC610C7B70F}" type="presParOf" srcId="{2E8E78E7-9FF4-4828-8AA1-CDB9F2D18EC7}" destId="{D7AA7466-E348-460E-8EED-84B3C69854AF}" srcOrd="0" destOrd="0" presId="urn:microsoft.com/office/officeart/2018/5/layout/IconLeafLabelList"/>
+    <dgm:cxn modelId="{B75B84D6-46B8-4339-B462-6F9812A0CC6D}" type="presParOf" srcId="{2E8E78E7-9FF4-4828-8AA1-CDB9F2D18EC7}" destId="{596EC4A1-9BE3-4FEC-91BB-828F98E722E9}" srcOrd="1" destOrd="0" presId="urn:microsoft.com/office/officeart/2018/5/layout/IconLeafLabelList"/>
+    <dgm:cxn modelId="{85888E8A-EA09-406F-998D-A35878C745DB}" type="presParOf" srcId="{2E8E78E7-9FF4-4828-8AA1-CDB9F2D18EC7}" destId="{DB4FBBE4-7473-4D4D-BE50-501E36118D31}" srcOrd="2" destOrd="0" presId="urn:microsoft.com/office/officeart/2018/5/layout/IconLeafLabelList"/>
+    <dgm:cxn modelId="{5A8CC2CB-7588-4FCF-AB50-55671C6772DA}" type="presParOf" srcId="{2E8E78E7-9FF4-4828-8AA1-CDB9F2D18EC7}" destId="{E5479DD7-3E56-4022-BA40-AFB27F644876}" srcOrd="3" destOrd="0" presId="urn:microsoft.com/office/officeart/2018/5/layout/IconLeafLabelList"/>
   </dgm:cxnLst>
   <dgm:bg/>
   <dgm:whole/>
@@ -8119,92 +8255,37 @@
       <dsp:cNvGrpSpPr/>
     </dsp:nvGrpSpPr>
     <dsp:grpSpPr/>
-    <dsp:sp modelId="{7993751A-6108-4827-9473-CB9ED31D2896}">
+    <dsp:sp modelId="{830428B4-0A51-4D19-8195-3E84D0853D44}">
       <dsp:nvSpPr>
         <dsp:cNvPr id="0" name=""/>
         <dsp:cNvSpPr/>
       </dsp:nvSpPr>
       <dsp:spPr>
         <a:xfrm>
-          <a:off x="0" y="573705"/>
-          <a:ext cx="2911971" cy="1849101"/>
+          <a:off x="2315259" y="10409"/>
+          <a:ext cx="1955812" cy="1955812"/>
         </a:xfrm>
-        <a:prstGeom prst="roundRect">
+        <a:prstGeom prst="round2DiagRect">
           <a:avLst>
-            <a:gd name="adj" fmla="val 10000"/>
+            <a:gd name="adj1" fmla="val 29727"/>
+            <a:gd name="adj2" fmla="val 0"/>
           </a:avLst>
         </a:prstGeom>
         <a:solidFill>
-          <a:schemeClr val="bg2">
-            <a:lumMod val="40000"/>
-            <a:lumOff val="60000"/>
-          </a:schemeClr>
-        </a:solidFill>
-        <a:ln>
-          <a:noFill/>
-        </a:ln>
-        <a:effectLst>
-          <a:outerShdw blurRad="50800" dist="38100" dir="5400000" sy="96000" rotWithShape="0">
-            <a:srgbClr val="000000">
-              <a:alpha val="54000"/>
-            </a:srgbClr>
-          </a:outerShdw>
-        </a:effectLst>
-      </dsp:spPr>
-      <dsp:style>
-        <a:lnRef idx="0">
-          <a:scrgbClr r="0" g="0" b="0"/>
-        </a:lnRef>
-        <a:fillRef idx="3">
-          <a:scrgbClr r="0" g="0" b="0"/>
-        </a:fillRef>
-        <a:effectRef idx="2">
-          <a:scrgbClr r="0" g="0" b="0"/>
-        </a:effectRef>
-        <a:fontRef idx="minor">
-          <a:schemeClr val="lt1"/>
-        </a:fontRef>
-      </dsp:style>
-    </dsp:sp>
-    <dsp:sp modelId="{C91ECF8C-25B9-4976-BF13-6F893978DACD}">
-      <dsp:nvSpPr>
-        <dsp:cNvPr id="0" name=""/>
-        <dsp:cNvSpPr/>
-      </dsp:nvSpPr>
-      <dsp:spPr>
-        <a:xfrm>
-          <a:off x="323552" y="881080"/>
-          <a:ext cx="2911971" cy="1849101"/>
-        </a:xfrm>
-        <a:prstGeom prst="roundRect">
-          <a:avLst>
-            <a:gd name="adj" fmla="val 10000"/>
-          </a:avLst>
-        </a:prstGeom>
-        <a:solidFill>
-          <a:schemeClr val="lt1">
-            <a:alpha val="90000"/>
+          <a:schemeClr val="accent2">
             <a:hueOff val="0"/>
             <a:satOff val="0"/>
             <a:lumOff val="0"/>
             <a:alphaOff val="0"/>
           </a:schemeClr>
         </a:solidFill>
-        <a:ln w="12700" cap="flat" cmpd="sng" algn="ctr">
-          <a:solidFill>
-            <a:schemeClr val="accent1">
-              <a:hueOff val="0"/>
-              <a:satOff val="0"/>
-              <a:lumOff val="0"/>
-              <a:alphaOff val="0"/>
-            </a:schemeClr>
-          </a:solidFill>
-          <a:prstDash val="solid"/>
+        <a:ln>
+          <a:noFill/>
         </a:ln>
         <a:effectLst/>
       </dsp:spPr>
       <dsp:style>
-        <a:lnRef idx="1">
+        <a:lnRef idx="0">
           <a:scrgbClr r="0" g="0" b="0"/>
         </a:lnRef>
         <a:fillRef idx="1">
@@ -8215,15 +8296,96 @@
         </a:effectRef>
         <a:fontRef idx="minor"/>
       </dsp:style>
+    </dsp:sp>
+    <dsp:sp modelId="{02329271-45DF-4E67-8F0D-5D298A28BD80}">
+      <dsp:nvSpPr>
+        <dsp:cNvPr id="0" name=""/>
+        <dsp:cNvSpPr/>
+      </dsp:nvSpPr>
+      <dsp:spPr>
+        <a:xfrm>
+          <a:off x="2732071" y="427222"/>
+          <a:ext cx="1122187" cy="1122187"/>
+        </a:xfrm>
+        <a:prstGeom prst="rect">
+          <a:avLst/>
+        </a:prstGeom>
+        <a:blipFill>
+          <a:blip xmlns:r="http://schemas.openxmlformats.org/officeDocument/2006/relationships">
+            <a:extLst>
+              <a:ext uri="{28A0092B-C50C-407E-A947-70E740481C1C}">
+                <a14:useLocalDpi xmlns:a14="http://schemas.microsoft.com/office/drawing/2010/main" val="0"/>
+              </a:ext>
+              <a:ext uri="{96DAC541-7B7A-43D3-8B79-37D633B846F1}">
+                <asvg:svgBlip xmlns:asvg="http://schemas.microsoft.com/office/drawing/2016/SVG/main" r:embed="rId1"/>
+              </a:ext>
+            </a:extLst>
+          </a:blip>
+          <a:stretch>
+            <a:fillRect/>
+          </a:stretch>
+        </a:blipFill>
+        <a:ln w="19050" cap="flat" cmpd="sng" algn="ctr">
+          <a:noFill/>
+          <a:prstDash val="solid"/>
+        </a:ln>
+        <a:effectLst/>
+      </dsp:spPr>
+      <dsp:style>
+        <a:lnRef idx="2">
+          <a:scrgbClr r="0" g="0" b="0"/>
+        </a:lnRef>
+        <a:fillRef idx="1">
+          <a:scrgbClr r="0" g="0" b="0"/>
+        </a:fillRef>
+        <a:effectRef idx="0">
+          <a:scrgbClr r="0" g="0" b="0"/>
+        </a:effectRef>
+        <a:fontRef idx="minor">
+          <a:schemeClr val="lt1"/>
+        </a:fontRef>
+      </dsp:style>
+    </dsp:sp>
+    <dsp:sp modelId="{8C219131-75F5-4AD6-A8A5-EBDFB923F2C1}">
+      <dsp:nvSpPr>
+        <dsp:cNvPr id="0" name=""/>
+        <dsp:cNvSpPr/>
+      </dsp:nvSpPr>
+      <dsp:spPr>
+        <a:xfrm>
+          <a:off x="1690040" y="2575410"/>
+          <a:ext cx="3206250" cy="720000"/>
+        </a:xfrm>
+        <a:prstGeom prst="rect">
+          <a:avLst/>
+        </a:prstGeom>
+        <a:noFill/>
+        <a:ln>
+          <a:noFill/>
+        </a:ln>
+        <a:effectLst/>
+      </dsp:spPr>
+      <dsp:style>
+        <a:lnRef idx="0">
+          <a:scrgbClr r="0" g="0" b="0"/>
+        </a:lnRef>
+        <a:fillRef idx="0">
+          <a:scrgbClr r="0" g="0" b="0"/>
+        </a:fillRef>
+        <a:effectRef idx="0">
+          <a:scrgbClr r="0" g="0" b="0"/>
+        </a:effectRef>
+        <a:fontRef idx="minor"/>
+      </dsp:style>
       <dsp:txBody>
-        <a:bodyPr spcFirstLastPara="0" vert="horz" wrap="square" lIns="121920" tIns="121920" rIns="121920" bIns="121920" numCol="1" spcCol="1270" anchor="ctr" anchorCtr="0">
+        <a:bodyPr spcFirstLastPara="0" vert="horz" wrap="square" lIns="0" tIns="0" rIns="0" bIns="0" numCol="1" spcCol="1270" anchor="t" anchorCtr="0">
           <a:noAutofit/>
         </a:bodyPr>
         <a:lstStyle/>
         <a:p>
-          <a:pPr marL="0" lvl="0" indent="0" algn="ctr" defTabSz="1422400">
+          <a:pPr marL="0" lvl="0" indent="0" algn="ctr" defTabSz="1066800">
             <a:lnSpc>
-              <a:spcPct val="90000"/>
+              <a:spcPct val="100000"/>
             </a:lnSpc>
             <a:spcBef>
               <a:spcPct val="0"/>
@@ -8232,104 +8394,50 @@
               <a:spcPct val="35000"/>
             </a:spcAft>
             <a:buNone/>
+            <a:defRPr cap="all"/>
           </a:pPr>
           <a:r>
-            <a:rPr lang="en-US" sz="3200" kern="1200" dirty="0"/>
-            <a:t>Embedding Quality</a:t>
+            <a:rPr lang="en-US" sz="2400" kern="1200"/>
+            <a:t>API Limitations</a:t>
           </a:r>
         </a:p>
       </dsp:txBody>
       <dsp:txXfrm>
-        <a:off x="377710" y="935238"/>
-        <a:ext cx="2803655" cy="1740785"/>
+        <a:off x="1690040" y="2575410"/>
+        <a:ext cx="3206250" cy="720000"/>
       </dsp:txXfrm>
     </dsp:sp>
-    <dsp:sp modelId="{73F6CAAE-BF03-46F0-9B45-0326CBC29348}">
+    <dsp:sp modelId="{D7AA7466-E348-460E-8EED-84B3C69854AF}">
       <dsp:nvSpPr>
         <dsp:cNvPr id="0" name=""/>
         <dsp:cNvSpPr/>
       </dsp:nvSpPr>
       <dsp:spPr>
         <a:xfrm>
-          <a:off x="3559570" y="573705"/>
-          <a:ext cx="2911971" cy="1849101"/>
+          <a:off x="6082603" y="10409"/>
+          <a:ext cx="1955812" cy="1955812"/>
         </a:xfrm>
-        <a:prstGeom prst="roundRect">
+        <a:prstGeom prst="round2DiagRect">
           <a:avLst>
-            <a:gd name="adj" fmla="val 10000"/>
+            <a:gd name="adj1" fmla="val 29727"/>
+            <a:gd name="adj2" fmla="val 0"/>
           </a:avLst>
         </a:prstGeom>
         <a:solidFill>
-          <a:schemeClr val="bg2">
-            <a:lumMod val="40000"/>
-            <a:lumOff val="60000"/>
-          </a:schemeClr>
-        </a:solidFill>
-        <a:ln>
-          <a:noFill/>
-        </a:ln>
-        <a:effectLst>
-          <a:outerShdw blurRad="50800" dist="38100" dir="5400000" sy="96000" rotWithShape="0">
-            <a:srgbClr val="000000">
-              <a:alpha val="54000"/>
-            </a:srgbClr>
-          </a:outerShdw>
-        </a:effectLst>
-      </dsp:spPr>
-      <dsp:style>
-        <a:lnRef idx="0">
-          <a:scrgbClr r="0" g="0" b="0"/>
-        </a:lnRef>
-        <a:fillRef idx="3">
-          <a:scrgbClr r="0" g="0" b="0"/>
-        </a:fillRef>
-        <a:effectRef idx="2">
-          <a:scrgbClr r="0" g="0" b="0"/>
-        </a:effectRef>
-        <a:fontRef idx="minor">
-          <a:schemeClr val="lt1"/>
-        </a:fontRef>
-      </dsp:style>
-    </dsp:sp>
-    <dsp:sp modelId="{2C559581-068B-4A7A-958E-6B26829D43A8}">
-      <dsp:nvSpPr>
-        <dsp:cNvPr id="0" name=""/>
-        <dsp:cNvSpPr/>
-      </dsp:nvSpPr>
-      <dsp:spPr>
-        <a:xfrm>
-          <a:off x="3883123" y="881080"/>
-          <a:ext cx="2911971" cy="1849101"/>
-        </a:xfrm>
-        <a:prstGeom prst="roundRect">
-          <a:avLst>
-            <a:gd name="adj" fmla="val 10000"/>
-          </a:avLst>
-        </a:prstGeom>
-        <a:solidFill>
-          <a:schemeClr val="lt1">
-            <a:alpha val="90000"/>
+          <a:schemeClr val="accent3">
             <a:hueOff val="0"/>
             <a:satOff val="0"/>
             <a:lumOff val="0"/>
             <a:alphaOff val="0"/>
           </a:schemeClr>
         </a:solidFill>
-        <a:ln w="12700" cap="flat" cmpd="sng" algn="ctr">
-          <a:solidFill>
-            <a:schemeClr val="accent1">
-              <a:hueOff val="0"/>
-              <a:satOff val="0"/>
-              <a:lumOff val="0"/>
-              <a:alphaOff val="0"/>
-            </a:schemeClr>
-          </a:solidFill>
-          <a:prstDash val="solid"/>
+        <a:ln>
+          <a:noFill/>
         </a:ln>
         <a:effectLst/>
       </dsp:spPr>
       <dsp:style>
-        <a:lnRef idx="1">
+        <a:lnRef idx="0">
           <a:scrgbClr r="0" g="0" b="0"/>
         </a:lnRef>
         <a:fillRef idx="1">
@@ -8340,15 +8448,96 @@
         </a:effectRef>
         <a:fontRef idx="minor"/>
       </dsp:style>
+    </dsp:sp>
+    <dsp:sp modelId="{596EC4A1-9BE3-4FEC-91BB-828F98E722E9}">
+      <dsp:nvSpPr>
+        <dsp:cNvPr id="0" name=""/>
+        <dsp:cNvSpPr/>
+      </dsp:nvSpPr>
+      <dsp:spPr>
+        <a:xfrm>
+          <a:off x="6499415" y="427222"/>
+          <a:ext cx="1122187" cy="1122187"/>
+        </a:xfrm>
+        <a:prstGeom prst="rect">
+          <a:avLst/>
+        </a:prstGeom>
+        <a:blipFill>
+          <a:blip xmlns:r="http://schemas.openxmlformats.org/officeDocument/2006/relationships">
+            <a:extLst>
+              <a:ext uri="{28A0092B-C50C-407E-A947-70E740481C1C}">
+                <a14:useLocalDpi xmlns:a14="http://schemas.microsoft.com/office/drawing/2010/main" val="0"/>
+              </a:ext>
+              <a:ext uri="{96DAC541-7B7A-43D3-8B79-37D633B846F1}">
+                <asvg:svgBlip xmlns:asvg="http://schemas.microsoft.com/office/drawing/2016/SVG/main" r:embed="rId2"/>
+              </a:ext>
+            </a:extLst>
+          </a:blip>
+          <a:stretch>
+            <a:fillRect/>
+          </a:stretch>
+        </a:blipFill>
+        <a:ln w="19050" cap="flat" cmpd="sng" algn="ctr">
+          <a:noFill/>
+          <a:prstDash val="solid"/>
+        </a:ln>
+        <a:effectLst/>
+      </dsp:spPr>
+      <dsp:style>
+        <a:lnRef idx="2">
+          <a:scrgbClr r="0" g="0" b="0"/>
+        </a:lnRef>
+        <a:fillRef idx="1">
+          <a:scrgbClr r="0" g="0" b="0"/>
+        </a:fillRef>
+        <a:effectRef idx="0">
+          <a:scrgbClr r="0" g="0" b="0"/>
+        </a:effectRef>
+        <a:fontRef idx="minor">
+          <a:schemeClr val="lt1"/>
+        </a:fontRef>
+      </dsp:style>
+    </dsp:sp>
+    <dsp:sp modelId="{E5479DD7-3E56-4022-BA40-AFB27F644876}">
+      <dsp:nvSpPr>
+        <dsp:cNvPr id="0" name=""/>
+        <dsp:cNvSpPr/>
+      </dsp:nvSpPr>
+      <dsp:spPr>
+        <a:xfrm>
+          <a:off x="5457384" y="2575410"/>
+          <a:ext cx="3206250" cy="720000"/>
+        </a:xfrm>
+        <a:prstGeom prst="rect">
+          <a:avLst/>
+        </a:prstGeom>
+        <a:noFill/>
+        <a:ln>
+          <a:noFill/>
+        </a:ln>
+        <a:effectLst/>
+      </dsp:spPr>
+      <dsp:style>
+        <a:lnRef idx="0">
+          <a:scrgbClr r="0" g="0" b="0"/>
+        </a:lnRef>
+        <a:fillRef idx="0">
+          <a:scrgbClr r="0" g="0" b="0"/>
+        </a:fillRef>
+        <a:effectRef idx="0">
+          <a:scrgbClr r="0" g="0" b="0"/>
+        </a:effectRef>
+        <a:fontRef idx="minor"/>
+      </dsp:style>
       <dsp:txBody>
-        <a:bodyPr spcFirstLastPara="0" vert="horz" wrap="square" lIns="121920" tIns="121920" rIns="121920" bIns="121920" numCol="1" spcCol="1270" anchor="ctr" anchorCtr="0">
+        <a:bodyPr spcFirstLastPara="0" vert="horz" wrap="square" lIns="0" tIns="0" rIns="0" bIns="0" numCol="1" spcCol="1270" anchor="t" anchorCtr="0">
           <a:noAutofit/>
         </a:bodyPr>
         <a:lstStyle/>
         <a:p>
-          <a:pPr marL="0" lvl="0" indent="0" algn="ctr" defTabSz="1422400">
+          <a:pPr marL="0" lvl="0" indent="0" algn="ctr" defTabSz="1066800">
             <a:lnSpc>
-              <a:spcPct val="90000"/>
+              <a:spcPct val="100000"/>
             </a:lnSpc>
             <a:spcBef>
               <a:spcPct val="0"/>
@@ -8357,142 +8546,17 @@
               <a:spcPct val="35000"/>
             </a:spcAft>
             <a:buNone/>
+            <a:defRPr cap="all"/>
           </a:pPr>
           <a:r>
-            <a:rPr lang="en-US" sz="3200" kern="1200" dirty="0"/>
-            <a:t>API Limitations</a:t>
+            <a:rPr lang="en-US" sz="2400" kern="1200"/>
+            <a:t>Source data is not fully fetched.</a:t>
           </a:r>
         </a:p>
       </dsp:txBody>
       <dsp:txXfrm>
-        <a:off x="3937281" y="935238"/>
-        <a:ext cx="2803655" cy="1740785"/>
-      </dsp:txXfrm>
-    </dsp:sp>
-    <dsp:sp modelId="{3573E094-E031-4291-AE6E-E75B6AE4F760}">
-      <dsp:nvSpPr>
-        <dsp:cNvPr id="0" name=""/>
-        <dsp:cNvSpPr/>
-      </dsp:nvSpPr>
-      <dsp:spPr>
-        <a:xfrm>
-          <a:off x="7118151" y="573705"/>
-          <a:ext cx="2911971" cy="1849101"/>
-        </a:xfrm>
-        <a:prstGeom prst="roundRect">
-          <a:avLst>
-            <a:gd name="adj" fmla="val 10000"/>
-          </a:avLst>
-        </a:prstGeom>
-        <a:solidFill>
-          <a:schemeClr val="bg2">
-            <a:lumMod val="40000"/>
-            <a:lumOff val="60000"/>
-          </a:schemeClr>
-        </a:solidFill>
-        <a:ln>
-          <a:noFill/>
-        </a:ln>
-        <a:effectLst>
-          <a:outerShdw blurRad="50800" dist="38100" dir="5400000" sy="96000" rotWithShape="0">
-            <a:srgbClr val="000000">
-              <a:alpha val="54000"/>
-            </a:srgbClr>
-          </a:outerShdw>
-        </a:effectLst>
-      </dsp:spPr>
-      <dsp:style>
-        <a:lnRef idx="0">
-          <a:scrgbClr r="0" g="0" b="0"/>
-        </a:lnRef>
-        <a:fillRef idx="3">
-          <a:scrgbClr r="0" g="0" b="0"/>
-        </a:fillRef>
-        <a:effectRef idx="2">
-          <a:scrgbClr r="0" g="0" b="0"/>
-        </a:effectRef>
-        <a:fontRef idx="minor">
-          <a:schemeClr val="lt1"/>
-        </a:fontRef>
-      </dsp:style>
-    </dsp:sp>
-    <dsp:sp modelId="{D1E0B123-C0F6-45C1-ABA9-3D3D97FBD1E2}">
-      <dsp:nvSpPr>
-        <dsp:cNvPr id="0" name=""/>
-        <dsp:cNvSpPr/>
-      </dsp:nvSpPr>
-      <dsp:spPr>
-        <a:xfrm>
-          <a:off x="7441703" y="881080"/>
-          <a:ext cx="2911971" cy="1849101"/>
-        </a:xfrm>
-        <a:prstGeom prst="roundRect">
-          <a:avLst>
-            <a:gd name="adj" fmla="val 10000"/>
-          </a:avLst>
-        </a:prstGeom>
-        <a:solidFill>
-          <a:schemeClr val="lt1">
-            <a:alpha val="90000"/>
-            <a:hueOff val="0"/>
-            <a:satOff val="0"/>
-            <a:lumOff val="0"/>
-            <a:alphaOff val="0"/>
-          </a:schemeClr>
-        </a:solidFill>
-        <a:ln w="12700" cap="flat" cmpd="sng" algn="ctr">
-          <a:solidFill>
-            <a:schemeClr val="accent1">
-              <a:hueOff val="0"/>
-              <a:satOff val="0"/>
-              <a:lumOff val="0"/>
-              <a:alphaOff val="0"/>
-            </a:schemeClr>
-          </a:solidFill>
-          <a:prstDash val="solid"/>
-        </a:ln>
-        <a:effectLst/>
-      </dsp:spPr>
-      <dsp:style>
-        <a:lnRef idx="1">
-          <a:scrgbClr r="0" g="0" b="0"/>
-        </a:lnRef>
-        <a:fillRef idx="1">
-          <a:scrgbClr r="0" g="0" b="0"/>
-        </a:fillRef>
-        <a:effectRef idx="0">
-          <a:scrgbClr r="0" g="0" b="0"/>
-        </a:effectRef>
-        <a:fontRef idx="minor"/>
-      </dsp:style>
-      <dsp:txBody>
-        <a:bodyPr spcFirstLastPara="0" vert="horz" wrap="square" lIns="121920" tIns="121920" rIns="121920" bIns="121920" numCol="1" spcCol="1270" anchor="ctr" anchorCtr="0">
-          <a:noAutofit/>
-        </a:bodyPr>
-        <a:lstStyle/>
-        <a:p>
-          <a:pPr marL="0" lvl="0" indent="0" algn="ctr" defTabSz="1422400">
-            <a:lnSpc>
-              <a:spcPct val="90000"/>
-            </a:lnSpc>
-            <a:spcBef>
-              <a:spcPct val="0"/>
-            </a:spcBef>
-            <a:spcAft>
-              <a:spcPct val="35000"/>
-            </a:spcAft>
-            <a:buNone/>
-          </a:pPr>
-          <a:r>
-            <a:rPr lang="en-US" sz="3200" kern="1200"/>
-            <a:t>Source data is not full fetched.</a:t>
-          </a:r>
-          <a:endParaRPr lang="en-US" sz="3200" kern="1200" dirty="0"/>
-        </a:p>
-      </dsp:txBody>
-      <dsp:txXfrm>
-        <a:off x="7495861" y="935238"/>
-        <a:ext cx="2803655" cy="1740785"/>
+        <a:off x="5457384" y="2575410"/>
+        <a:ext cx="3206250" cy="720000"/>
       </dsp:txXfrm>
     </dsp:sp>
   </dsp:spTree>
@@ -9427,106 +9491,57 @@
 </file>
 
 <file path=ppt/diagrams/layout2.xml><?xml version="1.0" encoding="utf-8"?>
-<dgm:layoutDef xmlns:dgm="http://schemas.openxmlformats.org/drawingml/2006/diagram" xmlns:a="http://schemas.openxmlformats.org/drawingml/2006/main" uniqueId="urn:microsoft.com/office/officeart/2005/8/layout/hierarchy1">
-  <dgm:title val=""/>
-  <dgm:desc val=""/>
+<dgm:layoutDef xmlns:dgm="http://schemas.openxmlformats.org/drawingml/2006/diagram" xmlns:a="http://schemas.openxmlformats.org/drawingml/2006/main" uniqueId="urn:microsoft.com/office/officeart/2018/5/layout/IconLeafLabelList">
+  <dgm:title val="Icon Leaf Label List"/>
+  <dgm:desc val="Use to show non-sequential or grouped chunks of information accompanied by a related visuals. Works best with icons or small pictures with short text captions."/>
   <dgm:catLst>
-    <dgm:cat type="hierarchy" pri="2000"/>
+    <dgm:cat type="icon" pri="500"/>
   </dgm:catLst>
-  <dgm:sampData>
+  <dgm:sampData useDef="1">
     <dgm:dataModel>
-      <dgm:ptLst>
-        <dgm:pt modelId="0" type="doc"/>
-        <dgm:pt modelId="1">
-          <dgm:prSet phldr="1"/>
-        </dgm:pt>
-        <dgm:pt modelId="2">
-          <dgm:prSet phldr="1"/>
-        </dgm:pt>
-        <dgm:pt modelId="21">
-          <dgm:prSet phldr="1"/>
-        </dgm:pt>
-        <dgm:pt modelId="22">
-          <dgm:prSet phldr="1"/>
-        </dgm:pt>
-        <dgm:pt modelId="3">
-          <dgm:prSet phldr="1"/>
-        </dgm:pt>
-        <dgm:pt modelId="31">
-          <dgm:prSet phldr="1"/>
-        </dgm:pt>
-      </dgm:ptLst>
-      <dgm:cxnLst>
-        <dgm:cxn modelId="4" srcId="0" destId="1" srcOrd="0" destOrd="0"/>
-        <dgm:cxn modelId="5" srcId="1" destId="2" srcOrd="0" destOrd="0"/>
-        <dgm:cxn modelId="6" srcId="1" destId="3" srcOrd="1" destOrd="0"/>
-        <dgm:cxn modelId="23" srcId="2" destId="21" srcOrd="0" destOrd="0"/>
-        <dgm:cxn modelId="24" srcId="2" destId="22" srcOrd="1" destOrd="0"/>
-        <dgm:cxn modelId="33" srcId="3" destId="31" srcOrd="0" destOrd="0"/>
-      </dgm:cxnLst>
+      <dgm:ptLst/>
       <dgm:bg/>
       <dgm:whole/>
     </dgm:dataModel>
   </dgm:sampData>
-  <dgm:styleData>
+  <dgm:styleData useDef="1">
     <dgm:dataModel>
-      <dgm:ptLst>
-        <dgm:pt modelId="0" type="doc"/>
-        <dgm:pt modelId="1"/>
-        <dgm:pt modelId="11"/>
-        <dgm:pt modelId="12"/>
-      </dgm:ptLst>
-      <dgm:cxnLst>
-        <dgm:cxn modelId="2" srcId="0" destId="1" srcOrd="0" destOrd="0"/>
-        <dgm:cxn modelId="13" srcId="1" destId="11" srcOrd="0" destOrd="0"/>
-        <dgm:cxn modelId="14" srcId="1" destId="12" srcOrd="1" destOrd="0"/>
-      </dgm:cxnLst>
+      <dgm:ptLst/>
       <dgm:bg/>
       <dgm:whole/>
     </dgm:dataModel>
   </dgm:styleData>
-  <dgm:clrData>
+  <dgm:clrData useDef="1">
     <dgm:dataModel>
-      <dgm:ptLst>
-        <dgm:pt modelId="0" type="doc"/>
-        <dgm:pt modelId="1"/>
-        <dgm:pt modelId="2"/>
-        <dgm:pt modelId="21"/>
-        <dgm:pt modelId="211"/>
-        <dgm:pt modelId="3"/>
-        <dgm:pt modelId="31"/>
-        <dgm:pt modelId="311"/>
-      </dgm:ptLst>
-      <dgm:cxnLst>
-        <dgm:cxn modelId="4" srcId="0" destId="1" srcOrd="0" destOrd="0"/>
-        <dgm:cxn modelId="5" srcId="1" destId="2" srcOrd="0" destOrd="0"/>
-        <dgm:cxn modelId="6" srcId="1" destId="3" srcOrd="1" destOrd="0"/>
-        <dgm:cxn modelId="23" srcId="2" destId="21" srcOrd="0" destOrd="0"/>
-        <dgm:cxn modelId="24" srcId="21" destId="211" srcOrd="0" destOrd="0"/>
-        <dgm:cxn modelId="33" srcId="3" destId="31" srcOrd="0" destOrd="0"/>
-        <dgm:cxn modelId="34" srcId="31" destId="311" srcOrd="0" destOrd="0"/>
-      </dgm:cxnLst>
+      <dgm:ptLst/>
       <dgm:bg/>
       <dgm:whole/>
     </dgm:dataModel>
   </dgm:clrData>
-  <dgm:layoutNode name="hierChild1">
+  <dgm:layoutNode name="root">
     <dgm:varLst>
-      <dgm:chPref val="1"/>
       <dgm:dir/>
-      <dgm:animOne val="branch"/>
-      <dgm:animLvl val="lvl"/>
-      <dgm:resizeHandles/>
+      <dgm:resizeHandles val="exact"/>
     </dgm:varLst>
     <dgm:choose name="Name0">
-      <dgm:if name="Name1" func="var" arg="dir" op="equ" val="norm">
-        <dgm:alg type="hierChild">
-          <dgm:param type="linDir" val="fromL"/>
+      <dgm:if name="Name1" axis="self" func="var" arg="dir" op="equ" val="norm">
+        <dgm:alg type="snake">
+          <dgm:param type="grDir" val="tL"/>
+          <dgm:param type="flowDir" val="row"/>
+          <dgm:param type="contDir" val="sameDir"/>
+          <dgm:param type="off" val="ctr"/>
+          <dgm:param type="vertAlign" val="mid"/>
+          <dgm:param type="horzAlign" val="ctr"/>
         </dgm:alg>
       </dgm:if>
       <dgm:else name="Name2">
-        <dgm:alg type="hierChild">
-          <dgm:param type="linDir" val="fromR"/>
+        <dgm:alg type="snake">
+          <dgm:param type="grDir" val="tR"/>
+          <dgm:param type="flowDir" val="row"/>
+          <dgm:param type="contDir" val="sameDir"/>
+          <dgm:param type="off" val="ctr"/>
+          <dgm:param type="vertAlign" val="mid"/>
+          <dgm:param type="horzAlign" val="ctr"/>
         </dgm:alg>
       </dgm:else>
     </dgm:choose>
@@ -9534,458 +9549,171 @@
       <dgm:adjLst/>
     </dgm:shape>
     <dgm:presOf/>
-    <dgm:constrLst>
-      <dgm:constr type="primFontSz" for="des" ptType="node" op="equ" val="65"/>
-      <dgm:constr type="w" for="des" forName="composite" refType="w"/>
-      <dgm:constr type="h" for="des" forName="composite" refType="w" refFor="des" refForName="composite" fact="0.667"/>
-      <dgm:constr type="w" for="des" forName="composite2" refType="w" refFor="des" refForName="composite"/>
-      <dgm:constr type="h" for="des" forName="composite2" refType="h" refFor="des" refForName="composite"/>
-      <dgm:constr type="w" for="des" forName="composite3" refType="w" refFor="des" refForName="composite"/>
-      <dgm:constr type="h" for="des" forName="composite3" refType="h" refFor="des" refForName="composite"/>
-      <dgm:constr type="w" for="des" forName="composite4" refType="w" refFor="des" refForName="composite"/>
-      <dgm:constr type="h" for="des" forName="composite4" refType="h" refFor="des" refForName="composite"/>
-      <dgm:constr type="w" for="des" forName="composite5" refType="w" refFor="des" refForName="composite"/>
-      <dgm:constr type="h" for="des" forName="composite5" refType="h" refFor="des" refForName="composite"/>
-      <dgm:constr type="sibSp" refType="w" refFor="des" refForName="composite" fact="0.1"/>
-      <dgm:constr type="sibSp" for="des" forName="hierChild2" refType="sibSp"/>
-      <dgm:constr type="sibSp" for="des" forName="hierChild3" refType="sibSp"/>
-      <dgm:constr type="sibSp" for="des" forName="hierChild4" refType="sibSp"/>
-      <dgm:constr type="sibSp" for="des" forName="hierChild5" refType="sibSp"/>
-      <dgm:constr type="sibSp" for="des" forName="hierChild6" refType="sibSp"/>
-      <dgm:constr type="sp" for="des" forName="hierRoot1" refType="h" refFor="des" refForName="composite" fact="0.25"/>
-      <dgm:constr type="sp" for="des" forName="hierRoot2" refType="sp" refFor="des" refForName="hierRoot1"/>
-      <dgm:constr type="sp" for="des" forName="hierRoot3" refType="sp" refFor="des" refForName="hierRoot1"/>
-      <dgm:constr type="sp" for="des" forName="hierRoot4" refType="sp" refFor="des" refForName="hierRoot1"/>
-      <dgm:constr type="sp" for="des" forName="hierRoot5" refType="sp" refFor="des" refForName="hierRoot1"/>
-    </dgm:constrLst>
-    <dgm:ruleLst/>
-    <dgm:forEach name="Name3" axis="ch">
-      <dgm:forEach name="Name4" axis="self" ptType="node">
-        <dgm:layoutNode name="hierRoot1">
-          <dgm:alg type="hierRoot"/>
+    <dgm:choose name="Name3">
+      <dgm:if name="Name4" axis="ch" ptType="node" func="cnt" op="lte" val="2">
+        <dgm:constrLst>
+          <dgm:constr type="h" for="ch" forName="compNode" refType="h" fact="0.4"/>
+          <dgm:constr type="w" for="ch" forName="compNode" val="100"/>
+          <dgm:constr type="w" for="ch" forName="sibTrans" refType="w" refFor="ch" refForName="compNode" fact="0.175"/>
+          <dgm:constr type="sp" refType="w" refFor="ch" refForName="compNode" op="equ" fact="0.25"/>
+          <dgm:constr type="primFontSz" for="des" ptType="node" op="equ" val="44"/>
+          <dgm:constr type="h" for="des" forName="compNode" op="equ"/>
+          <dgm:constr type="h" for="des" forName="textRect" op="equ"/>
+        </dgm:constrLst>
+      </dgm:if>
+      <dgm:if name="Name5" axis="ch" ptType="node" func="cnt" op="lte" val="3">
+        <dgm:constrLst>
+          <dgm:constr type="h" for="ch" forName="compNode" refType="h" fact="0.4"/>
+          <dgm:constr type="w" for="ch" forName="compNode" val="100"/>
+          <dgm:constr type="w" for="ch" forName="sibTrans" refType="w" refFor="ch" refForName="compNode" fact="0.175"/>
+          <dgm:constr type="sp" refType="w" refFor="ch" refForName="compNode" op="equ" fact="0.25"/>
+          <dgm:constr type="primFontSz" for="des" ptType="node" op="equ" val="40"/>
+          <dgm:constr type="h" for="des" forName="compNode" op="equ"/>
+          <dgm:constr type="h" for="des" forName="textRect" op="equ"/>
+        </dgm:constrLst>
+      </dgm:if>
+      <dgm:if name="Name6" axis="ch" ptType="node" func="cnt" op="lte" val="4">
+        <dgm:constrLst>
+          <dgm:constr type="h" for="ch" forName="compNode" refType="h" fact="0.4"/>
+          <dgm:constr type="w" for="ch" forName="compNode" refType="w"/>
+          <dgm:constr type="w" for="ch" forName="sibTrans" refType="w" refFor="ch" refForName="compNode" fact="0.175"/>
+          <dgm:constr type="sp" refType="w" refFor="ch" refForName="compNode" op="equ" fact="0.25"/>
+          <dgm:constr type="primFontSz" for="des" ptType="node" op="equ" val="32"/>
+          <dgm:constr type="h" for="des" forName="compNode" op="equ"/>
+          <dgm:constr type="h" for="des" forName="textRect" op="equ"/>
+        </dgm:constrLst>
+      </dgm:if>
+      <dgm:else name="Name7">
+        <dgm:constrLst>
+          <dgm:constr type="h" for="ch" forName="compNode" refType="h" fact="0.4"/>
+          <dgm:constr type="w" for="ch" forName="compNode" refType="w"/>
+          <dgm:constr type="w" for="ch" forName="sibTrans" refType="w" refFor="ch" refForName="compNode" fact="0.175"/>
+          <dgm:constr type="sp" refType="w" refFor="ch" refForName="compNode" op="equ" fact="0.25"/>
+          <dgm:constr type="primFontSz" for="des" ptType="node" op="equ" val="24"/>
+          <dgm:constr type="h" for="des" forName="compNode" op="equ"/>
+          <dgm:constr type="h" for="des" forName="textRect" op="equ"/>
+        </dgm:constrLst>
+      </dgm:else>
+    </dgm:choose>
+    <dgm:ruleLst>
+      <dgm:rule type="w" for="ch" forName="compNode" val="50" fact="NaN" max="NaN"/>
+    </dgm:ruleLst>
+    <dgm:forEach name="Name8" axis="ch" ptType="node">
+      <dgm:layoutNode name="compNode">
+        <dgm:alg type="composite"/>
+        <dgm:shape xmlns:r="http://schemas.openxmlformats.org/officeDocument/2006/relationships" r:blip="">
+          <dgm:adjLst/>
+        </dgm:shape>
+        <dgm:presOf axis="self"/>
+        <dgm:constrLst>
+          <dgm:constr type="w" for="ch" forName="iconBgRect" refType="w" fact="0.61"/>
+          <dgm:constr type="h" for="ch" forName="iconBgRect" refType="w" refFor="ch" refForName="iconBgRect"/>
+          <dgm:constr type="t" for="ch" forName="iconBgRect"/>
+          <dgm:constr type="ctrX" for="ch" forName="iconBgRect" refType="w" fact="0.5"/>
+          <dgm:constr type="w" for="ch" forName="iconRect" refType="w" fact="0.35"/>
+          <dgm:constr type="h" for="ch" forName="iconRect" refType="w" refFor="ch" refForName="iconRect"/>
+          <dgm:constr type="ctrX" for="ch" forName="iconRect" refType="ctrX" refFor="ch" refForName="iconBgRect"/>
+          <dgm:constr type="ctrY" for="ch" forName="iconRect" refType="ctrY" refFor="ch" refForName="iconBgRect"/>
+          <dgm:constr type="h" for="ch" forName="spaceRect" refType="w" fact="0.19"/>
+          <dgm:constr type="w" for="ch" forName="spaceRect" refType="w"/>
+          <dgm:constr type="l" for="ch" forName="spaceRect"/>
+          <dgm:constr type="t" for="ch" forName="spaceRect" refType="b" refFor="ch" refForName="iconBgRect"/>
+          <dgm:constr type="h" for="ch" forName="textRect" val="20"/>
+          <dgm:constr type="w" for="ch" forName="textRect" refType="w"/>
+          <dgm:constr type="l" for="ch" forName="textRect"/>
+          <dgm:constr type="t" for="ch" forName="textRect" refType="b" refFor="ch" refForName="spaceRect"/>
+        </dgm:constrLst>
+        <dgm:ruleLst>
+          <dgm:rule type="h" val="INF" fact="NaN" max="NaN"/>
+        </dgm:ruleLst>
+        <dgm:layoutNode name="iconBgRect" styleLbl="bgShp">
+          <dgm:alg type="sp"/>
+          <dgm:shape xmlns:r="http://schemas.openxmlformats.org/officeDocument/2006/relationships" type="round2DiagRect" r:blip="">
+            <dgm:adjLst/>
+            <dgm:extLst>
+              <a:ext uri="{B698B0E9-8C71-41B9-8309-B3DCBF30829C}">
+                <dgm1612:spPr xmlns:dgm1612="http://schemas.microsoft.com/office/drawing/2016/12/diagram">
+                  <a:prstGeom prst="round2DiagRect">
+                    <a:avLst>
+                      <a:gd name="adj1" fmla="val 29727"/>
+                      <a:gd name="adj2" fmla="val 0"/>
+                    </a:avLst>
+                  </a:prstGeom>
+                </dgm1612:spPr>
+              </a:ext>
+            </dgm:extLst>
+          </dgm:shape>
+          <dgm:presOf/>
+          <dgm:constrLst/>
+          <dgm:ruleLst/>
+        </dgm:layoutNode>
+        <dgm:layoutNode name="iconRect" styleLbl="node1">
+          <dgm:alg type="sp"/>
+          <dgm:shape xmlns:r="http://schemas.openxmlformats.org/officeDocument/2006/relationships" type="rect" r:blip="" blipPhldr="1">
+            <dgm:adjLst/>
+          </dgm:shape>
+          <dgm:presOf/>
+          <dgm:constrLst/>
+          <dgm:ruleLst/>
+        </dgm:layoutNode>
+        <dgm:layoutNode name="spaceRect">
+          <dgm:alg type="sp"/>
           <dgm:shape xmlns:r="http://schemas.openxmlformats.org/officeDocument/2006/relationships" r:blip="">
             <dgm:adjLst/>
           </dgm:shape>
           <dgm:presOf/>
+          <dgm:constrLst/>
+          <dgm:ruleLst/>
+        </dgm:layoutNode>
+        <dgm:layoutNode name="textRect" styleLbl="revTx">
+          <dgm:varLst>
+            <dgm:chMax val="1"/>
+            <dgm:chPref val="1"/>
+          </dgm:varLst>
+          <dgm:alg type="tx">
+            <dgm:param type="txAnchorVert" val="t"/>
+          </dgm:alg>
+          <dgm:shape xmlns:r="http://schemas.openxmlformats.org/officeDocument/2006/relationships" type="rect" r:blip="">
+            <dgm:adjLst/>
+          </dgm:shape>
+          <dgm:presOf axis="self" ptType="node"/>
           <dgm:constrLst>
-            <dgm:constr type="bendDist" for="des" ptType="parTrans" refType="sp" fact="0.5"/>
+            <dgm:constr type="lMarg"/>
+            <dgm:constr type="rMarg"/>
+            <dgm:constr type="tMarg"/>
+            <dgm:constr type="bMarg"/>
           </dgm:constrLst>
+          <dgm:ruleLst>
+            <dgm:rule type="primFontSz" val="11" fact="NaN" max="NaN"/>
+            <dgm:rule type="h" val="INF" fact="NaN" max="NaN"/>
+          </dgm:ruleLst>
+        </dgm:layoutNode>
+      </dgm:layoutNode>
+      <dgm:forEach name="Name9" axis="followSib" ptType="sibTrans" cnt="1">
+        <dgm:layoutNode name="sibTrans">
+          <dgm:alg type="sp"/>
+          <dgm:shape xmlns:r="http://schemas.openxmlformats.org/officeDocument/2006/relationships" r:blip="">
+            <dgm:adjLst/>
+          </dgm:shape>
+          <dgm:presOf axis="self"/>
+          <dgm:constrLst/>
           <dgm:ruleLst/>
-          <dgm:layoutNode name="composite">
-            <dgm:alg type="composite"/>
-            <dgm:shape xmlns:r="http://schemas.openxmlformats.org/officeDocument/2006/relationships" r:blip="">
-              <dgm:adjLst/>
-            </dgm:shape>
-            <dgm:presOf/>
-            <dgm:constrLst>
-              <dgm:constr type="w" for="ch" forName="background" refType="w" fact="0.9"/>
-              <dgm:constr type="h" for="ch" forName="background" refType="w" refFor="ch" refForName="background" fact="0.635"/>
-              <dgm:constr type="t" for="ch" forName="background"/>
-              <dgm:constr type="l" for="ch" forName="background"/>
-              <dgm:constr type="w" for="ch" forName="text" refType="w" fact="0.9"/>
-              <dgm:constr type="h" for="ch" forName="text" refType="w" refFor="ch" refForName="text" fact="0.635"/>
-              <dgm:constr type="t" for="ch" forName="text" refType="w" fact="0.095"/>
-              <dgm:constr type="l" for="ch" forName="text" refType="w" fact="0.1"/>
-            </dgm:constrLst>
-            <dgm:ruleLst/>
-            <dgm:layoutNode name="background" styleLbl="node0" moveWith="text">
-              <dgm:alg type="sp"/>
-              <dgm:shape xmlns:r="http://schemas.openxmlformats.org/officeDocument/2006/relationships" type="roundRect" r:blip="">
-                <dgm:adjLst>
-                  <dgm:adj idx="1" val="0.1"/>
-                </dgm:adjLst>
-              </dgm:shape>
-              <dgm:presOf/>
-              <dgm:constrLst/>
-              <dgm:ruleLst/>
-            </dgm:layoutNode>
-            <dgm:layoutNode name="text" styleLbl="fgAcc0">
-              <dgm:varLst>
-                <dgm:chPref val="3"/>
-              </dgm:varLst>
-              <dgm:alg type="tx"/>
-              <dgm:shape xmlns:r="http://schemas.openxmlformats.org/officeDocument/2006/relationships" type="roundRect" r:blip="">
-                <dgm:adjLst>
-                  <dgm:adj idx="1" val="0.1"/>
-                </dgm:adjLst>
-              </dgm:shape>
-              <dgm:presOf axis="self"/>
-              <dgm:constrLst>
-                <dgm:constr type="tMarg" refType="primFontSz" fact="0.3"/>
-                <dgm:constr type="bMarg" refType="primFontSz" fact="0.3"/>
-                <dgm:constr type="lMarg" refType="primFontSz" fact="0.3"/>
-                <dgm:constr type="rMarg" refType="primFontSz" fact="0.3"/>
-              </dgm:constrLst>
-              <dgm:ruleLst>
-                <dgm:rule type="primFontSz" val="5" fact="NaN" max="NaN"/>
-              </dgm:ruleLst>
-            </dgm:layoutNode>
-          </dgm:layoutNode>
-          <dgm:layoutNode name="hierChild2">
-            <dgm:choose name="Name5">
-              <dgm:if name="Name6" func="var" arg="dir" op="equ" val="norm">
-                <dgm:alg type="hierChild">
-                  <dgm:param type="linDir" val="fromL"/>
-                </dgm:alg>
-              </dgm:if>
-              <dgm:else name="Name7">
-                <dgm:alg type="hierChild">
-                  <dgm:param type="linDir" val="fromR"/>
-                </dgm:alg>
-              </dgm:else>
-            </dgm:choose>
-            <dgm:shape xmlns:r="http://schemas.openxmlformats.org/officeDocument/2006/relationships" r:blip="">
-              <dgm:adjLst/>
-            </dgm:shape>
-            <dgm:presOf/>
-            <dgm:constrLst/>
-            <dgm:ruleLst/>
-            <dgm:forEach name="Name8" axis="ch">
-              <dgm:forEach name="Name9" axis="self" ptType="parTrans" cnt="1">
-                <dgm:layoutNode name="Name10">
-                  <dgm:alg type="conn">
-                    <dgm:param type="dim" val="1D"/>
-                    <dgm:param type="endSty" val="noArr"/>
-                    <dgm:param type="connRout" val="bend"/>
-                    <dgm:param type="bendPt" val="end"/>
-                    <dgm:param type="begPts" val="bCtr"/>
-                    <dgm:param type="endPts" val="tCtr"/>
-                    <dgm:param type="srcNode" val="background"/>
-                    <dgm:param type="dstNode" val="background2"/>
-                  </dgm:alg>
-                  <dgm:shape xmlns:r="http://schemas.openxmlformats.org/officeDocument/2006/relationships" type="conn" r:blip="" zOrderOff="-999">
-                    <dgm:adjLst/>
-                  </dgm:shape>
-                  <dgm:presOf axis="self"/>
-                  <dgm:constrLst>
-                    <dgm:constr type="begPad"/>
-                    <dgm:constr type="endPad"/>
-                  </dgm:constrLst>
-                  <dgm:ruleLst/>
-                </dgm:layoutNode>
-              </dgm:forEach>
-              <dgm:forEach name="Name11" axis="self" ptType="node">
-                <dgm:layoutNode name="hierRoot2">
-                  <dgm:alg type="hierRoot"/>
-                  <dgm:shape xmlns:r="http://schemas.openxmlformats.org/officeDocument/2006/relationships" r:blip="">
-                    <dgm:adjLst/>
-                  </dgm:shape>
-                  <dgm:presOf/>
-                  <dgm:constrLst>
-                    <dgm:constr type="bendDist" for="des" ptType="parTrans" refType="sp" fact="0.5"/>
-                  </dgm:constrLst>
-                  <dgm:ruleLst/>
-                  <dgm:layoutNode name="composite2">
-                    <dgm:alg type="composite"/>
-                    <dgm:shape xmlns:r="http://schemas.openxmlformats.org/officeDocument/2006/relationships" r:blip="">
-                      <dgm:adjLst/>
-                    </dgm:shape>
-                    <dgm:presOf/>
-                    <dgm:constrLst>
-                      <dgm:constr type="w" for="ch" forName="background2" refType="w" fact="0.9"/>
-                      <dgm:constr type="h" for="ch" forName="background2" refType="w" refFor="ch" refForName="background2" fact="0.635"/>
-                      <dgm:constr type="t" for="ch" forName="background2"/>
-                      <dgm:constr type="l" for="ch" forName="background2"/>
-                      <dgm:constr type="w" for="ch" forName="text2" refType="w" fact="0.9"/>
-                      <dgm:constr type="h" for="ch" forName="text2" refType="w" refFor="ch" refForName="text2" fact="0.635"/>
-                      <dgm:constr type="t" for="ch" forName="text2" refType="w" fact="0.095"/>
-                      <dgm:constr type="l" for="ch" forName="text2" refType="w" fact="0.1"/>
-                    </dgm:constrLst>
-                    <dgm:ruleLst/>
-                    <dgm:layoutNode name="background2" moveWith="text2">
-                      <dgm:alg type="sp"/>
-                      <dgm:shape xmlns:r="http://schemas.openxmlformats.org/officeDocument/2006/relationships" type="roundRect" r:blip="">
-                        <dgm:adjLst>
-                          <dgm:adj idx="1" val="0.1"/>
-                        </dgm:adjLst>
-                      </dgm:shape>
-                      <dgm:presOf/>
-                      <dgm:constrLst/>
-                      <dgm:ruleLst/>
-                    </dgm:layoutNode>
-                    <dgm:layoutNode name="text2" styleLbl="fgAcc2">
-                      <dgm:varLst>
-                        <dgm:chPref val="3"/>
-                      </dgm:varLst>
-                      <dgm:alg type="tx"/>
-                      <dgm:shape xmlns:r="http://schemas.openxmlformats.org/officeDocument/2006/relationships" type="roundRect" r:blip="">
-                        <dgm:adjLst>
-                          <dgm:adj idx="1" val="0.1"/>
-                        </dgm:adjLst>
-                      </dgm:shape>
-                      <dgm:presOf axis="self"/>
-                      <dgm:constrLst>
-                        <dgm:constr type="tMarg" refType="primFontSz" fact="0.3"/>
-                        <dgm:constr type="bMarg" refType="primFontSz" fact="0.3"/>
-                        <dgm:constr type="lMarg" refType="primFontSz" fact="0.3"/>
-                        <dgm:constr type="rMarg" refType="primFontSz" fact="0.3"/>
-                      </dgm:constrLst>
-                      <dgm:ruleLst>
-                        <dgm:rule type="primFontSz" val="5" fact="NaN" max="NaN"/>
-                      </dgm:ruleLst>
-                    </dgm:layoutNode>
-                  </dgm:layoutNode>
-                  <dgm:layoutNode name="hierChild3">
-                    <dgm:choose name="Name12">
-                      <dgm:if name="Name13" func="var" arg="dir" op="equ" val="norm">
-                        <dgm:alg type="hierChild">
-                          <dgm:param type="linDir" val="fromL"/>
-                        </dgm:alg>
-                      </dgm:if>
-                      <dgm:else name="Name14">
-                        <dgm:alg type="hierChild">
-                          <dgm:param type="linDir" val="fromR"/>
-                        </dgm:alg>
-                      </dgm:else>
-                    </dgm:choose>
-                    <dgm:shape xmlns:r="http://schemas.openxmlformats.org/officeDocument/2006/relationships" r:blip="">
-                      <dgm:adjLst/>
-                    </dgm:shape>
-                    <dgm:presOf/>
-                    <dgm:constrLst/>
-                    <dgm:ruleLst/>
-                    <dgm:forEach name="Name15" axis="ch">
-                      <dgm:forEach name="Name16" axis="self" ptType="parTrans" cnt="1">
-                        <dgm:layoutNode name="Name17">
-                          <dgm:alg type="conn">
-                            <dgm:param type="dim" val="1D"/>
-                            <dgm:param type="endSty" val="noArr"/>
-                            <dgm:param type="connRout" val="bend"/>
-                            <dgm:param type="bendPt" val="end"/>
-                            <dgm:param type="begPts" val="bCtr"/>
-                            <dgm:param type="endPts" val="tCtr"/>
-                            <dgm:param type="srcNode" val="background2"/>
-                            <dgm:param type="dstNode" val="background3"/>
-                          </dgm:alg>
-                          <dgm:shape xmlns:r="http://schemas.openxmlformats.org/officeDocument/2006/relationships" type="conn" r:blip="" zOrderOff="-999">
-                            <dgm:adjLst/>
-                          </dgm:shape>
-                          <dgm:presOf axis="self"/>
-                          <dgm:constrLst>
-                            <dgm:constr type="begPad"/>
-                            <dgm:constr type="endPad"/>
-                          </dgm:constrLst>
-                          <dgm:ruleLst/>
-                        </dgm:layoutNode>
-                      </dgm:forEach>
-                      <dgm:forEach name="Name18" axis="self" ptType="node">
-                        <dgm:layoutNode name="hierRoot3">
-                          <dgm:alg type="hierRoot"/>
-                          <dgm:shape xmlns:r="http://schemas.openxmlformats.org/officeDocument/2006/relationships" r:blip="">
-                            <dgm:adjLst/>
-                          </dgm:shape>
-                          <dgm:presOf/>
-                          <dgm:constrLst>
-                            <dgm:constr type="bendDist" for="des" ptType="parTrans" refType="sp" fact="0.5"/>
-                          </dgm:constrLst>
-                          <dgm:ruleLst/>
-                          <dgm:layoutNode name="composite3">
-                            <dgm:alg type="composite"/>
-                            <dgm:shape xmlns:r="http://schemas.openxmlformats.org/officeDocument/2006/relationships" r:blip="">
-                              <dgm:adjLst/>
-                            </dgm:shape>
-                            <dgm:presOf/>
-                            <dgm:constrLst>
-                              <dgm:constr type="w" for="ch" forName="background3" refType="w" fact="0.9"/>
-                              <dgm:constr type="h" for="ch" forName="background3" refType="w" refFor="ch" refForName="background3" fact="0.635"/>
-                              <dgm:constr type="t" for="ch" forName="background3"/>
-                              <dgm:constr type="l" for="ch" forName="background3"/>
-                              <dgm:constr type="w" for="ch" forName="text3" refType="w" fact="0.9"/>
-                              <dgm:constr type="h" for="ch" forName="text3" refType="w" refFor="ch" refForName="text3" fact="0.635"/>
-                              <dgm:constr type="t" for="ch" forName="text3" refType="w" fact="0.095"/>
-                              <dgm:constr type="l" for="ch" forName="text3" refType="w" fact="0.1"/>
-                            </dgm:constrLst>
-                            <dgm:ruleLst/>
-                            <dgm:layoutNode name="background3" moveWith="text3">
-                              <dgm:alg type="sp"/>
-                              <dgm:shape xmlns:r="http://schemas.openxmlformats.org/officeDocument/2006/relationships" type="roundRect" r:blip="">
-                                <dgm:adjLst>
-                                  <dgm:adj idx="1" val="0.1"/>
-                                </dgm:adjLst>
-                              </dgm:shape>
-                              <dgm:presOf/>
-                              <dgm:constrLst/>
-                              <dgm:ruleLst/>
-                            </dgm:layoutNode>
-                            <dgm:layoutNode name="text3" styleLbl="fgAcc3">
-                              <dgm:varLst>
-                                <dgm:chPref val="3"/>
-                              </dgm:varLst>
-                              <dgm:alg type="tx"/>
-                              <dgm:shape xmlns:r="http://schemas.openxmlformats.org/officeDocument/2006/relationships" type="roundRect" r:blip="">
-                                <dgm:adjLst>
-                                  <dgm:adj idx="1" val="0.1"/>
-                                </dgm:adjLst>
-                              </dgm:shape>
-                              <dgm:presOf axis="self"/>
-                              <dgm:constrLst>
-                                <dgm:constr type="tMarg" refType="primFontSz" fact="0.3"/>
-                                <dgm:constr type="bMarg" refType="primFontSz" fact="0.3"/>
-                                <dgm:constr type="lMarg" refType="primFontSz" fact="0.3"/>
-                                <dgm:constr type="rMarg" refType="primFontSz" fact="0.3"/>
-                              </dgm:constrLst>
-                              <dgm:ruleLst>
-                                <dgm:rule type="primFontSz" val="5" fact="NaN" max="NaN"/>
-                              </dgm:ruleLst>
-                            </dgm:layoutNode>
-                          </dgm:layoutNode>
-                          <dgm:layoutNode name="hierChild4">
-                            <dgm:choose name="Name19">
-                              <dgm:if name="Name20" func="var" arg="dir" op="equ" val="norm">
-                                <dgm:alg type="hierChild">
-                                  <dgm:param type="linDir" val="fromL"/>
-                                </dgm:alg>
-                              </dgm:if>
-                              <dgm:else name="Name21">
-                                <dgm:alg type="hierChild">
-                                  <dgm:param type="linDir" val="fromR"/>
-                                </dgm:alg>
-                              </dgm:else>
-                            </dgm:choose>
-                            <dgm:shape xmlns:r="http://schemas.openxmlformats.org/officeDocument/2006/relationships" r:blip="">
-                              <dgm:adjLst/>
-                            </dgm:shape>
-                            <dgm:presOf/>
-                            <dgm:constrLst/>
-                            <dgm:ruleLst/>
-                            <dgm:forEach name="repeat" axis="ch">
-                              <dgm:forEach name="Name22" axis="self" ptType="parTrans" cnt="1">
-                                <dgm:layoutNode name="Name23">
-                                  <dgm:choose name="Name24">
-                                    <dgm:if name="Name25" axis="self" func="depth" op="lte" val="4">
-                                      <dgm:alg type="conn">
-                                        <dgm:param type="dim" val="1D"/>
-                                        <dgm:param type="endSty" val="noArr"/>
-                                        <dgm:param type="connRout" val="bend"/>
-                                        <dgm:param type="bendPt" val="end"/>
-                                        <dgm:param type="begPts" val="bCtr"/>
-                                        <dgm:param type="endPts" val="tCtr"/>
-                                        <dgm:param type="srcNode" val="background3"/>
-                                        <dgm:param type="dstNode" val="background4"/>
-                                      </dgm:alg>
-                                    </dgm:if>
-                                    <dgm:else name="Name26">
-                                      <dgm:alg type="conn">
-                                        <dgm:param type="dim" val="1D"/>
-                                        <dgm:param type="endSty" val="noArr"/>
-                                        <dgm:param type="connRout" val="bend"/>
-                                        <dgm:param type="bendPt" val="end"/>
-                                        <dgm:param type="begPts" val="bCtr"/>
-                                        <dgm:param type="endPts" val="tCtr"/>
-                                        <dgm:param type="srcNode" val="background4"/>
-                                        <dgm:param type="dstNode" val="background4"/>
-                                      </dgm:alg>
-                                    </dgm:else>
-                                  </dgm:choose>
-                                  <dgm:shape xmlns:r="http://schemas.openxmlformats.org/officeDocument/2006/relationships" type="conn" r:blip="" zOrderOff="-999">
-                                    <dgm:adjLst/>
-                                  </dgm:shape>
-                                  <dgm:presOf axis="self"/>
-                                  <dgm:constrLst>
-                                    <dgm:constr type="begPad"/>
-                                    <dgm:constr type="endPad"/>
-                                  </dgm:constrLst>
-                                  <dgm:ruleLst/>
-                                </dgm:layoutNode>
-                              </dgm:forEach>
-                              <dgm:forEach name="Name27" axis="self" ptType="node">
-                                <dgm:layoutNode name="hierRoot4">
-                                  <dgm:alg type="hierRoot"/>
-                                  <dgm:shape xmlns:r="http://schemas.openxmlformats.org/officeDocument/2006/relationships" r:blip="">
-                                    <dgm:adjLst/>
-                                  </dgm:shape>
-                                  <dgm:presOf/>
-                                  <dgm:constrLst>
-                                    <dgm:constr type="bendDist" for="des" ptType="parTrans" refType="sp" fact="0.5"/>
-                                  </dgm:constrLst>
-                                  <dgm:ruleLst/>
-                                  <dgm:layoutNode name="composite4">
-                                    <dgm:alg type="composite"/>
-                                    <dgm:shape xmlns:r="http://schemas.openxmlformats.org/officeDocument/2006/relationships" r:blip="">
-                                      <dgm:adjLst/>
-                                    </dgm:shape>
-                                    <dgm:presOf/>
-                                    <dgm:constrLst>
-                                      <dgm:constr type="w" for="ch" forName="background4" refType="w" fact="0.9"/>
-                                      <dgm:constr type="h" for="ch" forName="background4" refType="w" refFor="ch" refForName="background4" fact="0.635"/>
-                                      <dgm:constr type="t" for="ch" forName="background4"/>
-                                      <dgm:constr type="l" for="ch" forName="background4"/>
-                                      <dgm:constr type="w" for="ch" forName="text4" refType="w" fact="0.9"/>
-                                      <dgm:constr type="h" for="ch" forName="text4" refType="w" refFor="ch" refForName="text4" fact="0.635"/>
-                                      <dgm:constr type="t" for="ch" forName="text4" refType="w" fact="0.095"/>
-                                      <dgm:constr type="l" for="ch" forName="text4" refType="w" fact="0.1"/>
-                                    </dgm:constrLst>
-                                    <dgm:ruleLst/>
-                                    <dgm:layoutNode name="background4" moveWith="text4">
-                                      <dgm:alg type="sp"/>
-                                      <dgm:shape xmlns:r="http://schemas.openxmlformats.org/officeDocument/2006/relationships" type="roundRect" r:blip="">
-                                        <dgm:adjLst>
-                                          <dgm:adj idx="1" val="0.1"/>
-                                        </dgm:adjLst>
-                                      </dgm:shape>
-                                      <dgm:presOf/>
-                                      <dgm:constrLst/>
-                                      <dgm:ruleLst/>
-                                    </dgm:layoutNode>
-                                    <dgm:layoutNode name="text4" styleLbl="fgAcc4">
-                                      <dgm:varLst>
-                                        <dgm:chPref val="3"/>
-                                      </dgm:varLst>
-                                      <dgm:alg type="tx"/>
-                                      <dgm:shape xmlns:r="http://schemas.openxmlformats.org/officeDocument/2006/relationships" type="roundRect" r:blip="">
-                                        <dgm:adjLst>
-                                          <dgm:adj idx="1" val="0.1"/>
-                                        </dgm:adjLst>
-                                      </dgm:shape>
-                                      <dgm:presOf axis="self"/>
-                                      <dgm:constrLst>
-                                        <dgm:constr type="tMarg" refType="primFontSz" fact="0.3"/>
-                                        <dgm:constr type="bMarg" refType="primFontSz" fact="0.3"/>
-                                        <dgm:constr type="lMarg" refType="primFontSz" fact="0.3"/>
-                                        <dgm:constr type="rMarg" refType="primFontSz" fact="0.3"/>
-                                      </dgm:constrLst>
-                                      <dgm:ruleLst>
-                                        <dgm:rule type="primFontSz" val="5" fact="NaN" max="NaN"/>
-                                      </dgm:ruleLst>
-                                    </dgm:layoutNode>
-                                  </dgm:layoutNode>
-                                  <dgm:layoutNode name="hierChild5">
-                                    <dgm:choose name="Name28">
-                                      <dgm:if name="Name29" func="var" arg="dir" op="equ" val="norm">
-                                        <dgm:alg type="hierChild">
-                                          <dgm:param type="linDir" val="fromL"/>
-                                        </dgm:alg>
-                                      </dgm:if>
-                                      <dgm:else name="Name30">
-                                        <dgm:alg type="hierChild">
-                                          <dgm:param type="linDir" val="fromR"/>
-                                        </dgm:alg>
-                                      </dgm:else>
-                                    </dgm:choose>
-                                    <dgm:shape xmlns:r="http://schemas.openxmlformats.org/officeDocument/2006/relationships" r:blip="">
-                                      <dgm:adjLst/>
-                                    </dgm:shape>
-                                    <dgm:presOf/>
-                                    <dgm:constrLst/>
-                                    <dgm:ruleLst/>
-                                    <dgm:forEach name="Name31" ref="repeat"/>
-                                  </dgm:layoutNode>
-                                </dgm:layoutNode>
-                              </dgm:forEach>
-                            </dgm:forEach>
-                          </dgm:layoutNode>
-                        </dgm:layoutNode>
-                      </dgm:forEach>
-                    </dgm:forEach>
-                  </dgm:layoutNode>
-                </dgm:layoutNode>
-              </dgm:forEach>
-            </dgm:forEach>
-          </dgm:layoutNode>
         </dgm:layoutNode>
       </dgm:forEach>
     </dgm:forEach>
   </dgm:layoutNode>
+  <dgm:extLst>
+    <a:ext uri="{68A01E43-0DF5-4B5B-8FA6-DAF915123BFB}">
+      <dgm1612:lstStyle xmlns:dgm1612="http://schemas.microsoft.com/office/drawing/2016/12/diagram">
+        <a:lvl1pPr>
+          <a:lnSpc>
+            <a:spcPct val="100000"/>
+          </a:lnSpc>
+          <a:defRPr cap="all"/>
+        </a:lvl1pPr>
+      </dgm1612:lstStyle>
+    </a:ext>
+  </dgm:extLst>
 </dgm:layoutDef>
 </file>
 
@@ -12250,11 +11978,11 @@
 </file>
 
 <file path=ppt/diagrams/quickStyle2.xml><?xml version="1.0" encoding="utf-8"?>
-<dgm:styleDef xmlns:dgm="http://schemas.openxmlformats.org/drawingml/2006/diagram" xmlns:a="http://schemas.openxmlformats.org/drawingml/2006/main" uniqueId="urn:microsoft.com/office/officeart/2005/8/quickstyle/simple4">
+<dgm:styleDef xmlns:dgm="http://schemas.openxmlformats.org/drawingml/2006/diagram" xmlns:a="http://schemas.openxmlformats.org/drawingml/2006/main" uniqueId="urn:microsoft.com/office/officeart/2005/8/quickstyle/simple1">
   <dgm:title val=""/>
   <dgm:desc val=""/>
   <dgm:catLst>
-    <dgm:cat type="simple" pri="10400"/>
+    <dgm:cat type="simple" pri="10100"/>
   </dgm:catLst>
   <dgm:scene3d>
     <a:camera prst="orthographicFront"/>
@@ -12268,13 +11996,13 @@
     <dgm:sp3d/>
     <dgm:txPr/>
     <dgm:style>
-      <a:lnRef idx="0">
+      <a:lnRef idx="2">
         <a:scrgbClr r="0" g="0" b="0"/>
       </a:lnRef>
-      <a:fillRef idx="3">
+      <a:fillRef idx="1">
         <a:scrgbClr r="0" g="0" b="0"/>
       </a:fillRef>
-      <a:effectRef idx="2">
+      <a:effectRef idx="0">
         <a:scrgbClr r="0" g="0" b="0"/>
       </a:effectRef>
       <a:fontRef idx="minor">
@@ -12290,13 +12018,13 @@
     <dgm:sp3d/>
     <dgm:txPr/>
     <dgm:style>
-      <a:lnRef idx="1">
+      <a:lnRef idx="2">
         <a:scrgbClr r="0" g="0" b="0"/>
       </a:lnRef>
-      <a:fillRef idx="3">
+      <a:fillRef idx="1">
         <a:scrgbClr r="0" g="0" b="0"/>
       </a:fillRef>
-      <a:effectRef idx="2">
+      <a:effectRef idx="0">
         <a:scrgbClr r="0" g="0" b="0"/>
       </a:effectRef>
       <a:fontRef idx="minor">
@@ -12312,10 +12040,10 @@
     <dgm:sp3d/>
     <dgm:txPr/>
     <dgm:style>
-      <a:lnRef idx="0">
+      <a:lnRef idx="2">
         <a:scrgbClr r="0" g="0" b="0"/>
       </a:lnRef>
-      <a:fillRef idx="3">
+      <a:fillRef idx="1">
         <a:scrgbClr r="0" g="0" b="0"/>
       </a:fillRef>
       <a:effectRef idx="0">
@@ -12334,13 +12062,13 @@
     <dgm:sp3d/>
     <dgm:txPr/>
     <dgm:style>
-      <a:lnRef idx="1">
+      <a:lnRef idx="2">
         <a:scrgbClr r="0" g="0" b="0"/>
       </a:lnRef>
-      <a:fillRef idx="3">
+      <a:fillRef idx="1">
         <a:scrgbClr r="0" g="0" b="0"/>
       </a:fillRef>
-      <a:effectRef idx="2">
+      <a:effectRef idx="0">
         <a:scrgbClr r="0" g="0" b="0"/>
       </a:effectRef>
       <a:fontRef idx="minor">
@@ -12356,13 +12084,13 @@
     <dgm:sp3d/>
     <dgm:txPr/>
     <dgm:style>
-      <a:lnRef idx="0">
+      <a:lnRef idx="2">
         <a:scrgbClr r="0" g="0" b="0"/>
       </a:lnRef>
-      <a:fillRef idx="3">
+      <a:fillRef idx="1">
         <a:scrgbClr r="0" g="0" b="0"/>
       </a:fillRef>
-      <a:effectRef idx="2">
+      <a:effectRef idx="0">
         <a:scrgbClr r="0" g="0" b="0"/>
       </a:effectRef>
       <a:fontRef idx="minor">
@@ -12378,13 +12106,13 @@
     <dgm:sp3d/>
     <dgm:txPr/>
     <dgm:style>
-      <a:lnRef idx="0">
+      <a:lnRef idx="2">
         <a:scrgbClr r="0" g="0" b="0"/>
       </a:lnRef>
-      <a:fillRef idx="3">
+      <a:fillRef idx="1">
         <a:scrgbClr r="0" g="0" b="0"/>
       </a:fillRef>
-      <a:effectRef idx="2">
+      <a:effectRef idx="0">
         <a:scrgbClr r="0" g="0" b="0"/>
       </a:effectRef>
       <a:fontRef idx="minor">
@@ -12400,13 +12128,13 @@
     <dgm:sp3d/>
     <dgm:txPr/>
     <dgm:style>
-      <a:lnRef idx="0">
+      <a:lnRef idx="2">
         <a:scrgbClr r="0" g="0" b="0"/>
       </a:lnRef>
-      <a:fillRef idx="3">
+      <a:fillRef idx="1">
         <a:scrgbClr r="0" g="0" b="0"/>
       </a:fillRef>
-      <a:effectRef idx="2">
+      <a:effectRef idx="0">
         <a:scrgbClr r="0" g="0" b="0"/>
       </a:effectRef>
       <a:fontRef idx="minor">
@@ -12422,13 +12150,13 @@
     <dgm:sp3d/>
     <dgm:txPr/>
     <dgm:style>
-      <a:lnRef idx="0">
+      <a:lnRef idx="2">
         <a:scrgbClr r="0" g="0" b="0"/>
       </a:lnRef>
-      <a:fillRef idx="3">
+      <a:fillRef idx="1">
         <a:scrgbClr r="0" g="0" b="0"/>
       </a:fillRef>
-      <a:effectRef idx="2">
+      <a:effectRef idx="0">
         <a:scrgbClr r="0" g="0" b="0"/>
       </a:effectRef>
       <a:fontRef idx="minor">
@@ -12444,13 +12172,13 @@
     <dgm:sp3d/>
     <dgm:txPr/>
     <dgm:style>
-      <a:lnRef idx="0">
+      <a:lnRef idx="2">
         <a:scrgbClr r="0" g="0" b="0"/>
       </a:lnRef>
       <a:fillRef idx="1">
         <a:scrgbClr r="0" g="0" b="0"/>
       </a:fillRef>
-      <a:effectRef idx="2">
+      <a:effectRef idx="0">
         <a:scrgbClr r="0" g="0" b="0"/>
       </a:effectRef>
       <a:fontRef idx="minor"/>
@@ -12464,13 +12192,13 @@
     <dgm:sp3d/>
     <dgm:txPr/>
     <dgm:style>
-      <a:lnRef idx="0">
+      <a:lnRef idx="2">
         <a:scrgbClr r="0" g="0" b="0"/>
       </a:lnRef>
       <a:fillRef idx="1">
         <a:scrgbClr r="0" g="0" b="0"/>
       </a:fillRef>
-      <a:effectRef idx="2">
+      <a:effectRef idx="0">
         <a:scrgbClr r="0" g="0" b="0"/>
       </a:effectRef>
       <a:fontRef idx="minor"/>
@@ -12484,13 +12212,13 @@
     <dgm:sp3d/>
     <dgm:txPr/>
     <dgm:style>
-      <a:lnRef idx="0">
+      <a:lnRef idx="2">
         <a:scrgbClr r="0" g="0" b="0"/>
       </a:lnRef>
       <a:fillRef idx="1">
         <a:scrgbClr r="0" g="0" b="0"/>
       </a:fillRef>
-      <a:effectRef idx="2">
+      <a:effectRef idx="0">
         <a:scrgbClr r="0" g="0" b="0"/>
       </a:effectRef>
       <a:fontRef idx="minor"/>
@@ -12507,10 +12235,10 @@
       <a:lnRef idx="0">
         <a:scrgbClr r="0" g="0" b="0"/>
       </a:lnRef>
-      <a:fillRef idx="3">
+      <a:fillRef idx="1">
         <a:scrgbClr r="0" g="0" b="0"/>
       </a:fillRef>
-      <a:effectRef idx="2">
+      <a:effectRef idx="0">
         <a:scrgbClr r="0" g="0" b="0"/>
       </a:effectRef>
       <a:fontRef idx="minor">
@@ -12529,10 +12257,10 @@
       <a:lnRef idx="0">
         <a:scrgbClr r="0" g="0" b="0"/>
       </a:lnRef>
-      <a:fillRef idx="3">
+      <a:fillRef idx="1">
         <a:scrgbClr r="0" g="0" b="0"/>
       </a:fillRef>
-      <a:effectRef idx="2">
+      <a:effectRef idx="0">
         <a:scrgbClr r="0" g="0" b="0"/>
       </a:effectRef>
       <a:fontRef idx="minor">
@@ -12551,10 +12279,10 @@
       <a:lnRef idx="0">
         <a:scrgbClr r="0" g="0" b="0"/>
       </a:lnRef>
-      <a:fillRef idx="3">
+      <a:fillRef idx="1">
         <a:scrgbClr r="0" g="0" b="0"/>
       </a:fillRef>
-      <a:effectRef idx="2">
+      <a:effectRef idx="0">
         <a:scrgbClr r="0" g="0" b="0"/>
       </a:effectRef>
       <a:fontRef idx="minor">
@@ -12596,7 +12324,7 @@
       <a:fillRef idx="1">
         <a:scrgbClr r="0" g="0" b="0"/>
       </a:fillRef>
-      <a:effectRef idx="1">
+      <a:effectRef idx="0">
         <a:scrgbClr r="0" g="0" b="0"/>
       </a:effectRef>
       <a:fontRef idx="minor"/>
@@ -12610,13 +12338,13 @@
     <dgm:sp3d/>
     <dgm:txPr/>
     <dgm:style>
-      <a:lnRef idx="0">
+      <a:lnRef idx="2">
         <a:scrgbClr r="0" g="0" b="0"/>
       </a:lnRef>
-      <a:fillRef idx="3">
+      <a:fillRef idx="1">
         <a:scrgbClr r="0" g="0" b="0"/>
       </a:fillRef>
-      <a:effectRef idx="2">
+      <a:effectRef idx="0">
         <a:scrgbClr r="0" g="0" b="0"/>
       </a:effectRef>
       <a:fontRef idx="minor">
@@ -12632,13 +12360,13 @@
     <dgm:sp3d/>
     <dgm:txPr/>
     <dgm:style>
-      <a:lnRef idx="0">
+      <a:lnRef idx="2">
         <a:scrgbClr r="0" g="0" b="0"/>
       </a:lnRef>
-      <a:fillRef idx="3">
+      <a:fillRef idx="1">
         <a:scrgbClr r="0" g="0" b="0"/>
       </a:fillRef>
-      <a:effectRef idx="2">
+      <a:effectRef idx="0">
         <a:scrgbClr r="0" g="0" b="0"/>
       </a:effectRef>
       <a:fontRef idx="minor">
@@ -12654,13 +12382,13 @@
     <dgm:sp3d/>
     <dgm:txPr/>
     <dgm:style>
-      <a:lnRef idx="0">
+      <a:lnRef idx="2">
         <a:scrgbClr r="0" g="0" b="0"/>
       </a:lnRef>
-      <a:fillRef idx="3">
+      <a:fillRef idx="1">
         <a:scrgbClr r="0" g="0" b="0"/>
       </a:fillRef>
-      <a:effectRef idx="2">
+      <a:effectRef idx="0">
         <a:scrgbClr r="0" g="0" b="0"/>
       </a:effectRef>
       <a:fontRef idx="minor">
@@ -12676,13 +12404,13 @@
     <dgm:sp3d/>
     <dgm:txPr/>
     <dgm:style>
-      <a:lnRef idx="0">
+      <a:lnRef idx="2">
         <a:scrgbClr r="0" g="0" b="0"/>
       </a:lnRef>
-      <a:fillRef idx="3">
+      <a:fillRef idx="1">
         <a:scrgbClr r="0" g="0" b="0"/>
       </a:fillRef>
-      <a:effectRef idx="2">
+      <a:effectRef idx="0">
         <a:scrgbClr r="0" g="0" b="0"/>
       </a:effectRef>
       <a:fontRef idx="minor">
@@ -12698,13 +12426,13 @@
     <dgm:sp3d/>
     <dgm:txPr/>
     <dgm:style>
-      <a:lnRef idx="0">
+      <a:lnRef idx="2">
         <a:scrgbClr r="0" g="0" b="0"/>
       </a:lnRef>
-      <a:fillRef idx="3">
+      <a:fillRef idx="1">
         <a:scrgbClr r="0" g="0" b="0"/>
       </a:fillRef>
-      <a:effectRef idx="2">
+      <a:effectRef idx="0">
         <a:scrgbClr r="0" g="0" b="0"/>
       </a:effectRef>
       <a:fontRef idx="minor">
@@ -12720,13 +12448,13 @@
     <dgm:sp3d/>
     <dgm:txPr/>
     <dgm:style>
-      <a:lnRef idx="0">
+      <a:lnRef idx="2">
         <a:scrgbClr r="0" g="0" b="0"/>
       </a:lnRef>
-      <a:fillRef idx="3">
+      <a:fillRef idx="1">
         <a:scrgbClr r="0" g="0" b="0"/>
       </a:fillRef>
-      <a:effectRef idx="2">
+      <a:effectRef idx="0">
         <a:scrgbClr r="0" g="0" b="0"/>
       </a:effectRef>
       <a:fontRef idx="minor">
@@ -12742,13 +12470,13 @@
     <dgm:sp3d/>
     <dgm:txPr/>
     <dgm:style>
-      <a:lnRef idx="0">
+      <a:lnRef idx="2">
         <a:scrgbClr r="0" g="0" b="0"/>
       </a:lnRef>
-      <a:fillRef idx="3">
+      <a:fillRef idx="1">
         <a:scrgbClr r="0" g="0" b="0"/>
       </a:fillRef>
-      <a:effectRef idx="2">
+      <a:effectRef idx="0">
         <a:scrgbClr r="0" g="0" b="0"/>
       </a:effectRef>
       <a:fontRef idx="minor">
@@ -12764,13 +12492,13 @@
     <dgm:sp3d/>
     <dgm:txPr/>
     <dgm:style>
-      <a:lnRef idx="1">
+      <a:lnRef idx="2">
         <a:scrgbClr r="0" g="0" b="0"/>
       </a:lnRef>
-      <a:fillRef idx="3">
+      <a:fillRef idx="1">
         <a:scrgbClr r="0" g="0" b="0"/>
       </a:fillRef>
-      <a:effectRef idx="2">
+      <a:effectRef idx="0">
         <a:scrgbClr r="0" g="0" b="0"/>
       </a:effectRef>
       <a:fontRef idx="minor">
@@ -12786,13 +12514,13 @@
     <dgm:sp3d/>
     <dgm:txPr/>
     <dgm:style>
-      <a:lnRef idx="1">
+      <a:lnRef idx="2">
         <a:scrgbClr r="0" g="0" b="0"/>
       </a:lnRef>
-      <a:fillRef idx="3">
+      <a:fillRef idx="1">
         <a:scrgbClr r="0" g="0" b="0"/>
       </a:fillRef>
-      <a:effectRef idx="2">
+      <a:effectRef idx="0">
         <a:scrgbClr r="0" g="0" b="0"/>
       </a:effectRef>
       <a:fontRef idx="minor">
@@ -12808,7 +12536,7 @@
     <dgm:sp3d/>
     <dgm:txPr/>
     <dgm:style>
-      <a:lnRef idx="1">
+      <a:lnRef idx="2">
         <a:scrgbClr r="0" g="0" b="0"/>
       </a:lnRef>
       <a:fillRef idx="0">
@@ -12828,7 +12556,7 @@
     <dgm:sp3d/>
     <dgm:txPr/>
     <dgm:style>
-      <a:lnRef idx="1">
+      <a:lnRef idx="2">
         <a:scrgbClr r="0" g="0" b="0"/>
       </a:lnRef>
       <a:fillRef idx="0">
@@ -12848,7 +12576,7 @@
     <dgm:sp3d/>
     <dgm:txPr/>
     <dgm:style>
-      <a:lnRef idx="1">
+      <a:lnRef idx="2">
         <a:scrgbClr r="0" g="0" b="0"/>
       </a:lnRef>
       <a:fillRef idx="0">
@@ -12868,7 +12596,7 @@
     <dgm:sp3d/>
     <dgm:txPr/>
     <dgm:style>
-      <a:lnRef idx="1">
+      <a:lnRef idx="2">
         <a:scrgbClr r="0" g="0" b="0"/>
       </a:lnRef>
       <a:fillRef idx="0">
@@ -12888,7 +12616,7 @@
     <dgm:sp3d/>
     <dgm:txPr/>
     <dgm:style>
-      <a:lnRef idx="1">
+      <a:lnRef idx="2">
         <a:scrgbClr r="0" g="0" b="0"/>
       </a:lnRef>
       <a:fillRef idx="1">
@@ -12908,7 +12636,7 @@
     <dgm:sp3d/>
     <dgm:txPr/>
     <dgm:style>
-      <a:lnRef idx="1">
+      <a:lnRef idx="2">
         <a:scrgbClr r="0" g="0" b="0"/>
       </a:lnRef>
       <a:fillRef idx="1">
@@ -12928,7 +12656,7 @@
     <dgm:sp3d/>
     <dgm:txPr/>
     <dgm:style>
-      <a:lnRef idx="1">
+      <a:lnRef idx="2">
         <a:scrgbClr r="0" g="0" b="0"/>
       </a:lnRef>
       <a:fillRef idx="1">
@@ -12968,7 +12696,7 @@
     <dgm:sp3d/>
     <dgm:txPr/>
     <dgm:style>
-      <a:lnRef idx="1">
+      <a:lnRef idx="2">
         <a:scrgbClr r="0" g="0" b="0"/>
       </a:lnRef>
       <a:fillRef idx="1">
@@ -12988,7 +12716,7 @@
     <dgm:sp3d/>
     <dgm:txPr/>
     <dgm:style>
-      <a:lnRef idx="1">
+      <a:lnRef idx="2">
         <a:scrgbClr r="0" g="0" b="0"/>
       </a:lnRef>
       <a:fillRef idx="1">
@@ -13008,7 +12736,7 @@
     <dgm:sp3d/>
     <dgm:txPr/>
     <dgm:style>
-      <a:lnRef idx="1">
+      <a:lnRef idx="2">
         <a:scrgbClr r="0" g="0" b="0"/>
       </a:lnRef>
       <a:fillRef idx="1">
@@ -13028,7 +12756,7 @@
     <dgm:sp3d/>
     <dgm:txPr/>
     <dgm:style>
-      <a:lnRef idx="1">
+      <a:lnRef idx="2">
         <a:scrgbClr r="0" g="0" b="0"/>
       </a:lnRef>
       <a:fillRef idx="1">
@@ -13048,7 +12776,7 @@
     <dgm:sp3d/>
     <dgm:txPr/>
     <dgm:style>
-      <a:lnRef idx="1">
+      <a:lnRef idx="2">
         <a:scrgbClr r="0" g="0" b="0"/>
       </a:lnRef>
       <a:fillRef idx="1">
@@ -13068,7 +12796,7 @@
     <dgm:sp3d/>
     <dgm:txPr/>
     <dgm:style>
-      <a:lnRef idx="1">
+      <a:lnRef idx="2">
         <a:scrgbClr r="0" g="0" b="0"/>
       </a:lnRef>
       <a:fillRef idx="1">
@@ -13088,7 +12816,7 @@
     <dgm:sp3d/>
     <dgm:txPr/>
     <dgm:style>
-      <a:lnRef idx="1">
+      <a:lnRef idx="2">
         <a:scrgbClr r="0" g="0" b="0"/>
       </a:lnRef>
       <a:fillRef idx="1">
@@ -13108,7 +12836,7 @@
     <dgm:sp3d/>
     <dgm:txPr/>
     <dgm:style>
-      <a:lnRef idx="1">
+      <a:lnRef idx="2">
         <a:scrgbClr r="0" g="0" b="0"/>
       </a:lnRef>
       <a:fillRef idx="1">
@@ -13128,7 +12856,7 @@
     <dgm:sp3d/>
     <dgm:txPr/>
     <dgm:style>
-      <a:lnRef idx="1">
+      <a:lnRef idx="2">
         <a:scrgbClr r="0" g="0" b="0"/>
       </a:lnRef>
       <a:fillRef idx="1">
@@ -13148,7 +12876,7 @@
     <dgm:sp3d/>
     <dgm:txPr/>
     <dgm:style>
-      <a:lnRef idx="1">
+      <a:lnRef idx="2">
         <a:scrgbClr r="0" g="0" b="0"/>
       </a:lnRef>
       <a:fillRef idx="1">
@@ -13168,7 +12896,7 @@
     <dgm:sp3d/>
     <dgm:txPr/>
     <dgm:style>
-      <a:lnRef idx="1">
+      <a:lnRef idx="2">
         <a:scrgbClr r="0" g="0" b="0"/>
       </a:lnRef>
       <a:fillRef idx="1">
@@ -13194,7 +12922,7 @@
       <a:fillRef idx="1">
         <a:scrgbClr r="0" g="0" b="0"/>
       </a:fillRef>
-      <a:effectRef idx="2">
+      <a:effectRef idx="0">
         <a:scrgbClr r="0" g="0" b="0"/>
       </a:effectRef>
       <a:fontRef idx="minor"/>
@@ -13214,7 +12942,7 @@
       <a:fillRef idx="1">
         <a:scrgbClr r="0" g="0" b="0"/>
       </a:fillRef>
-      <a:effectRef idx="2">
+      <a:effectRef idx="0">
         <a:scrgbClr r="0" g="0" b="0"/>
       </a:effectRef>
       <a:fontRef idx="minor"/>
@@ -13248,13 +12976,13 @@
     <dgm:sp3d/>
     <dgm:txPr/>
     <dgm:style>
-      <a:lnRef idx="0">
+      <a:lnRef idx="2">
         <a:scrgbClr r="0" g="0" b="0"/>
       </a:lnRef>
-      <a:fillRef idx="3">
+      <a:fillRef idx="1">
         <a:scrgbClr r="0" g="0" b="0"/>
       </a:fillRef>
-      <a:effectRef idx="2">
+      <a:effectRef idx="0">
         <a:scrgbClr r="0" g="0" b="0"/>
       </a:effectRef>
       <a:fontRef idx="minor"/>
@@ -24078,6 +23806,71 @@
           </a:p>
         </p:txBody>
       </p:sp>
+      <p:sp>
+        <p:nvSpPr>
+          <p:cNvPr id="16" name="Rectangle 15">
+            <a:extLst>
+              <a:ext uri="{FF2B5EF4-FFF2-40B4-BE49-F238E27FC236}">
+                <a16:creationId xmlns:a16="http://schemas.microsoft.com/office/drawing/2014/main" id="{EFA2AC96-1E47-421C-A03F-F98E354EB4E6}"/>
+              </a:ext>
+              <a:ext uri="{C183D7F6-B498-43B3-948B-1728B52AA6E4}">
+                <adec:decorative xmlns:adec="http://schemas.microsoft.com/office/drawing/2017/decorative" val="1"/>
+              </a:ext>
+            </a:extLst>
+          </p:cNvPr>
+          <p:cNvSpPr>
+            <a:spLocks noGrp="1" noRot="1" noChangeAspect="1" noMove="1" noResize="1" noEditPoints="1" noAdjustHandles="1" noChangeArrowheads="1" noChangeShapeType="1" noTextEdit="1"/>
+          </p:cNvSpPr>
+          <p:nvPr>
+            <p:extLst>
+              <p:ext uri="{386F3935-93C4-4BCD-93E2-E3B085C9AB24}">
+                <p16:designElem xmlns:p16="http://schemas.microsoft.com/office/powerpoint/2015/main" val="1"/>
+              </p:ext>
+            </p:extLst>
+          </p:nvPr>
+        </p:nvSpPr>
+        <p:spPr>
+          <a:xfrm>
+            <a:off x="0" y="2095500"/>
+            <a:ext cx="12192000" cy="4762500"/>
+          </a:xfrm>
+          <a:prstGeom prst="rect">
+            <a:avLst/>
+          </a:prstGeom>
+          <a:solidFill>
+            <a:schemeClr val="bg1">
+              <a:alpha val="50000"/>
+            </a:schemeClr>
+          </a:solidFill>
+          <a:ln>
+            <a:noFill/>
+          </a:ln>
+        </p:spPr>
+        <p:style>
+          <a:lnRef idx="2">
+            <a:schemeClr val="accent1">
+              <a:shade val="50000"/>
+            </a:schemeClr>
+          </a:lnRef>
+          <a:fillRef idx="1001">
+            <a:schemeClr val="dk1"/>
+          </a:fillRef>
+          <a:effectRef idx="0">
+            <a:schemeClr val="accent1"/>
+          </a:effectRef>
+          <a:fontRef idx="minor">
+            <a:schemeClr val="lt1"/>
+          </a:fontRef>
+        </p:style>
+        <p:txBody>
+          <a:bodyPr rtlCol="0" anchor="ctr"/>
+          <a:lstStyle/>
+          <a:p>
+            <a:pPr algn="ctr"/>
+            <a:endParaRPr lang="en-US"/>
+          </a:p>
+        </p:txBody>
+      </p:sp>
       <p:graphicFrame>
         <p:nvGraphicFramePr>
           <p:cNvPr id="11" name="Content Placeholder 2">
@@ -24094,14 +23887,14 @@
             <p:ph idx="1"/>
             <p:extLst>
               <p:ext uri="{D42A27DB-BD31-4B8C-83A1-F6EECF244321}">
-                <p14:modId xmlns:p14="http://schemas.microsoft.com/office/powerpoint/2010/main" val="355744207"/>
+                <p14:modId xmlns:p14="http://schemas.microsoft.com/office/powerpoint/2010/main" val="467677147"/>
               </p:ext>
             </p:extLst>
           </p:nvPr>
         </p:nvGraphicFramePr>
         <p:xfrm>
-          <a:off x="914400" y="2257654"/>
-          <a:ext cx="10353675" cy="3303888"/>
+          <a:off x="914400" y="2417233"/>
+          <a:ext cx="10353675" cy="3305820"/>
         </p:xfrm>
         <a:graphic>
           <a:graphicData uri="http://schemas.openxmlformats.org/drawingml/2006/diagram">
